--- a/deliverables/PlaceIQ_Presentation.pptx
+++ b/deliverables/PlaceIQ_Presentation.pptx
@@ -124,7 +124,7 @@
   <p:extLst>
     <p:ext uri="{521415D9-36F7-43E2-AB2F-B90AF26B5E84}">
       <p14:sectionLst xmlns:p14="http://schemas.microsoft.com/office/powerpoint/2010/main">
-        <p14:section name="M1 · Problem &amp; EER" id="{21361137-f4ac-3670-1ad8-388a2b1c8572}">
+        <p14:section name="M1 · Problem &amp; EER" id="{50932df4-2e47-9ec2-71e1-18d30560c018}">
           <p14:sldIdLst>
             <p14:sldId id="256"/>
             <p14:sldId id="257"/>
@@ -133,14 +133,14 @@
             <p14:sldId id="260"/>
           </p14:sldIdLst>
         </p14:section>
-        <p14:section name="M2 · Schema &amp; normalization" id="{2c5f5e86-dfca-254b-e8df-c684a304528b}">
+        <p14:section name="M2 · Schema &amp; normalization" id="{a1c77df3-face-04e4-83a8-f4bb8621addb}">
           <p14:sldIdLst>
             <p14:sldId id="261"/>
             <p14:sldId id="262"/>
             <p14:sldId id="263"/>
           </p14:sldIdLst>
         </p14:section>
-        <p14:section name="M3 · DDL, data &amp; queries" id="{93c5c595-bb6e-7850-010d-fab82f1829fe}">
+        <p14:section name="M3 · DDL, data &amp; queries" id="{c914741e-1c69-eedc-2233-46c3c83ac2ca}">
           <p14:sldIdLst>
             <p14:sldId id="264"/>
             <p14:sldId id="265"/>
@@ -148,7 +148,7 @@
             <p14:sldId id="267"/>
           </p14:sldIdLst>
         </p14:section>
-        <p14:section name="M4 · Rules, transactions &amp; performance" id="{b2c66745-5d3d-910a-5e2d-46bae883bb2e}">
+        <p14:section name="M4 · Rules, transactions &amp; performance" id="{aa55bc4d-2628-0973-77ae-09618874c3b8}">
           <p14:sldIdLst>
             <p14:sldId id="268"/>
             <p14:sldId id="269"/>
@@ -980,13 +980,13 @@
                 <c:formatCode>General</c:formatCode>
                 <c:ptCount val="3"/>
                 <c:pt idx="0">
-                  <c:v>62.609</c:v>
+                  <c:v>62.654</c:v>
                 </c:pt>
                 <c:pt idx="1">
-                  <c:v>0.041</c:v>
+                  <c:v>0.029</c:v>
                 </c:pt>
                 <c:pt idx="2">
-                  <c:v>0.017</c:v>
+                  <c:v>0.021</c:v>
                 </c:pt>
               </c:numCache>
             </c:numRef>
@@ -2437,7 +2437,7 @@
             <a:r>
               <a:rPr lang="en-US" dirty="0"/>
               <a:t>[M4 · [Member 4] · 13:50–14:15]
-Our live tables are small, so we built a 600,000-row application archive to measure indexing honestly. Without an index, PostgreSQL scans the whole table: 62.6 milliseconds. A composite B-tree on job_id and status: 0.041 milliseconds, about 1,527 times faster. A partial index that only covers open applications is 26 times smaller and faster still.
+Our live tables are small, so we built a 600,000-row application archive to measure indexing honestly. Without an index, PostgreSQL scans the whole table: 62.7 milliseconds. A composite B-tree on job_id and status: 0.029 milliseconds, about 2,160 times faster. A partial index that only covers open applications is 26 times smaller and faster still.
 One lesson surprised us: we expected PostgreSQL 18 to ignore the index for a filter on status alone. It actually used it, but by reading the entire index — 4,383 blocks versus 3. The leading-column rule is about seeking, not about whether the index appears in the plan.</a:t>
             </a:r>
             <a:endParaRPr lang="en-US" dirty="0"/>
@@ -10117,7 +10117,7 @@
                 <a:ea typeface="Cambria" pitchFamily="34" charset="-122"/>
                 <a:cs typeface="Cambria" pitchFamily="34" charset="-120"/>
               </a:rPr>
-              <a:t>1,527× faster</a:t>
+              <a:t>2,160× faster</a:t>
             </a:r>
             <a:endParaRPr lang="en-US" sz="3600" dirty="0"/>
           </a:p>

--- a/deliverables/PlaceIQ_Presentation.pptx
+++ b/deliverables/PlaceIQ_Presentation.pptx
@@ -23,9 +23,11 @@
     <p:sldId id="271" r:id="rId17"/>
     <p:sldId id="272" r:id="rId18"/>
     <p:sldId id="273" r:id="rId19"/>
+    <p:sldId id="274" r:id="rId20"/>
+    <p:sldId id="275" r:id="rId21"/>
   </p:sldIdLst>
   <p:notesMasterIdLst>
-    <p:notesMasterId r:id="rId20"/>
+    <p:notesMasterId r:id="rId22"/>
   </p:notesMasterIdLst>
   <p:sldSz cx="12192000" cy="6858000"/>
   <p:notesSz cx="6858000" cy="12192000"/>
@@ -124,7 +126,7 @@
   <p:extLst>
     <p:ext uri="{521415D9-36F7-43E2-AB2F-B90AF26B5E84}">
       <p14:sectionLst xmlns:p14="http://schemas.microsoft.com/office/powerpoint/2010/main">
-        <p14:section name="M1 · Problem &amp; EER" id="{50932df4-2e47-9ec2-71e1-18d30560c018}">
+        <p14:section name="M1 · Problem &amp; EER" id="{179c017e-989a-5a9c-04b5-1fa9b290b639}">
           <p14:sldIdLst>
             <p14:sldId id="256"/>
             <p14:sldId id="257"/>
@@ -133,29 +135,31 @@
             <p14:sldId id="260"/>
           </p14:sldIdLst>
         </p14:section>
-        <p14:section name="M2 · Schema &amp; normalization" id="{a1c77df3-face-04e4-83a8-f4bb8621addb}">
+        <p14:section name="M2 · Schema, normalization &amp; DDL" id="{288c2316-e9f2-6cac-13bc-51ab232f4a65}">
           <p14:sldIdLst>
             <p14:sldId id="261"/>
             <p14:sldId id="262"/>
             <p14:sldId id="263"/>
+            <p14:sldId id="264"/>
           </p14:sldIdLst>
         </p14:section>
-        <p14:section name="M3 · DDL, data &amp; queries" id="{c914741e-1c69-eedc-2233-46c3c83ac2ca}">
+        <p14:section name="M3 · SQL queries &amp; rules" id="{77e3e346-f023-9a8c-8d18-b0a6e572fe1b}">
           <p14:sldIdLst>
-            <p14:sldId id="264"/>
             <p14:sldId id="265"/>
             <p14:sldId id="266"/>
             <p14:sldId id="267"/>
+            <p14:sldId id="268"/>
+            <p14:sldId id="269"/>
           </p14:sldIdLst>
         </p14:section>
-        <p14:section name="M4 · Rules, transactions &amp; performance" id="{aa55bc4d-2628-0973-77ae-09618874c3b8}">
+        <p14:section name="M4 · Analytics &amp; performance" id="{35b3a5b1-97b5-351d-14c9-52cbd1b40292}">
           <p14:sldIdLst>
-            <p14:sldId id="268"/>
-            <p14:sldId id="269"/>
             <p14:sldId id="270"/>
             <p14:sldId id="271"/>
             <p14:sldId id="272"/>
             <p14:sldId id="273"/>
+            <p14:sldId id="274"/>
+            <p14:sldId id="275"/>
           </p14:sldIdLst>
         </p14:section>
       </p14:sectionLst>
@@ -861,7 +865,283 @@
                 </a:solidFill>
                 <a:latin typeface="+mn-lt"/>
               </a:rPr>
-              <a:t>Same query on 600,000 rows, ms (log scale)</a:t>
+              <a:t>A2: % placed in final cycle, by CGPA band</a:t>
+            </a:r>
+          </a:p>
+        </c:rich>
+      </c:tx>
+      <c:layout/>
+      <c:overlay val="0"/>
+    </c:title>
+    <c:autoTitleDeleted val="0"/>
+    <c:plotArea>
+      <c:layout/>
+      <c:barChart>
+        <c:barDir val="col"/>
+        <c:grouping val="clustered"/>
+        <c:varyColors val="0"/>
+        <c:ser>
+          <c:idx val="0"/>
+          <c:order val="0"/>
+          <c:tx>
+            <c:strRef>
+              <c:f>Sheet1!$B$1</c:f>
+              <c:strCache>
+                <c:ptCount val="1"/>
+                <c:pt idx="0">
+                  <c:v>% placed</c:v>
+                </c:pt>
+              </c:strCache>
+            </c:strRef>
+          </c:tx>
+          <c:spPr>
+            <a:solidFill>
+              <a:srgbClr val="4F46E5"/>
+            </a:solidFill>
+            <a:effectLst/>
+          </c:spPr>
+          <c:invertIfNegative val="0"/>
+          <c:dLbls>
+            <c:numFmt formatCode="0&quot;%&quot;" sourceLinked="0"/>
+            <c:txPr>
+              <a:bodyPr/>
+              <a:lstStyle/>
+              <a:p>
+                <a:pPr>
+                  <a:defRPr b="0" i="0" strike="noStrike" sz="1200" u="none">
+                    <a:solidFill>
+                      <a:srgbClr val="1F2937"/>
+                    </a:solidFill>
+                    <a:latin typeface="+mn-lt"/>
+                  </a:defRPr>
+                </a:pPr>
+              </a:p>
+            </c:txPr>
+            <c:showLegendKey val="0"/>
+            <c:showVal val="1"/>
+            <c:showCatName val="0"/>
+            <c:showSerName val="0"/>
+            <c:showPercent val="0"/>
+            <c:showBubbleSize val="0"/>
+            <c:showLeaderLines val="0"/>
+          </c:dLbls>
+          <c:cat>
+            <c:multiLvlStrRef>
+              <c:f>Sheet1!$A$2:$A$5</c:f>
+              <c:multiLvlStrCache>
+                <c:ptCount val="4"/>
+                <c:lvl>
+                  <c:pt idx="0">
+                    <c:v>6.0 - 7.0</c:v>
+                  </c:pt>
+                  <c:pt idx="1">
+                    <c:v>7.0 - 8.0</c:v>
+                  </c:pt>
+                  <c:pt idx="2">
+                    <c:v>8.0 - 9.0</c:v>
+                  </c:pt>
+                  <c:pt idx="3">
+                    <c:v>9.0 - 10.0</c:v>
+                  </c:pt>
+                </c:lvl>
+              </c:multiLvlStrCache>
+            </c:multiLvlStrRef>
+          </c:cat>
+          <c:val>
+            <c:numRef>
+              <c:f>Sheet1!$B$2:$B$5</c:f>
+              <c:numCache>
+                <c:formatCode>General</c:formatCode>
+                <c:ptCount val="4"/>
+                <c:pt idx="0">
+                  <c:v>0</c:v>
+                </c:pt>
+                <c:pt idx="1">
+                  <c:v>6.3</c:v>
+                </c:pt>
+                <c:pt idx="2">
+                  <c:v>27.8</c:v>
+                </c:pt>
+                <c:pt idx="3">
+                  <c:v>55.6</c:v>
+                </c:pt>
+              </c:numCache>
+            </c:numRef>
+          </c:val>
+        </c:ser>
+        <c:dLbls>
+          <c:numFmt formatCode="0&quot;%&quot;" sourceLinked="0"/>
+          <c:txPr>
+            <a:bodyPr/>
+            <a:lstStyle/>
+            <a:p>
+              <a:pPr>
+                <a:defRPr b="0" i="0" strike="noStrike" sz="1200" u="none">
+                  <a:solidFill>
+                    <a:srgbClr val="1F2937"/>
+                  </a:solidFill>
+                  <a:latin typeface="+mn-lt"/>
+                </a:defRPr>
+              </a:pPr>
+            </a:p>
+          </c:txPr>
+          <c:showLegendKey val="0"/>
+          <c:showVal val="1"/>
+          <c:showCatName val="0"/>
+          <c:showSerName val="0"/>
+          <c:showPercent val="0"/>
+          <c:showBubbleSize val="0"/>
+          <c:showLeaderLines val="0"/>
+        </c:dLbls>
+        <c:gapWidth val="70"/>
+        <c:overlap val="0"/>
+        <c:axId val="2094734554"/>
+        <c:axId val="2094734552"/>
+        <c:axId val="2094734556"/>
+      </c:barChart>
+      <c:catAx>
+        <c:axId val="2094734554"/>
+        <c:scaling>
+          <c:orientation val="minMax"/>
+        </c:scaling>
+        <c:delete val="0"/>
+        <c:axPos val="b"/>
+        <c:numFmt formatCode="General" sourceLinked="1"/>
+        <c:majorTickMark val="out"/>
+        <c:minorTickMark val="none"/>
+        <c:tickLblPos val="low"/>
+        <c:spPr>
+          <a:ln w="12700" cap="flat">
+            <a:solidFill>
+              <a:srgbClr val="888888"/>
+            </a:solidFill>
+            <a:prstDash val="solid"/>
+            <a:round/>
+          </a:ln>
+        </c:spPr>
+        <c:txPr>
+          <a:bodyPr/>
+          <a:lstStyle/>
+          <a:p>
+            <a:pPr>
+              <a:defRPr sz="1100" b="0" i="0" u="none" strike="noStrike">
+                <a:solidFill>
+                  <a:srgbClr val="6B7280"/>
+                </a:solidFill>
+                <a:latin typeface="+mn-lt"/>
+              </a:defRPr>
+            </a:pPr>
+            <a:endParaRPr lang="en-US"/>
+          </a:p>
+        </c:txPr>
+        <c:crossAx val="2094734552"/>
+        <c:crosses val="autoZero"/>
+        <c:auto val="1"/>
+        <c:lblAlgn val="ctr"/>
+        <c:noMultiLvlLbl val="1"/>
+      </c:catAx>
+      <c:valAx>
+        <c:axId val="2094734552"/>
+        <c:scaling>
+          <c:orientation val="minMax"/>
+          <c:max val="70"/>
+        </c:scaling>
+        <c:delete val="0"/>
+        <c:axPos val="l"/>
+        <c:majorGridlines>
+          <c:spPr>
+            <a:ln w="9525" cap="flat">
+              <a:solidFill>
+                <a:srgbClr val="E5E7EB"/>
+              </a:solidFill>
+              <a:prstDash val="solid"/>
+              <a:round/>
+            </a:ln>
+          </c:spPr>
+        </c:majorGridlines>
+        <c:numFmt formatCode="0&quot;%&quot;" sourceLinked="0"/>
+        <c:majorTickMark val="out"/>
+        <c:minorTickMark val="none"/>
+        <c:tickLblPos val="nextTo"/>
+        <c:spPr>
+          <a:ln w="12700" cap="flat">
+            <a:solidFill>
+              <a:srgbClr val="888888"/>
+            </a:solidFill>
+            <a:prstDash val="solid"/>
+            <a:round/>
+          </a:ln>
+        </c:spPr>
+        <c:txPr>
+          <a:bodyPr/>
+          <a:lstStyle/>
+          <a:p>
+            <a:pPr>
+              <a:defRPr sz="1000" b="0" i="0" u="none" strike="noStrike">
+                <a:solidFill>
+                  <a:srgbClr val="6B7280"/>
+                </a:solidFill>
+                <a:latin typeface="+mn-lt"/>
+              </a:defRPr>
+            </a:pPr>
+            <a:endParaRPr lang="en-US"/>
+          </a:p>
+        </c:txPr>
+        <c:crossAx val="2094734554"/>
+        <c:crosses val="autoZero"/>
+        <c:crossBetween val="between"/>
+      </c:valAx>
+      <c:spPr>
+        <a:noFill/>
+        <a:ln>
+          <a:noFill/>
+        </a:ln>
+        <a:effectLst/>
+      </c:spPr>
+    </c:plotArea>
+    <c:plotVisOnly val="1"/>
+    <c:dispBlanksAs val="span"/>
+  </c:chart>
+  <c:spPr>
+    <a:noFill/>
+    <a:ln>
+      <a:noFill/>
+    </a:ln>
+    <a:effectLst/>
+  </c:spPr>
+  <c:externalData r:id="rId1">
+    <c:autoUpdate val="0"/>
+  </c:externalData>
+</c:chartSpace>
+</file>
+
+<file path=ppt/charts/chart3.xml><?xml version="1.0" encoding="utf-8"?>
+<c:chartSpace xmlns:c="http://schemas.openxmlformats.org/drawingml/2006/chart" xmlns:a="http://schemas.openxmlformats.org/drawingml/2006/main" xmlns:r="http://schemas.openxmlformats.org/officeDocument/2006/relationships">
+  <c:date1904 val="0"/>
+  <c:roundedCorners val="1"/>
+  <c:chart>
+    <c:title>
+      <c:tx>
+        <c:rich>
+          <a:bodyPr/>
+          <a:lstStyle/>
+          <a:p>
+            <a:pPr>
+              <a:defRPr sz="1250" b="0" i="0" u="none" strike="noStrike">
+                <a:solidFill>
+                  <a:srgbClr val="1F2937"/>
+                </a:solidFill>
+                <a:latin typeface="+mn-lt"/>
+              </a:defRPr>
+            </a:pPr>
+            <a:r>
+              <a:rPr sz="1250" b="0" i="0" u="none" strike="noStrike">
+                <a:solidFill>
+                  <a:srgbClr val="1F2937"/>
+                </a:solidFill>
+                <a:latin typeface="+mn-lt"/>
+              </a:rPr>
+              <a:t>Same query, 600,000 rows, ms (log)</a:t>
             </a:r>
           </a:p>
         </c:rich>
@@ -898,13 +1178,13 @@
           </c:spPr>
           <c:invertIfNegative val="0"/>
           <c:dLbls>
-            <c:numFmt formatCode="0.000" sourceLinked="0"/>
+            <c:numFmt formatCode="0.00" sourceLinked="0"/>
             <c:txPr>
               <a:bodyPr/>
               <a:lstStyle/>
               <a:p>
                 <a:pPr>
-                  <a:defRPr b="0" i="0" strike="noStrike" sz="1200" u="none">
+                  <a:defRPr b="0" i="0" strike="noStrike" sz="1100" u="none">
                     <a:solidFill>
                       <a:srgbClr val="1F2937"/>
                     </a:solidFill>
@@ -961,13 +1241,13 @@
                 <c:ptCount val="3"/>
                 <c:lvl>
                   <c:pt idx="0">
-                    <c:v>No index (seq scan)</c:v>
+                    <c:v>No index</c:v>
                   </c:pt>
                   <c:pt idx="1">
-                    <c:v>Composite (job_id, status)</c:v>
+                    <c:v>Composite</c:v>
                   </c:pt>
                   <c:pt idx="2">
-                    <c:v>Partial (open rows only)</c:v>
+                    <c:v>Partial</c:v>
                   </c:pt>
                 </c:lvl>
               </c:multiLvlStrCache>
@@ -980,26 +1260,26 @@
                 <c:formatCode>General</c:formatCode>
                 <c:ptCount val="3"/>
                 <c:pt idx="0">
-                  <c:v>62.654</c:v>
+                  <c:v>60.839</c:v>
                 </c:pt>
                 <c:pt idx="1">
-                  <c:v>0.029</c:v>
+                  <c:v>0.025</c:v>
                 </c:pt>
                 <c:pt idx="2">
-                  <c:v>0.021</c:v>
+                  <c:v>0.018</c:v>
                 </c:pt>
               </c:numCache>
             </c:numRef>
           </c:val>
         </c:ser>
         <c:dLbls>
-          <c:numFmt formatCode="0.000" sourceLinked="0"/>
+          <c:numFmt formatCode="0.00" sourceLinked="0"/>
           <c:txPr>
             <a:bodyPr/>
             <a:lstStyle/>
             <a:p>
               <a:pPr>
-                <a:defRPr b="0" i="0" strike="noStrike" sz="1200" u="none">
+                <a:defRPr b="0" i="0" strike="noStrike" sz="1100" u="none">
                   <a:solidFill>
                     <a:srgbClr val="1F2937"/>
                   </a:solidFill>
@@ -1068,7 +1348,7 @@
         <c:scaling>
           <c:logBase val="10"/>
           <c:orientation val="minMax"/>
-          <c:max val="100"/>
+          <c:max val="1000"/>
           <c:min val="0.01"/>
         </c:scaling>
         <c:delete val="0"/>
@@ -1107,271 +1387,6 @@
                   <a:srgbClr val="6B7280"/>
                 </a:solidFill>
                 <a:latin typeface="+mn-lt"/>
-              </a:defRPr>
-            </a:pPr>
-            <a:endParaRPr lang="en-US"/>
-          </a:p>
-        </c:txPr>
-        <c:crossAx val="2094734554"/>
-        <c:crosses val="autoZero"/>
-        <c:crossBetween val="between"/>
-      </c:valAx>
-      <c:spPr>
-        <a:noFill/>
-        <a:ln>
-          <a:noFill/>
-        </a:ln>
-        <a:effectLst/>
-      </c:spPr>
-    </c:plotArea>
-    <c:plotVisOnly val="1"/>
-    <c:dispBlanksAs val="span"/>
-  </c:chart>
-  <c:spPr>
-    <a:noFill/>
-    <a:ln>
-      <a:noFill/>
-    </a:ln>
-    <a:effectLst/>
-  </c:spPr>
-  <c:externalData r:id="rId1">
-    <c:autoUpdate val="0"/>
-  </c:externalData>
-</c:chartSpace>
-</file>
-
-<file path=ppt/charts/chart3.xml><?xml version="1.0" encoding="utf-8"?>
-<c:chartSpace xmlns:c="http://schemas.openxmlformats.org/drawingml/2006/chart" xmlns:a="http://schemas.openxmlformats.org/drawingml/2006/main" xmlns:r="http://schemas.openxmlformats.org/officeDocument/2006/relationships">
-  <c:date1904 val="0"/>
-  <c:roundedCorners val="1"/>
-  <c:chart>
-    <c:autoTitleDeleted val="1"/>
-    <c:plotArea>
-      <c:layout/>
-      <c:barChart>
-        <c:barDir val="bar"/>
-        <c:grouping val="clustered"/>
-        <c:varyColors val="0"/>
-        <c:ser>
-          <c:idx val="0"/>
-          <c:order val="0"/>
-          <c:tx>
-            <c:strRef>
-              <c:f>Sheet1!$B$1</c:f>
-              <c:strCache>
-                <c:ptCount val="1"/>
-                <c:pt idx="0">
-                  <c:v>Tests</c:v>
-                </c:pt>
-              </c:strCache>
-            </c:strRef>
-          </c:tx>
-          <c:spPr>
-            <a:solidFill>
-              <a:srgbClr val="4F46E5"/>
-            </a:solidFill>
-            <a:effectLst/>
-          </c:spPr>
-          <c:invertIfNegative val="0"/>
-          <c:dLbls>
-            <c:numFmt formatCode="#,##0" sourceLinked="0"/>
-            <c:txPr>
-              <a:bodyPr/>
-              <a:lstStyle/>
-              <a:p>
-                <a:pPr>
-                  <a:defRPr b="0" i="0" strike="noStrike" sz="1100" u="none">
-                    <a:solidFill>
-                      <a:srgbClr val="1F2937"/>
-                    </a:solidFill>
-                    <a:latin typeface="+mn-lt"/>
-                  </a:defRPr>
-                </a:pPr>
-              </a:p>
-            </c:txPr>
-            <c:showLegendKey val="0"/>
-            <c:showVal val="1"/>
-            <c:showCatName val="0"/>
-            <c:showSerName val="0"/>
-            <c:showPercent val="0"/>
-            <c:showBubbleSize val="0"/>
-            <c:showLeaderLines val="0"/>
-          </c:dLbls>
-          <c:cat>
-            <c:multiLvlStrRef>
-              <c:f>Sheet1!$A$2:$A$10</c:f>
-              <c:multiLvlStrCache>
-                <c:ptCount val="9"/>
-                <c:lvl>
-                  <c:pt idx="0">
-                    <c:v>constraints</c:v>
-                  </c:pt>
-                  <c:pt idx="1">
-                    <c:v>triggers</c:v>
-                  </c:pt>
-                  <c:pt idx="2">
-                    <c:v>api</c:v>
-                  </c:pt>
-                  <c:pt idx="3">
-                    <c:v>schema</c:v>
-                  </c:pt>
-                  <c:pt idx="4">
-                    <c:v>queries</c:v>
-                  </c:pt>
-                  <c:pt idx="5">
-                    <c:v>data</c:v>
-                  </c:pt>
-                  <c:pt idx="6">
-                    <c:v>security</c:v>
-                  </c:pt>
-                  <c:pt idx="7">
-                    <c:v>transactions</c:v>
-                  </c:pt>
-                  <c:pt idx="8">
-                    <c:v>performance</c:v>
-                  </c:pt>
-                </c:lvl>
-              </c:multiLvlStrCache>
-            </c:multiLvlStrRef>
-          </c:cat>
-          <c:val>
-            <c:numRef>
-              <c:f>Sheet1!$B$2:$B$10</c:f>
-              <c:numCache>
-                <c:formatCode>General</c:formatCode>
-                <c:ptCount val="9"/>
-                <c:pt idx="0">
-                  <c:v>20</c:v>
-                </c:pt>
-                <c:pt idx="1">
-                  <c:v>16</c:v>
-                </c:pt>
-                <c:pt idx="2">
-                  <c:v>11</c:v>
-                </c:pt>
-                <c:pt idx="3">
-                  <c:v>10</c:v>
-                </c:pt>
-                <c:pt idx="4">
-                  <c:v>9</c:v>
-                </c:pt>
-                <c:pt idx="5">
-                  <c:v>9</c:v>
-                </c:pt>
-                <c:pt idx="6">
-                  <c:v>9</c:v>
-                </c:pt>
-                <c:pt idx="7">
-                  <c:v>4</c:v>
-                </c:pt>
-                <c:pt idx="8">
-                  <c:v>3</c:v>
-                </c:pt>
-              </c:numCache>
-            </c:numRef>
-          </c:val>
-        </c:ser>
-        <c:dLbls>
-          <c:numFmt formatCode="#,##0" sourceLinked="0"/>
-          <c:txPr>
-            <a:bodyPr/>
-            <a:lstStyle/>
-            <a:p>
-              <a:pPr>
-                <a:defRPr b="0" i="0" strike="noStrike" sz="1100" u="none">
-                  <a:solidFill>
-                    <a:srgbClr val="1F2937"/>
-                  </a:solidFill>
-                  <a:latin typeface="+mn-lt"/>
-                </a:defRPr>
-              </a:pPr>
-            </a:p>
-          </c:txPr>
-          <c:showLegendKey val="0"/>
-          <c:showVal val="1"/>
-          <c:showCatName val="0"/>
-          <c:showSerName val="0"/>
-          <c:showPercent val="0"/>
-          <c:showBubbleSize val="0"/>
-          <c:showLeaderLines val="0"/>
-        </c:dLbls>
-        <c:gapWidth val="150"/>
-        <c:overlap val="0"/>
-        <c:axId val="2094734554"/>
-        <c:axId val="2094734552"/>
-        <c:axId val="2094734556"/>
-      </c:barChart>
-      <c:catAx>
-        <c:axId val="2094734554"/>
-        <c:scaling>
-          <c:orientation val="maxMin"/>
-        </c:scaling>
-        <c:delete val="0"/>
-        <c:axPos val="l"/>
-        <c:numFmt formatCode="General" sourceLinked="1"/>
-        <c:majorTickMark val="out"/>
-        <c:minorTickMark val="none"/>
-        <c:tickLblPos val="nextTo"/>
-        <c:spPr>
-          <a:ln w="12700" cap="flat">
-            <a:solidFill>
-              <a:srgbClr val="888888"/>
-            </a:solidFill>
-            <a:prstDash val="solid"/>
-            <a:round/>
-          </a:ln>
-        </c:spPr>
-        <c:txPr>
-          <a:bodyPr/>
-          <a:lstStyle/>
-          <a:p>
-            <a:pPr>
-              <a:defRPr sz="1150" b="0" i="0" u="none" strike="noStrike">
-                <a:solidFill>
-                  <a:srgbClr val="374151"/>
-                </a:solidFill>
-                <a:latin typeface="+mn-lt"/>
-              </a:defRPr>
-            </a:pPr>
-            <a:endParaRPr lang="en-US"/>
-          </a:p>
-        </c:txPr>
-        <c:crossAx val="2094734552"/>
-        <c:crosses val="autoZero"/>
-        <c:auto val="1"/>
-        <c:lblAlgn val="ctr"/>
-        <c:noMultiLvlLbl val="1"/>
-      </c:catAx>
-      <c:valAx>
-        <c:axId val="2094734552"/>
-        <c:scaling>
-          <c:orientation val="minMax"/>
-        </c:scaling>
-        <c:delete val="1"/>
-        <c:axPos val="b"/>
-        <c:numFmt formatCode="General" sourceLinked="0"/>
-        <c:majorTickMark val="out"/>
-        <c:minorTickMark val="none"/>
-        <c:tickLblPos val="low"/>
-        <c:spPr>
-          <a:ln w="12700" cap="flat">
-            <a:solidFill>
-              <a:srgbClr val="888888"/>
-            </a:solidFill>
-            <a:prstDash val="solid"/>
-            <a:round/>
-          </a:ln>
-        </c:spPr>
-        <c:txPr>
-          <a:bodyPr/>
-          <a:lstStyle/>
-          <a:p>
-            <a:pPr>
-              <a:defRPr sz="1200" b="0" i="0" u="none" strike="noStrike">
-                <a:solidFill>
-                  <a:srgbClr val="000000"/>
-                </a:solidFill>
-                <a:latin typeface="Arial"/>
               </a:defRPr>
             </a:pPr>
             <a:endParaRPr lang="en-US"/>
@@ -1800,10 +1815,10 @@
           <a:p>
             <a:r>
               <a:rPr lang="en-US" dirty="0"/>
-              <a:t>[M1 · Ekta Sharma · 0:00–0:30]
+              <a:t>[M1 · Ekta Sharma · 0:00–0:25]
 Good morning. We are presenting PlaceIQ, a database for campus placements.
-The one-line idea: today the placement committee runs recruitment from spreadsheets, and spreadsheets cannot stop anyone from breaking the rules. We moved those rules into the database itself, so that PostgreSQL refuses an ineligible application, a double-booked interview or a second accepted offer.
-Each of the four of us will present one part of the pipeline: design, normalization, SQL, and finally rules, transactions and performance.</a:t>
+The one-line idea: today the placement committee runs recruitment from spreadsheets, and spreadsheets cannot stop anyone from breaking the rules or answer analytical questions. We moved the rules into the database itself, and then used the same database to analyse which students the process serves badly.
+Each of the four of us will present one part: design, normalization, SQL and rules, and finally analytics.</a:t>
             </a:r>
             <a:endParaRPr lang="en-US" dirty="0"/>
           </a:p>
@@ -1891,7 +1906,8 @@
           <a:p>
             <a:r>
               <a:rPr lang="en-US" dirty="0"/>
-              <a:t>[M3 · [Member 3] · 8:30–9:15]
+              <a:t>[M3 · [Member 3] · 7:00–7:30]
+Thank you. What kind of data is this? Real placement records are confidential, so we simulated a season that behaves like one: CGPA drives shortlisting, programs drive skills, and every step follows the committee's rules. We say clearly that it is simulated.
 To test the design we needed realistic data: 180 students, 16 companies, 1,184 applications, 1,057 interview slots and 96 offers.
 Two points matter. First, it is seeded, so every rebuild produces exactly the same data and our query outputs are reproducible — our test suite even checks this with a fingerprint.
 Second, we did not bypass our own rules: the triggers are installed before the data, and a simulation drives the whole recruitment process through them in one transaction. So the dataset itself is evidence that the rules are consistent.</a:t>
@@ -1982,7 +1998,7 @@
           <a:p>
             <a:r>
               <a:rPr lang="en-US" dirty="0"/>
-              <a:t>[M3 · [Member 3] · 9:15–10:00]
+              <a:t>[M3 · [Member 3] · 7:30–8:10]
 Each query answers a real question the committee asks. Q1 finds the most selective recruiters using HAVING compared against a scalar subquery — Meridian Insurance makes offers to only 8.6 percent of applicants. Q2 is relational division. Q3 and Q4 use window functions. Q5 uses a correlated subquery to find strong students who keep failing interviews, so the committee can coach them. Let me zoom into two of them.</a:t>
             </a:r>
             <a:endParaRPr lang="en-US" dirty="0"/>
@@ -2071,10 +2087,10 @@
           <a:p>
             <a:r>
               <a:rPr lang="en-US" dirty="0"/>
-              <a:t>[M3 · [Member 3] · 10:00–11:15]
+              <a:t>[M3 · [Member 3] · 8:10–9:00]
 Q2 is relational division, which SQL has no operator for. We express 'holds every required skill' as a double negation: there is no required skill that the student does not have. The algebra is shown below the code. To be sure it is right, our tests compare it with the other classic formulation, division by counting, for all 25 jobs, and they agree.
 On the right is Q4. A window function — SUM OVER partitioned by program and ordered by day — gives a running total without collapsing the rows, and generate_series builds a calendar so that days with zero placements still appear. This is the committee's daily progress chart.
-Now [Member 4] will show how the rules are enforced, live.</a:t>
+Queries read the data; now, the rules that guard every write.</a:t>
             </a:r>
             <a:endParaRPr lang="en-US" dirty="0"/>
           </a:p>
@@ -2162,10 +2178,10 @@
           <a:p>
             <a:r>
               <a:rPr lang="en-US" dirty="0"/>
-              <a:t>[M4 · [Member 4] · 11:15–12:00]
-Thank you. Some rules span several tables, so a CHECK cannot express them. The most important is the one-offer policy.
+              <a:t>[M3 · [Member 3] · 9:00–9:35]
+Some rules span several tables, so a CHECK cannot express them. The most important is the one-offer policy.
 A student accepts through the stored procedure sp_accept_offer. It first locks the student's row, then re-reads the offer to make sure it is still pending. The UPDATE fires two triggers. The BEFORE trigger is the guard: deadline not passed, no other accepted offer in this cycle. The AFTER trigger is the cascade, in green: it declines the student's other pending offers, withdraws their open applications, frees their interview slots and writes an audit log.
-Crucially, all of this happens in one transaction: either every step commits, or none does.</a:t>
+Crucially, all of this happens in one transaction: either every step commits, or none does. And because the procedure locks the student's row first, two simultaneous acceptances queue up instead of both succeeding; our tests run exactly that with two real connections.</a:t>
             </a:r>
             <a:endParaRPr lang="en-US" dirty="0"/>
           </a:p>
@@ -2253,13 +2269,14 @@
           <a:p>
             <a:r>
               <a:rPr lang="en-US" dirty="0"/>
-              <a:t>[M4 · [Member 4] · 12:00–13:15 · LIVE DEMO, about 75 seconds]
+              <a:t>[M3 · [Member 3] · 9:35–10:30 · LIVE DEMO, about 55 seconds]
 (Switch to the browser, http://127.0.0.1:8000. Press 'Reset demo data' beforehand.)
 1. Jobs → Monsoon Foods (job 21) → 'Make offer' for PGP62-084. Dev now holds two pending offers.
 2. Students → PGP62-084 → Accept on the DataSutra row → confirm.
 3. Point at the toast: one offer auto-declined, one application withdrawn. Point at the table: Declined, Withdrawn. The final-placement card now says Placed — that status comes from the view.
 4. In 'Apply for a job', choose job 25 → Apply: refused, 'already accepted an offer in this placement cycle'.
-If anything fails, play the backup video, which shows exactly these steps.</a:t>
+If anything fails, play the backup video, which shows exactly these steps.
+(Back to the slides.) [Member 4] will now show what the data tells us.</a:t>
             </a:r>
             <a:endParaRPr lang="en-US" dirty="0"/>
           </a:p>
@@ -2347,8 +2364,11 @@
           <a:p>
             <a:r>
               <a:rPr lang="en-US" dirty="0"/>
-              <a:t>[M4 · [Member 4] · 13:15–13:50]
-Each ACID property is demonstrated, and tested, in our project. The interesting one is isolation. If two sessions accept two different offers for the same student at the same moment, both could pass the 'no other accepted offer' check before either commits. Our procedure locks the student row first, so session B waits; when A commits, B re-reads its offer, finds it already declined by A's trigger, and rolls back. We found during testing that locking the offer row first could deadlock, so lock order matters. Our automated test runs exactly this with two real connections.</a:t>
+              <a:t>[M4 · [Member 4] · 10:30–11:20]
+Thank you. The last part answers: what can the committee LEARN from this data? Analytics means decisions based on data, and the first pass is plain statistics, done inside the database.
+The chart is query A2: students grouped into CGPA bands with width_bucket, joined to the placement view. Nobody below a CGPA of 7 is placed yet; 56 percent of those above 9 are. So CGPA is a strong feature. But look at the 8 to 9 band: most of them are still unplaced, so CGPA cannot be the whole story.
+On the right: CGPA is symmetric, mean 7.88 and median 7.87, and an ANOVA shows the programs do not differ in CGPA. The funnel shows students drop out after the interview, not at CV screening. And SQL is the scarcest skill relative to demand.
+The point for this course: the DBMS answers these with GROUP BY. We never loaded the raw tables into Python.</a:t>
             </a:r>
             <a:endParaRPr lang="en-US" dirty="0"/>
           </a:p>
@@ -2436,9 +2456,10 @@
           <a:p>
             <a:r>
               <a:rPr lang="en-US" dirty="0"/>
-              <a:t>[M4 · [Member 4] · 13:50–14:15]
-Our live tables are small, so we built a 600,000-row application archive to measure indexing honestly. Without an index, PostgreSQL scans the whole table: 62.7 milliseconds. A composite B-tree on job_id and status: 0.029 milliseconds, about 2,160 times faster. A partial index that only covers open applications is 26 times smaller and faster still.
-One lesson surprised us: we expected PostgreSQL 18 to ignore the index for a filter on status alone. It actually used it, but by reading the entire index — 4,383 blocks versus 3. The leading-column rule is about seeking, not about whether the index appears in the plan.</a:t>
+              <a:t>[M4 · [Member 4] · 11:20–12:10]
+Before any algorithm, feature engineering: translate the problem into data, using domain knowledge. We chose five things a committee can see early in the season: CGPA, technical skills, business skills, how many roles the student applies to, and what share of those reach an interview.
+All five are computed by one SQL view over six tables. Notice what is NOT a feature: offers. If we clustered on offers, "students with offers do well" would be true by construction. So we cluster on profile and judge on outcome.
+k-means measures distance, so we standardize first. To choose k we ran k from 2 to 8: the elbow and the silhouette both point at 4.</a:t>
             </a:r>
             <a:endParaRPr lang="en-US" dirty="0"/>
           </a:p>
@@ -2526,9 +2547,11 @@
           <a:p>
             <a:r>
               <a:rPr lang="en-US" dirty="0"/>
-              <a:t>[M4 · [Member 4] · 14:15–14:35]
-Security. On the left, the same search written two ways. Pasting the input into the SQL string leaks all 180 students for the classic OR '1'='1' payload; passing it as a bound parameter returns zero rows. Even our deliberately vulnerable path is sandboxed: it runs as a least-privilege role with SELECT on just two tables, inside a read-only transaction, so a DROP TABLE attempt is refused.
-On the right, testing. We wrote 91 automated tests that run against the real database — constraints, triggers, queries, concurrency, performance, security and the API — and all 91 pass. Writing them also caught real issues, documented in our testing report.</a:t>
+              <a:t>[M4 · [Member 4] · 12:10–13:10]
+These are the four segments. Each panel shows how far the segment's centre sits from the average student, in standard deviations.
+Generalists and Tech Specialists are doing well, 41 and 36 percent with an accepted offer. At-Risk is what you would expect: low CGPA, few applications, rarely shortlisted.
+The interesting one is Selective Appliers, third panel. Their CGPA is average, so a CGPA cut-off would never flag them. They get to interview 88 percent of the time, yet apply to only about 3 roles, and 0 percent of them have an accepted offer. Their CVs work; they just apply too narrowly.
+Remember, offers were never an input. The chi-square test shows segment and outcome are strongly associated, p about 0.000011. So the clusters capture something real.</a:t>
             </a:r>
             <a:endParaRPr lang="en-US" dirty="0"/>
           </a:p>
@@ -2616,9 +2639,11 @@
           <a:p>
             <a:r>
               <a:rPr lang="en-US" dirty="0"/>
-              <a:t>[ALL · 14:35–15:00, then Q&amp;A]
-Each of us closes with one sentence (read your own card).
-Then: "Thank you. We are happy to take questions." Each member answers questions on their own section: M1 modelling, M2 normalization and keys, M3 DDL and queries, M4 triggers, transactions, indexing, security and testing.</a:t>
+              <a:t>[M4 · [Member 4] · 13:10–13:55]
+The labels do not stay in a notebook. We write them back into two BCNF tables with foreign keys, in one transaction, and from then on SQL can query them like any other data.
+Query S2 turns the analysis into a list: every student without an accepted offer in a segment that places below the campus average, with one suggested action. 52 students. Most of them simply need to apply to more roles, which costs the committee nothing.
+Query S1 shows why segments beat programs: PGP students are spread across 4 segments, so one workshop for "all PGP" would miss most of the at-risk ones.
+Finally, the threshold trade-off from class: with a logistic model of P(offer), flagging below 0.6 catches 89 percent of the students who end up with no offer. A missed student costs more than a spare workshop seat, so we prefer high recall.</a:t>
             </a:r>
             <a:endParaRPr lang="en-US" dirty="0"/>
           </a:p>
@@ -2642,6 +2667,97 @@
             <a:fld id="{F7021451-1387-4CA6-816F-3879F97B5CBC}" type="slidenum">
               <a:rPr lang="en-US"/>
               <a:t>18</a:t>
+            </a:fld>
+            <a:endParaRPr lang="en-US"/>
+          </a:p>
+        </p:txBody>
+      </p:sp>
+    </p:spTree>
+    <p:extLst>
+      <p:ext uri="{BB962C8B-B14F-4D97-AF65-F5344CB8AC3E}">
+        <p14:creationId xmlns:p14="http://schemas.microsoft.com/office/powerpoint/2010/main" val="1024086991"/>
+      </p:ext>
+    </p:extLst>
+  </p:cSld>
+  <p:clrMapOvr>
+    <a:masterClrMapping/>
+  </p:clrMapOvr>
+</p:notes>
+</file>
+
+<file path=ppt/notesSlides/notesSlide19.xml><?xml version="1.0" encoding="utf-8"?>
+<p:notes xmlns:a="http://schemas.openxmlformats.org/drawingml/2006/main" xmlns:r="http://schemas.openxmlformats.org/officeDocument/2006/relationships" xmlns:p="http://schemas.openxmlformats.org/presentationml/2006/main">
+  <p:cSld>
+    <p:spTree>
+      <p:nvGrpSpPr>
+        <p:cNvPr id="1" name=""/>
+        <p:cNvGrpSpPr/>
+        <p:nvPr/>
+      </p:nvGrpSpPr>
+      <p:grpSpPr>
+        <a:xfrm>
+          <a:off x="0" y="0"/>
+          <a:ext cx="0" cy="0"/>
+          <a:chOff x="0" y="0"/>
+          <a:chExt cx="0" cy="0"/>
+        </a:xfrm>
+      </p:grpSpPr>
+      <p:sp>
+        <p:nvSpPr>
+          <p:cNvPr id="2" name="Slide Image Placeholder 1"/>
+          <p:cNvSpPr>
+            <a:spLocks noGrp="1" noRot="1" noChangeAspect="1"/>
+          </p:cNvSpPr>
+          <p:nvPr>
+            <p:ph type="sldImg"/>
+          </p:nvPr>
+        </p:nvSpPr>
+        <p:spPr/>
+      </p:sp>
+      <p:sp>
+        <p:nvSpPr>
+          <p:cNvPr id="3" name="Notes Placeholder 2"/>
+          <p:cNvSpPr>
+            <a:spLocks noGrp="1"/>
+          </p:cNvSpPr>
+          <p:nvPr>
+            <p:ph type="body" idx="1"/>
+          </p:nvPr>
+        </p:nvSpPr>
+        <p:spPr/>
+        <p:txBody>
+          <a:bodyPr/>
+          <a:lstStyle/>
+          <a:p>
+            <a:r>
+              <a:rPr lang="en-US" dirty="0"/>
+              <a:t>[M4 · [Member 4] · 13:55–14:35]
+Three quick results. Indexing: on a 600,000-row archive, a composite B-tree index makes the same query about 2,434 times faster than a sequential scan, and a partial index covering only open applications is 26 times smaller. We measured this with EXPLAIN ANALYZE rather than assuming it.
+Security: pasting user input into SQL leaks all 180 students for the classic OR '1'='1' payload; a bound parameter returns zero. Even the deliberately unsafe path runs as a read-only role.
+And 91 automated tests run against the real database; all pass.</a:t>
+            </a:r>
+            <a:endParaRPr lang="en-US" dirty="0"/>
+          </a:p>
+        </p:txBody>
+      </p:sp>
+      <p:sp>
+        <p:nvSpPr>
+          <p:cNvPr id="4" name="Slide Number Placeholder 3"/>
+          <p:cNvSpPr>
+            <a:spLocks noGrp="1"/>
+          </p:cNvSpPr>
+          <p:nvPr>
+            <p:ph type="sldNum" sz="quarter" idx="10"/>
+          </p:nvPr>
+        </p:nvSpPr>
+        <p:spPr/>
+        <p:txBody>
+          <a:bodyPr/>
+          <a:lstStyle/>
+          <a:p>
+            <a:fld id="{F7021451-1387-4CA6-816F-3879F97B5CBC}" type="slidenum">
+              <a:rPr lang="en-US"/>
+              <a:t>19</a:t>
             </a:fld>
             <a:endParaRPr lang="en-US"/>
           </a:p>
@@ -2706,8 +2822,8 @@
           <a:p>
             <a:r>
               <a:rPr lang="en-US" dirty="0"/>
-              <a:t>[M1 · Ekta Sharma · 0:30–0:50]
-Here is how the 15 minutes are split. I will cover the problem and the conceptual model. [Member 2] turns it into a normalized relational schema. [Member 3] shows the DDL, the data and our five queries. [Member 4] shows the triggers live, then transactions, indexing, security and testing.</a:t>
+              <a:t>[M1 · Ekta Sharma · 0:25–0:45]
+Here is how the 15 minutes are split. I will cover the problem and the conceptual model. [Member 2] turns it into a normalized schema and DDL. [Member 3] shows the data, our queries and the triggers, live. [Member 4] shows what the data tells us: statistics in SQL and k-means clustering, then indexing and security.</a:t>
             </a:r>
             <a:endParaRPr lang="en-US" dirty="0"/>
           </a:p>
@@ -2731,6 +2847,96 @@
             <a:fld id="{F7021451-1387-4CA6-816F-3879F97B5CBC}" type="slidenum">
               <a:rPr lang="en-US"/>
               <a:t>2</a:t>
+            </a:fld>
+            <a:endParaRPr lang="en-US"/>
+          </a:p>
+        </p:txBody>
+      </p:sp>
+    </p:spTree>
+    <p:extLst>
+      <p:ext uri="{BB962C8B-B14F-4D97-AF65-F5344CB8AC3E}">
+        <p14:creationId xmlns:p14="http://schemas.microsoft.com/office/powerpoint/2010/main" val="1024086991"/>
+      </p:ext>
+    </p:extLst>
+  </p:cSld>
+  <p:clrMapOvr>
+    <a:masterClrMapping/>
+  </p:clrMapOvr>
+</p:notes>
+</file>
+
+<file path=ppt/notesSlides/notesSlide20.xml><?xml version="1.0" encoding="utf-8"?>
+<p:notes xmlns:a="http://schemas.openxmlformats.org/drawingml/2006/main" xmlns:r="http://schemas.openxmlformats.org/officeDocument/2006/relationships" xmlns:p="http://schemas.openxmlformats.org/presentationml/2006/main">
+  <p:cSld>
+    <p:spTree>
+      <p:nvGrpSpPr>
+        <p:cNvPr id="1" name=""/>
+        <p:cNvGrpSpPr/>
+        <p:nvPr/>
+      </p:nvGrpSpPr>
+      <p:grpSpPr>
+        <a:xfrm>
+          <a:off x="0" y="0"/>
+          <a:ext cx="0" cy="0"/>
+          <a:chOff x="0" y="0"/>
+          <a:chExt cx="0" cy="0"/>
+        </a:xfrm>
+      </p:grpSpPr>
+      <p:sp>
+        <p:nvSpPr>
+          <p:cNvPr id="2" name="Slide Image Placeholder 1"/>
+          <p:cNvSpPr>
+            <a:spLocks noGrp="1" noRot="1" noChangeAspect="1"/>
+          </p:cNvSpPr>
+          <p:nvPr>
+            <p:ph type="sldImg"/>
+          </p:nvPr>
+        </p:nvSpPr>
+        <p:spPr/>
+      </p:sp>
+      <p:sp>
+        <p:nvSpPr>
+          <p:cNvPr id="3" name="Notes Placeholder 2"/>
+          <p:cNvSpPr>
+            <a:spLocks noGrp="1"/>
+          </p:cNvSpPr>
+          <p:nvPr>
+            <p:ph type="body" idx="1"/>
+          </p:nvPr>
+        </p:nvSpPr>
+        <p:spPr/>
+        <p:txBody>
+          <a:bodyPr/>
+          <a:lstStyle/>
+          <a:p>
+            <a:r>
+              <a:rPr lang="en-US" dirty="0"/>
+              <a:t>[ALL · 14:35–15:00, then Q&amp;A]
+Each of us closes with one sentence (read your own card).
+Then: "Thank you. We are happy to take questions." Each member answers questions on their own section: M1 modelling, M2 keys, normalization and DDL, M3 queries, triggers and transactions, M4 statistics, k-means, indexing, security and testing.</a:t>
+            </a:r>
+            <a:endParaRPr lang="en-US" dirty="0"/>
+          </a:p>
+        </p:txBody>
+      </p:sp>
+      <p:sp>
+        <p:nvSpPr>
+          <p:cNvPr id="4" name="Slide Number Placeholder 3"/>
+          <p:cNvSpPr>
+            <a:spLocks noGrp="1"/>
+          </p:cNvSpPr>
+          <p:nvPr>
+            <p:ph type="sldNum" sz="quarter" idx="10"/>
+          </p:nvPr>
+        </p:nvSpPr>
+        <p:spPr/>
+        <p:txBody>
+          <a:bodyPr/>
+          <a:lstStyle/>
+          <a:p>
+            <a:fld id="{F7021451-1387-4CA6-816F-3879F97B5CBC}" type="slidenum">
+              <a:rPr lang="en-US"/>
+              <a:t>20</a:t>
             </a:fld>
             <a:endParaRPr lang="en-US"/>
           </a:p>
@@ -2795,7 +3001,8 @@
           <a:p>
             <a:r>
               <a:rPr lang="en-US" dirty="0"/>
-              <a:t>[M1 · Ekta Sharma · 0:50–1:50]
+              <a:t>[M1 · Ekta Sharma · 0:45–1:40]
+Why this problem? All four of us are going through placements, so we know the data and the pain first-hand, and placement data is a rich mix: people, jobs, a multi-stage process, and outcomes we can analyse.
 This is what the committee's sheet looks like: one row per student, per company, per interview round.
 Look at the red header columns: Northbridge, Mumbai, the role and the pay repeat on every row. That causes the three classic anomalies.
 Update: if the company changes its HQ we must edit every row. Insertion: we cannot even record a new job until someone applies, because roll number is part of the key. Deletion: delete the only applicant and the job vanishes with them.
@@ -2887,7 +3094,7 @@
           <a:p>
             <a:r>
               <a:rPr lang="en-US" dirty="0"/>
-              <a:t>[M1 · Ekta Sharma · 1:50–2:40]
+              <a:t>[M1 · Ekta Sharma · 1:40–2:25]
 Our EER model is split in two views for readability. This one covers people.
 PERSON is a superclass with an OVERLAPPING, PARTIAL specialization (the 'o' circle) into STUDENT, COMMITTEE_MEMBER, ALUMNUS and RECRUITER: overlapping because a student can also sit on the placement committee; partial because a guest speaker is just a person.
 Note the attribute types: person_id is the key, name is composite, skills is multi-valued (double oval), and placement_status is derived (dashed oval) — we never store it.
@@ -2979,7 +3186,7 @@
           <a:p>
             <a:r>
               <a:rPr lang="en-US" dirty="0"/>
-              <a:t>[M1 · Ekta Sharma · 2:40–3:45]
+              <a:t>[M1 · Ekta Sharma · 2:25–3:15]
 The second view is the recruitment pipeline. STUDENT APPLIES_TO JOB_ROLE is many-to-many with attributes, status and applied_at.
 The key modelling decision is AGGREGATION, the purple box. You do not interview a student in general; you interview an application, a student for a specific job. So the whole APPLIES_TO relationship is treated as an entity that participates in EVALUATED_IN with INTERVIEW_ROUND, and in RESULTS_IN with OFFER.
 INTERVIEW_ROUND is a WEAK entity, 'round 2' means nothing without its job, so it is identified through the double-diamond HAS_ROUND, with round_no as its partial key.
@@ -3072,10 +3279,10 @@
           <a:p>
             <a:r>
               <a:rPr lang="en-US" dirty="0"/>
-              <a:t>[M2 · [Member 2] · 3:45–4:45]
+              <a:t>[M2 · [Member 2] · 3:15–4:05]
 Thank you. We mapped the EER model with the standard Elmasri–Navathe steps, shown on the left. Strong entities became tables; the weak entity's primary key is its owner's key plus its partial key; many-to-many relationships became bridge tables; the multi-valued skills attribute became its own table; each subclass got its own table sharing the superclass key; and the union type got a surrogate sponsor_id.
 The result is 22 tables.
-On the right, keys. A super key is any identifying set. Candidate keys are the minimal ones — placement_cycle actually has three. We pick one as primary and keep natural keys as UNIQUE alternate keys, so introducing surrogate ids loses no rule. And we have 30 foreign keys, including composite ones that enforce cross-table rules, which [Member 3] will show.</a:t>
+On the right, keys. A super key is any identifying set. Candidate keys are the minimal ones — placement_cycle actually has three. We pick one as primary and keep natural keys as UNIQUE alternate keys, so introducing surrogate ids loses no rule. And we have 30 foreign keys, including composite ones that enforce cross-table rules, which I will show in the DDL.</a:t>
             </a:r>
             <a:endParaRPr lang="en-US" dirty="0"/>
           </a:p>
@@ -3163,7 +3370,7 @@
           <a:p>
             <a:r>
               <a:rPr lang="en-US" dirty="0"/>
-              <a:t>[M2 · [Member 2] · 4:45–6:15]
+              <a:t>[M2 · [Member 2] · 4:05–5:20]
 We started from the spreadsheet you saw, the UNF relation in red, and wrote down its functional dependencies. For example: roll_no determines name, email, program and CGPA; prog_code determines prog_name; company determines sector and city; a job, identified by company, cycle and title, determines its pay.
 1NF: skills was a list, not atomic, so it moves to its own relation.
 2NF: the key is roll_no, job and round. Many attributes depend on only part of it — student details on roll_no, company details on company — so we split those out.
@@ -3256,11 +3463,11 @@
           <a:p>
             <a:r>
               <a:rPr lang="en-US" dirty="0"/>
-              <a:t>[M2 · [Member 2] · 6:15–7:30]
+              <a:t>[M2 · [Member 2] · 5:20–6:10]
 To prove BCNF we checked, for every relation, that every determinant is a super key. The interesting row is student: email determines roll_no and roll_no determines email. That looks suspicious, but both are candidate keys, so BCNF holds.
 We also made deliberate decisions not to store redundant data, listed bottom-left. For example, the offer does not copy the CTC: offer determines job, job determines CTC, so copying it would create a transitive dependency.
 On the right is the classic trap we discussed as a team. If each recruiter interviewed for only one job, a Panel relation would be in 3NF but not BCNF, and decomposing it would lose a dependency. We avoided it at the requirements level: the business does not need that rule.
-Over to [Member 3] for the implementation.</a:t>
+Now, how the schema is written down.</a:t>
             </a:r>
             <a:endParaRPr lang="en-US" dirty="0"/>
           </a:p>
@@ -3348,11 +3555,12 @@
           <a:p>
             <a:r>
               <a:rPr lang="en-US" dirty="0"/>
-              <a:t>[M3 · [Member 3] · 7:30–8:30]
-Thank you. Our principle in the DDL was: if a rule can be declared, declare it. On the left are two examples.
+              <a:t>[M2 · [Member 2] · 6:10–7:00]
+Our principle in the DDL was: if a rule can be declared, declare it. On the left are two examples.
 First, the disjoint specialization. Each subtype table carries a role_type column fixed by a CHECK to its own type, and a composite foreign key to (job_id, role_type) in job_role. So a full-time job simply cannot get an internship row — the foreign key has nothing to match. No trigger, no application code.
 Second, an EXCLUDE constraint with a GiST index: no two interview rows for the same student may have overlapping time ranges. A UNIQUE constraint cannot express 'overlapping', this can.
-On the right are the totals straight from the system catalog: 45 CHECK constraints, 30 foreign keys, 17 unique alternate keys, and the ON DELETE action we chose for each relationship.</a:t>
+On the right are the totals straight from the system catalog: 45 CHECK constraints, 30 foreign keys, 17 unique alternate keys, and the ON DELETE action we chose for each relationship.
+Over to [Member 3] for the data and the queries.</a:t>
             </a:r>
             <a:endParaRPr lang="en-US" dirty="0"/>
           </a:p>
@@ -7733,7 +7941,7 @@
                   <a:srgbClr val="4F46E5"/>
                 </a:solidFill>
               </a:rPr>
-              <a:t>M4  </a:t>
+              <a:t>M3  </a:t>
             </a:r>
             <a:pPr algn="ctr" indent="0" marL="0">
               <a:buNone/>
@@ -7744,7 +7952,7 @@
                   <a:srgbClr val="312E81"/>
                 </a:solidFill>
               </a:rPr>
-              <a:t>[Member 4]</a:t>
+              <a:t>[Member 3]</a:t>
             </a:r>
             <a:endParaRPr lang="en-US" sz="1200" dirty="0"/>
           </a:p>
@@ -7972,7 +8180,7 @@
                   <a:srgbClr val="4F46E5"/>
                 </a:solidFill>
               </a:rPr>
-              <a:t>M4  </a:t>
+              <a:t>M3  </a:t>
             </a:r>
             <a:pPr algn="ctr" indent="0" marL="0">
               <a:buNone/>
@@ -7983,7 +8191,7 @@
                   <a:srgbClr val="312E81"/>
                 </a:solidFill>
               </a:rPr>
-              <a:t>[Member 4]</a:t>
+              <a:t>[Member 3]</a:t>
             </a:r>
             <a:endParaRPr lang="en-US" sz="1200" dirty="0"/>
           </a:p>
@@ -8628,7 +8836,7 @@
                 <a:ea typeface="Cambria" pitchFamily="34" charset="-122"/>
                 <a:cs typeface="Cambria" pitchFamily="34" charset="-120"/>
               </a:rPr>
-              <a:t>Transactions: ACID under concurrency</a:t>
+              <a:t>Analytics (1/4): the database does the statistics</a:t>
             </a:r>
             <a:endParaRPr lang="en-US" sz="3000" dirty="0"/>
           </a:p>
@@ -8708,20 +8916,136 @@
           </a:p>
         </p:txBody>
       </p:sp>
-      <p:sp>
-        <p:nvSpPr>
-          <p:cNvPr id="5" name="Shape 3"/>
+      <p:graphicFrame>
+        <p:nvGraphicFramePr>
+          <p:cNvPr id="5" name="Chart 0" descr=""/>
+          <p:cNvGraphicFramePr/>
+          <p:nvPr/>
+        </p:nvGraphicFramePr>
+        <p:xfrm>
+          <a:off x="548640" y="1325880"/>
+          <a:ext cx="5760720" cy="3337560"/>
+        </p:xfrm>
+        <a:graphic xmlns:a="http://schemas.openxmlformats.org/drawingml/2006/main">
+          <a:graphicData uri="http://schemas.openxmlformats.org/drawingml/2006/chart">
+            <c:chart xmlns:c="http://schemas.openxmlformats.org/drawingml/2006/chart" r:id="rId1"/>
+          </a:graphicData>
+        </a:graphic>
+      </p:graphicFrame>
+      <p:sp>
+        <p:nvSpPr>
+          <p:cNvPr id="6" name="Shape 3"/>
           <p:cNvSpPr/>
           <p:nvPr/>
         </p:nvSpPr>
         <p:spPr>
           <a:xfrm>
-            <a:off x="548640" y="1371600"/>
-            <a:ext cx="2926080" cy="2194560"/>
+            <a:off x="548640" y="4800600"/>
+            <a:ext cx="5760720" cy="1188720"/>
           </a:xfrm>
           <a:prstGeom prst="roundRect">
             <a:avLst>
-              <a:gd name="adj" fmla="val 4167"/>
+              <a:gd name="adj" fmla="val 6154"/>
+            </a:avLst>
+          </a:prstGeom>
+          <a:solidFill>
+            <a:srgbClr val="0F172A"/>
+          </a:solidFill>
+          <a:ln w="12700">
+            <a:solidFill>
+              <a:srgbClr val="0F172A"/>
+            </a:solidFill>
+            <a:prstDash val="solid"/>
+          </a:ln>
+        </p:spPr>
+      </p:sp>
+      <p:sp>
+        <p:nvSpPr>
+          <p:cNvPr id="7" name="Text 4"/>
+          <p:cNvSpPr txBox="1"/>
+          <p:nvPr/>
+        </p:nvSpPr>
+        <p:spPr>
+          <a:xfrm>
+            <a:off x="731520" y="4937760"/>
+            <a:ext cx="5394960" cy="914400"/>
+          </a:xfrm>
+          <a:prstGeom prst="rect">
+            <a:avLst/>
+          </a:prstGeom>
+          <a:noFill/>
+          <a:ln/>
+        </p:spPr>
+        <p:txBody>
+          <a:bodyPr wrap="square" lIns="0" tIns="0" rIns="0" bIns="0" rtlCol="0" anchor="t"/>
+          <a:lstStyle/>
+          <a:p>
+            <a:pPr indent="0" marL="0">
+              <a:buNone/>
+            </a:pPr>
+            <a:r>
+              <a:rPr lang="en-US" sz="1100" dirty="0">
+                <a:solidFill>
+                  <a:srgbClr val="E2E8F0"/>
+                </a:solidFill>
+                <a:latin typeface="Courier New" pitchFamily="34" charset="0"/>
+                <a:ea typeface="Courier New" pitchFamily="34" charset="-122"/>
+                <a:cs typeface="Courier New" pitchFamily="34" charset="-120"/>
+              </a:rPr>
+              <a:t>SELECT width_bucket(cgpa, 6, 10, 4) AS band, count(*),</a:t>
+            </a:r>
+            <a:endParaRPr lang="en-US" sz="1100" dirty="0"/>
+          </a:p>
+          <a:p>
+            <a:pPr indent="0" marL="0">
+              <a:buNone/>
+            </a:pPr>
+            <a:r>
+              <a:rPr lang="en-US" sz="1100" dirty="0">
+                <a:solidFill>
+                  <a:srgbClr val="E2E8F0"/>
+                </a:solidFill>
+                <a:latin typeface="Courier New" pitchFamily="34" charset="0"/>
+                <a:ea typeface="Courier New" pitchFamily="34" charset="-122"/>
+                <a:cs typeface="Courier New" pitchFamily="34" charset="-120"/>
+              </a:rPr>
+              <a:t>       count(*) FILTER (WHERE status = 'PLACED')</a:t>
+            </a:r>
+            <a:endParaRPr lang="en-US" sz="1100" dirty="0"/>
+          </a:p>
+          <a:p>
+            <a:pPr indent="0" marL="0">
+              <a:buNone/>
+            </a:pPr>
+            <a:r>
+              <a:rPr lang="en-US" sz="1100" dirty="0">
+                <a:solidFill>
+                  <a:srgbClr val="E2E8F0"/>
+                </a:solidFill>
+                <a:latin typeface="Courier New" pitchFamily="34" charset="0"/>
+                <a:ea typeface="Courier New" pitchFamily="34" charset="-122"/>
+                <a:cs typeface="Courier New" pitchFamily="34" charset="-120"/>
+              </a:rPr>
+              <a:t>FROM student LEFT JOIN v_placement_status ... GROUP BY band;</a:t>
+            </a:r>
+            <a:endParaRPr lang="en-US" sz="1100" dirty="0"/>
+          </a:p>
+        </p:txBody>
+      </p:sp>
+      <p:sp>
+        <p:nvSpPr>
+          <p:cNvPr id="8" name="Shape 5"/>
+          <p:cNvSpPr/>
+          <p:nvPr/>
+        </p:nvSpPr>
+        <p:spPr>
+          <a:xfrm>
+            <a:off x="6629400" y="1325880"/>
+            <a:ext cx="5029200" cy="1280160"/>
+          </a:xfrm>
+          <a:prstGeom prst="roundRect">
+            <a:avLst>
+              <a:gd name="adj" fmla="val 7143"/>
             </a:avLst>
           </a:prstGeom>
           <a:solidFill>
@@ -8737,111 +9061,14 @@
       </p:sp>
       <p:sp>
         <p:nvSpPr>
-          <p:cNvPr id="6" name="Shape 4"/>
-          <p:cNvSpPr/>
-          <p:nvPr/>
-        </p:nvSpPr>
-        <p:spPr>
-          <a:xfrm>
-            <a:off x="731520" y="1554480"/>
-            <a:ext cx="502920" cy="502920"/>
-          </a:xfrm>
-          <a:prstGeom prst="ellipse">
-            <a:avLst/>
-          </a:prstGeom>
-          <a:solidFill>
-            <a:srgbClr val="4F46E5"/>
-          </a:solidFill>
-          <a:ln w="12700">
-            <a:solidFill>
-              <a:srgbClr val="4F46E5"/>
-            </a:solidFill>
-            <a:prstDash val="solid"/>
-          </a:ln>
-        </p:spPr>
-      </p:sp>
-      <p:sp>
-        <p:nvSpPr>
-          <p:cNvPr id="7" name="Text 5"/>
+          <p:cNvPr id="9" name="Text 6"/>
           <p:cNvSpPr txBox="1"/>
           <p:nvPr/>
         </p:nvSpPr>
         <p:spPr>
           <a:xfrm>
-            <a:off x="731520" y="1554480"/>
-            <a:ext cx="502920" cy="502920"/>
-          </a:xfrm>
-          <a:prstGeom prst="rect">
-            <a:avLst/>
-          </a:prstGeom>
-          <a:noFill/>
-          <a:ln/>
-        </p:spPr>
-        <p:txBody>
-          <a:bodyPr wrap="square" lIns="0" tIns="0" rIns="0" bIns="0" rtlCol="0" anchor="ctr"/>
-          <a:lstStyle/>
-          <a:p>
-            <a:pPr algn="ctr" indent="0" marL="0">
-              <a:buNone/>
-            </a:pPr>
-            <a:r>
-              <a:rPr lang="en-US" sz="1800" b="1" dirty="0">
-                <a:solidFill>
-                  <a:srgbClr val="FFFFFF"/>
-                </a:solidFill>
-              </a:rPr>
-              <a:t>A</a:t>
-            </a:r>
-            <a:endParaRPr lang="en-US" sz="1800" dirty="0"/>
-          </a:p>
-        </p:txBody>
-      </p:sp>
-      <p:sp>
-        <p:nvSpPr>
-          <p:cNvPr id="8" name="Text 6"/>
-          <p:cNvSpPr txBox="1"/>
-          <p:nvPr/>
-        </p:nvSpPr>
-        <p:spPr>
-          <a:xfrm>
-            <a:off x="1371600" y="1572768"/>
-            <a:ext cx="2011680" cy="457200"/>
-          </a:xfrm>
-          <a:prstGeom prst="rect">
-            <a:avLst/>
-          </a:prstGeom>
-          <a:noFill/>
-          <a:ln/>
-        </p:spPr>
-        <p:txBody>
-          <a:bodyPr wrap="square" lIns="0" tIns="0" rIns="0" bIns="0" rtlCol="0" anchor="ctr"/>
-          <a:lstStyle/>
-          <a:p>
-            <a:pPr indent="0" marL="0">
-              <a:buNone/>
-            </a:pPr>
-            <a:r>
-              <a:rPr lang="en-US" sz="1600" b="1" dirty="0">
-                <a:solidFill>
-                  <a:srgbClr val="1F2937"/>
-                </a:solidFill>
-              </a:rPr>
-              <a:t>Atomicity</a:t>
-            </a:r>
-            <a:endParaRPr lang="en-US" sz="1600" dirty="0"/>
-          </a:p>
-        </p:txBody>
-      </p:sp>
-      <p:sp>
-        <p:nvSpPr>
-          <p:cNvPr id="9" name="Text 7"/>
-          <p:cNvSpPr txBox="1"/>
-          <p:nvPr/>
-        </p:nvSpPr>
-        <p:spPr>
-          <a:xfrm>
-            <a:off x="731520" y="2240280"/>
-            <a:ext cx="2606040" cy="1234440"/>
+            <a:off x="6793992" y="1435608"/>
+            <a:ext cx="4700016" cy="1060704"/>
           </a:xfrm>
           <a:prstGeom prst="rect">
             <a:avLst/>
@@ -8854,34 +9081,60 @@
           <a:lstStyle/>
           <a:p>
             <a:pPr indent="0" marL="0">
-              <a:buNone/>
-            </a:pPr>
-            <a:r>
-              <a:rPr lang="en-US" sz="1300" dirty="0">
+              <a:spcAft>
+                <a:spcPts val="400"/>
+              </a:spcAft>
+              <a:buNone/>
+            </a:pPr>
+            <a:r>
+              <a:rPr lang="en-US" sz="1400" b="1" dirty="0">
+                <a:solidFill>
+                  <a:srgbClr val="4F46E5"/>
+                </a:solidFill>
+                <a:latin typeface="Calibri" pitchFamily="34" charset="0"/>
+                <a:ea typeface="Calibri" pitchFamily="34" charset="-122"/>
+                <a:cs typeface="Calibri" pitchFamily="34" charset="-120"/>
+              </a:rPr>
+              <a:t>A1 · CGPA</a:t>
+            </a:r>
+            <a:endParaRPr lang="en-US" sz="1400" dirty="0"/>
+          </a:p>
+          <a:p>
+            <a:pPr indent="0" marL="0">
+              <a:spcAft>
+                <a:spcPts val="300"/>
+              </a:spcAft>
+              <a:buNone/>
+            </a:pPr>
+            <a:r>
+              <a:rPr lang="en-US" sz="1250" dirty="0">
                 <a:solidFill>
                   <a:srgbClr val="374151"/>
                 </a:solidFill>
-              </a:rPr>
-              <a:t>ROLLBACK undoes the whole cascade: offers, applications, interviews, log (TC-TXN-01)</a:t>
-            </a:r>
-            <a:endParaRPr lang="en-US" sz="1300" dirty="0"/>
+                <a:latin typeface="Calibri" pitchFamily="34" charset="0"/>
+                <a:ea typeface="Calibri" pitchFamily="34" charset="-122"/>
+                <a:cs typeface="Calibri" pitchFamily="34" charset="-120"/>
+              </a:rPr>
+              <a:t>Mean 7.88, median 7.87, SD 0.78: symmetric. ANOVA across programs p = 0.907: the programs do not differ.</a:t>
+            </a:r>
+            <a:endParaRPr lang="en-US" sz="1400" dirty="0"/>
           </a:p>
         </p:txBody>
       </p:sp>
       <p:sp>
         <p:nvSpPr>
-          <p:cNvPr id="10" name="Shape 8"/>
+          <p:cNvPr id="10" name="Shape 7"/>
           <p:cNvSpPr/>
           <p:nvPr/>
         </p:nvSpPr>
         <p:spPr>
           <a:xfrm>
-            <a:off x="3611880" y="1371600"/>
-            <a:ext cx="2926080" cy="2194560"/>
+            <a:off x="6629400" y="2743200"/>
+            <a:ext cx="5029200" cy="1280160"/>
           </a:xfrm>
           <a:prstGeom prst="roundRect">
             <a:avLst>
-              <a:gd name="adj" fmla="val 4167"/>
+              <a:gd name="adj" fmla="val 7143"/>
             </a:avLst>
           </a:prstGeom>
           <a:solidFill>
@@ -8897,111 +9150,14 @@
       </p:sp>
       <p:sp>
         <p:nvSpPr>
-          <p:cNvPr id="11" name="Shape 9"/>
-          <p:cNvSpPr/>
-          <p:nvPr/>
-        </p:nvSpPr>
-        <p:spPr>
-          <a:xfrm>
-            <a:off x="3794760" y="1554480"/>
-            <a:ext cx="502920" cy="502920"/>
-          </a:xfrm>
-          <a:prstGeom prst="ellipse">
-            <a:avLst/>
-          </a:prstGeom>
-          <a:solidFill>
-            <a:srgbClr val="4F46E5"/>
-          </a:solidFill>
-          <a:ln w="12700">
-            <a:solidFill>
-              <a:srgbClr val="4F46E5"/>
-            </a:solidFill>
-            <a:prstDash val="solid"/>
-          </a:ln>
-        </p:spPr>
-      </p:sp>
-      <p:sp>
-        <p:nvSpPr>
-          <p:cNvPr id="12" name="Text 10"/>
+          <p:cNvPr id="11" name="Text 8"/>
           <p:cNvSpPr txBox="1"/>
           <p:nvPr/>
         </p:nvSpPr>
         <p:spPr>
           <a:xfrm>
-            <a:off x="3794760" y="1554480"/>
-            <a:ext cx="502920" cy="502920"/>
-          </a:xfrm>
-          <a:prstGeom prst="rect">
-            <a:avLst/>
-          </a:prstGeom>
-          <a:noFill/>
-          <a:ln/>
-        </p:spPr>
-        <p:txBody>
-          <a:bodyPr wrap="square" lIns="0" tIns="0" rIns="0" bIns="0" rtlCol="0" anchor="ctr"/>
-          <a:lstStyle/>
-          <a:p>
-            <a:pPr algn="ctr" indent="0" marL="0">
-              <a:buNone/>
-            </a:pPr>
-            <a:r>
-              <a:rPr lang="en-US" sz="1800" b="1" dirty="0">
-                <a:solidFill>
-                  <a:srgbClr val="FFFFFF"/>
-                </a:solidFill>
-              </a:rPr>
-              <a:t>C</a:t>
-            </a:r>
-            <a:endParaRPr lang="en-US" sz="1800" dirty="0"/>
-          </a:p>
-        </p:txBody>
-      </p:sp>
-      <p:sp>
-        <p:nvSpPr>
-          <p:cNvPr id="13" name="Text 11"/>
-          <p:cNvSpPr txBox="1"/>
-          <p:nvPr/>
-        </p:nvSpPr>
-        <p:spPr>
-          <a:xfrm>
-            <a:off x="4434840" y="1572768"/>
-            <a:ext cx="2011680" cy="457200"/>
-          </a:xfrm>
-          <a:prstGeom prst="rect">
-            <a:avLst/>
-          </a:prstGeom>
-          <a:noFill/>
-          <a:ln/>
-        </p:spPr>
-        <p:txBody>
-          <a:bodyPr wrap="square" lIns="0" tIns="0" rIns="0" bIns="0" rtlCol="0" anchor="ctr"/>
-          <a:lstStyle/>
-          <a:p>
-            <a:pPr indent="0" marL="0">
-              <a:buNone/>
-            </a:pPr>
-            <a:r>
-              <a:rPr lang="en-US" sz="1600" b="1" dirty="0">
-                <a:solidFill>
-                  <a:srgbClr val="1F2937"/>
-                </a:solidFill>
-              </a:rPr>
-              <a:t>Consistency</a:t>
-            </a:r>
-            <a:endParaRPr lang="en-US" sz="1600" dirty="0"/>
-          </a:p>
-        </p:txBody>
-      </p:sp>
-      <p:sp>
-        <p:nvSpPr>
-          <p:cNvPr id="14" name="Text 12"/>
-          <p:cNvSpPr txBox="1"/>
-          <p:nvPr/>
-        </p:nvSpPr>
-        <p:spPr>
-          <a:xfrm>
-            <a:off x="3794760" y="2240280"/>
-            <a:ext cx="2606040" cy="1234440"/>
+            <a:off x="6793992" y="2852928"/>
+            <a:ext cx="4700016" cy="1060704"/>
           </a:xfrm>
           <a:prstGeom prst="rect">
             <a:avLst/>
@@ -9014,34 +9170,60 @@
           <a:lstStyle/>
           <a:p>
             <a:pPr indent="0" marL="0">
-              <a:buNone/>
-            </a:pPr>
-            <a:r>
-              <a:rPr lang="en-US" sz="1300" dirty="0">
+              <a:spcAft>
+                <a:spcPts val="400"/>
+              </a:spcAft>
+              <a:buNone/>
+            </a:pPr>
+            <a:r>
+              <a:rPr lang="en-US" sz="1400" b="1" dirty="0">
+                <a:solidFill>
+                  <a:srgbClr val="4F46E5"/>
+                </a:solidFill>
+                <a:latin typeface="Calibri" pitchFamily="34" charset="0"/>
+                <a:ea typeface="Calibri" pitchFamily="34" charset="-122"/>
+                <a:cs typeface="Calibri" pitchFamily="34" charset="-120"/>
+              </a:rPr>
+              <a:t>A3 · Funnel</a:t>
+            </a:r>
+            <a:endParaRPr lang="en-US" sz="1400" dirty="0"/>
+          </a:p>
+          <a:p>
+            <a:pPr indent="0" marL="0">
+              <a:spcAft>
+                <a:spcPts val="300"/>
+              </a:spcAft>
+              <a:buNone/>
+            </a:pPr>
+            <a:r>
+              <a:rPr lang="en-US" sz="1250" dirty="0">
                 <a:solidFill>
                   <a:srgbClr val="374151"/>
                 </a:solidFill>
-              </a:rPr>
-              <a:t>Constraints + deferred totality check at COMMIT; a job without a subtype cannot commit (TC-TXN-04)</a:t>
-            </a:r>
-            <a:endParaRPr lang="en-US" sz="1300" dirty="0"/>
+                <a:latin typeface="Calibri" pitchFamily="34" charset="0"/>
+                <a:ea typeface="Calibri" pitchFamily="34" charset="-122"/>
+                <a:cs typeface="Calibri" pitchFamily="34" charset="-120"/>
+              </a:rPr>
+              <a:t>45–49% of applications reach an interview, but only 4–9% become offers: students fail after the interview, not at the CV.</a:t>
+            </a:r>
+            <a:endParaRPr lang="en-US" sz="1400" dirty="0"/>
           </a:p>
         </p:txBody>
       </p:sp>
       <p:sp>
         <p:nvSpPr>
-          <p:cNvPr id="15" name="Shape 13"/>
+          <p:cNvPr id="12" name="Shape 9"/>
           <p:cNvSpPr/>
           <p:nvPr/>
         </p:nvSpPr>
         <p:spPr>
           <a:xfrm>
-            <a:off x="548640" y="3703320"/>
-            <a:ext cx="2926080" cy="2194560"/>
+            <a:off x="6629400" y="4160520"/>
+            <a:ext cx="5029200" cy="1280160"/>
           </a:xfrm>
           <a:prstGeom prst="roundRect">
             <a:avLst>
-              <a:gd name="adj" fmla="val 4167"/>
+              <a:gd name="adj" fmla="val 7143"/>
             </a:avLst>
           </a:prstGeom>
           <a:solidFill>
@@ -9057,39 +9239,76 @@
       </p:sp>
       <p:sp>
         <p:nvSpPr>
-          <p:cNvPr id="16" name="Shape 14"/>
-          <p:cNvSpPr/>
-          <p:nvPr/>
-        </p:nvSpPr>
-        <p:spPr>
-          <a:xfrm>
-            <a:off x="731520" y="3886200"/>
-            <a:ext cx="502920" cy="502920"/>
-          </a:xfrm>
-          <a:prstGeom prst="ellipse">
-            <a:avLst/>
-          </a:prstGeom>
-          <a:solidFill>
-            <a:srgbClr val="4F46E5"/>
-          </a:solidFill>
-          <a:ln w="12700">
-            <a:solidFill>
-              <a:srgbClr val="4F46E5"/>
-            </a:solidFill>
-            <a:prstDash val="solid"/>
-          </a:ln>
-        </p:spPr>
-      </p:sp>
-      <p:sp>
-        <p:nvSpPr>
-          <p:cNvPr id="17" name="Text 15"/>
+          <p:cNvPr id="13" name="Text 10"/>
           <p:cNvSpPr txBox="1"/>
           <p:nvPr/>
         </p:nvSpPr>
         <p:spPr>
           <a:xfrm>
-            <a:off x="731520" y="3886200"/>
-            <a:ext cx="502920" cy="502920"/>
+            <a:off x="6793992" y="4270248"/>
+            <a:ext cx="4700016" cy="1060704"/>
+          </a:xfrm>
+          <a:prstGeom prst="rect">
+            <a:avLst/>
+          </a:prstGeom>
+          <a:noFill/>
+          <a:ln/>
+        </p:spPr>
+        <p:txBody>
+          <a:bodyPr wrap="square" lIns="0" tIns="0" rIns="0" bIns="0" rtlCol="0" anchor="t"/>
+          <a:lstStyle/>
+          <a:p>
+            <a:pPr indent="0" marL="0">
+              <a:spcAft>
+                <a:spcPts val="400"/>
+              </a:spcAft>
+              <a:buNone/>
+            </a:pPr>
+            <a:r>
+              <a:rPr lang="en-US" sz="1400" b="1" dirty="0">
+                <a:solidFill>
+                  <a:srgbClr val="4F46E5"/>
+                </a:solidFill>
+                <a:latin typeface="Calibri" pitchFamily="34" charset="0"/>
+                <a:ea typeface="Calibri" pitchFamily="34" charset="-122"/>
+                <a:cs typeface="Calibri" pitchFamily="34" charset="-120"/>
+              </a:rPr>
+              <a:t>A4 · Skill gap</a:t>
+            </a:r>
+            <a:endParaRPr lang="en-US" sz="1400" dirty="0"/>
+          </a:p>
+          <a:p>
+            <a:pPr indent="0" marL="0">
+              <a:spcAft>
+                <a:spcPts val="300"/>
+              </a:spcAft>
+              <a:buNone/>
+            </a:pPr>
+            <a:r>
+              <a:rPr lang="en-US" sz="1250" dirty="0">
+                <a:solidFill>
+                  <a:srgbClr val="374151"/>
+                </a:solidFill>
+                <a:latin typeface="Calibri" pitchFamily="34" charset="0"/>
+                <a:ea typeface="Calibri" pitchFamily="34" charset="-122"/>
+                <a:cs typeface="Calibri" pitchFamily="34" charset="-120"/>
+              </a:rPr>
+              <a:t>SQL has the most jobs per proficient student, then Excel and Statistics: run workshops there first.</a:t>
+            </a:r>
+            <a:endParaRPr lang="en-US" sz="1400" dirty="0"/>
+          </a:p>
+        </p:txBody>
+      </p:sp>
+      <p:sp>
+        <p:nvSpPr>
+          <p:cNvPr id="14" name="Text 11"/>
+          <p:cNvSpPr txBox="1"/>
+          <p:nvPr/>
+        </p:nvSpPr>
+        <p:spPr>
+          <a:xfrm>
+            <a:off x="6629400" y="5623560"/>
+            <a:ext cx="5029200" cy="365760"/>
           </a:xfrm>
           <a:prstGeom prst="rect">
             <a:avLst/>
@@ -9101,782 +9320,18 @@
           <a:bodyPr wrap="square" lIns="0" tIns="0" rIns="0" bIns="0" rtlCol="0" anchor="ctr"/>
           <a:lstStyle/>
           <a:p>
-            <a:pPr algn="ctr" indent="0" marL="0">
-              <a:buNone/>
-            </a:pPr>
-            <a:r>
-              <a:rPr lang="en-US" sz="1800" b="1" dirty="0">
-                <a:solidFill>
-                  <a:srgbClr val="FFFFFF"/>
-                </a:solidFill>
-              </a:rPr>
-              <a:t>I</a:t>
-            </a:r>
-            <a:endParaRPr lang="en-US" sz="1800" dirty="0"/>
-          </a:p>
-        </p:txBody>
-      </p:sp>
-      <p:sp>
-        <p:nvSpPr>
-          <p:cNvPr id="18" name="Text 16"/>
-          <p:cNvSpPr txBox="1"/>
-          <p:nvPr/>
-        </p:nvSpPr>
-        <p:spPr>
-          <a:xfrm>
-            <a:off x="1371600" y="3904488"/>
-            <a:ext cx="2011680" cy="457200"/>
-          </a:xfrm>
-          <a:prstGeom prst="rect">
-            <a:avLst/>
-          </a:prstGeom>
-          <a:noFill/>
-          <a:ln/>
-        </p:spPr>
-        <p:txBody>
-          <a:bodyPr wrap="square" lIns="0" tIns="0" rIns="0" bIns="0" rtlCol="0" anchor="ctr"/>
-          <a:lstStyle/>
-          <a:p>
             <a:pPr indent="0" marL="0">
               <a:buNone/>
             </a:pPr>
             <a:r>
-              <a:rPr lang="en-US" sz="1600" b="1" dirty="0">
-                <a:solidFill>
-                  <a:srgbClr val="1F2937"/>
-                </a:solidFill>
-              </a:rPr>
-              <a:t>Isolation</a:t>
-            </a:r>
-            <a:endParaRPr lang="en-US" sz="1600" dirty="0"/>
-          </a:p>
-        </p:txBody>
-      </p:sp>
-      <p:sp>
-        <p:nvSpPr>
-          <p:cNvPr id="19" name="Text 17"/>
-          <p:cNvSpPr txBox="1"/>
-          <p:nvPr/>
-        </p:nvSpPr>
-        <p:spPr>
-          <a:xfrm>
-            <a:off x="731520" y="4572000"/>
-            <a:ext cx="2606040" cy="1234440"/>
-          </a:xfrm>
-          <a:prstGeom prst="rect">
-            <a:avLst/>
-          </a:prstGeom>
-          <a:noFill/>
-          <a:ln/>
-        </p:spPr>
-        <p:txBody>
-          <a:bodyPr wrap="square" lIns="0" tIns="0" rIns="0" bIns="0" rtlCol="0" anchor="t"/>
-          <a:lstStyle/>
-          <a:p>
-            <a:pPr indent="0" marL="0">
-              <a:buNone/>
-            </a:pPr>
-            <a:r>
-              <a:rPr lang="en-US" sz="1300" dirty="0">
-                <a:solidFill>
-                  <a:srgbClr val="374151"/>
-                </a:solidFill>
-              </a:rPr>
-              <a:t>Row lock on the student serialises concurrent acceptances (TC-TXN-02/03)</a:t>
-            </a:r>
-            <a:endParaRPr lang="en-US" sz="1300" dirty="0"/>
-          </a:p>
-        </p:txBody>
-      </p:sp>
-      <p:sp>
-        <p:nvSpPr>
-          <p:cNvPr id="20" name="Shape 18"/>
-          <p:cNvSpPr/>
-          <p:nvPr/>
-        </p:nvSpPr>
-        <p:spPr>
-          <a:xfrm>
-            <a:off x="3611880" y="3703320"/>
-            <a:ext cx="2926080" cy="2194560"/>
-          </a:xfrm>
-          <a:prstGeom prst="roundRect">
-            <a:avLst>
-              <a:gd name="adj" fmla="val 4167"/>
-            </a:avLst>
-          </a:prstGeom>
-          <a:solidFill>
-            <a:srgbClr val="F6F7FB"/>
-          </a:solidFill>
-          <a:ln w="12700">
-            <a:solidFill>
-              <a:srgbClr val="E5E7EB"/>
-            </a:solidFill>
-            <a:prstDash val="solid"/>
-          </a:ln>
-        </p:spPr>
-      </p:sp>
-      <p:sp>
-        <p:nvSpPr>
-          <p:cNvPr id="21" name="Shape 19"/>
-          <p:cNvSpPr/>
-          <p:nvPr/>
-        </p:nvSpPr>
-        <p:spPr>
-          <a:xfrm>
-            <a:off x="3794760" y="3886200"/>
-            <a:ext cx="502920" cy="502920"/>
-          </a:xfrm>
-          <a:prstGeom prst="ellipse">
-            <a:avLst/>
-          </a:prstGeom>
-          <a:solidFill>
-            <a:srgbClr val="4F46E5"/>
-          </a:solidFill>
-          <a:ln w="12700">
-            <a:solidFill>
-              <a:srgbClr val="4F46E5"/>
-            </a:solidFill>
-            <a:prstDash val="solid"/>
-          </a:ln>
-        </p:spPr>
-      </p:sp>
-      <p:sp>
-        <p:nvSpPr>
-          <p:cNvPr id="22" name="Text 20"/>
-          <p:cNvSpPr txBox="1"/>
-          <p:nvPr/>
-        </p:nvSpPr>
-        <p:spPr>
-          <a:xfrm>
-            <a:off x="3794760" y="3886200"/>
-            <a:ext cx="502920" cy="502920"/>
-          </a:xfrm>
-          <a:prstGeom prst="rect">
-            <a:avLst/>
-          </a:prstGeom>
-          <a:noFill/>
-          <a:ln/>
-        </p:spPr>
-        <p:txBody>
-          <a:bodyPr wrap="square" lIns="0" tIns="0" rIns="0" bIns="0" rtlCol="0" anchor="ctr"/>
-          <a:lstStyle/>
-          <a:p>
-            <a:pPr algn="ctr" indent="0" marL="0">
-              <a:buNone/>
-            </a:pPr>
-            <a:r>
-              <a:rPr lang="en-US" sz="1800" b="1" dirty="0">
-                <a:solidFill>
-                  <a:srgbClr val="FFFFFF"/>
-                </a:solidFill>
-              </a:rPr>
-              <a:t>D</a:t>
-            </a:r>
-            <a:endParaRPr lang="en-US" sz="1800" dirty="0"/>
-          </a:p>
-        </p:txBody>
-      </p:sp>
-      <p:sp>
-        <p:nvSpPr>
-          <p:cNvPr id="23" name="Text 21"/>
-          <p:cNvSpPr txBox="1"/>
-          <p:nvPr/>
-        </p:nvSpPr>
-        <p:spPr>
-          <a:xfrm>
-            <a:off x="4434840" y="3904488"/>
-            <a:ext cx="2011680" cy="457200"/>
-          </a:xfrm>
-          <a:prstGeom prst="rect">
-            <a:avLst/>
-          </a:prstGeom>
-          <a:noFill/>
-          <a:ln/>
-        </p:spPr>
-        <p:txBody>
-          <a:bodyPr wrap="square" lIns="0" tIns="0" rIns="0" bIns="0" rtlCol="0" anchor="ctr"/>
-          <a:lstStyle/>
-          <a:p>
-            <a:pPr indent="0" marL="0">
-              <a:buNone/>
-            </a:pPr>
-            <a:r>
-              <a:rPr lang="en-US" sz="1600" b="1" dirty="0">
-                <a:solidFill>
-                  <a:srgbClr val="1F2937"/>
-                </a:solidFill>
-              </a:rPr>
-              <a:t>Durability</a:t>
-            </a:r>
-            <a:endParaRPr lang="en-US" sz="1600" dirty="0"/>
-          </a:p>
-        </p:txBody>
-      </p:sp>
-      <p:sp>
-        <p:nvSpPr>
-          <p:cNvPr id="24" name="Text 22"/>
-          <p:cNvSpPr txBox="1"/>
-          <p:nvPr/>
-        </p:nvSpPr>
-        <p:spPr>
-          <a:xfrm>
-            <a:off x="3794760" y="4572000"/>
-            <a:ext cx="2606040" cy="1234440"/>
-          </a:xfrm>
-          <a:prstGeom prst="rect">
-            <a:avLst/>
-          </a:prstGeom>
-          <a:noFill/>
-          <a:ln/>
-        </p:spPr>
-        <p:txBody>
-          <a:bodyPr wrap="square" lIns="0" tIns="0" rIns="0" bIns="0" rtlCol="0" anchor="t"/>
-          <a:lstStyle/>
-          <a:p>
-            <a:pPr indent="0" marL="0">
-              <a:buNone/>
-            </a:pPr>
-            <a:r>
-              <a:rPr lang="en-US" sz="1300" dirty="0">
-                <a:solidFill>
-                  <a:srgbClr val="374151"/>
-                </a:solidFill>
-              </a:rPr>
-              <a:t>Once COMMIT returns, PostgreSQL's write-ahead log keeps it through a crash</a:t>
-            </a:r>
-            <a:endParaRPr lang="en-US" sz="1300" dirty="0"/>
-          </a:p>
-        </p:txBody>
-      </p:sp>
-      <p:sp>
-        <p:nvSpPr>
-          <p:cNvPr id="25" name="Text 23"/>
-          <p:cNvSpPr txBox="1"/>
-          <p:nvPr/>
-        </p:nvSpPr>
-        <p:spPr>
-          <a:xfrm>
-            <a:off x="7086600" y="1371600"/>
-            <a:ext cx="2103120" cy="365760"/>
-          </a:xfrm>
-          <a:prstGeom prst="rect">
-            <a:avLst/>
-          </a:prstGeom>
-          <a:noFill/>
-          <a:ln/>
-        </p:spPr>
-        <p:txBody>
-          <a:bodyPr wrap="square" lIns="0" tIns="0" rIns="0" bIns="0" rtlCol="0" anchor="ctr"/>
-          <a:lstStyle/>
-          <a:p>
-            <a:pPr algn="ctr" indent="0" marL="0">
-              <a:buNone/>
-            </a:pPr>
-            <a:r>
-              <a:rPr lang="en-US" sz="1500" b="1" dirty="0">
+              <a:rPr lang="en-US" sz="1200" b="1" dirty="0">
                 <a:solidFill>
                   <a:srgbClr val="4F46E5"/>
                 </a:solidFill>
               </a:rPr>
-              <a:t>Session A</a:t>
-            </a:r>
-            <a:endParaRPr lang="en-US" sz="1500" dirty="0"/>
-          </a:p>
-        </p:txBody>
-      </p:sp>
-      <p:sp>
-        <p:nvSpPr>
-          <p:cNvPr id="26" name="Shape 24"/>
-          <p:cNvSpPr/>
-          <p:nvPr/>
-        </p:nvSpPr>
-        <p:spPr>
-          <a:xfrm>
-            <a:off x="8138160" y="1783080"/>
-            <a:ext cx="0" cy="4160520"/>
-          </a:xfrm>
-          <a:prstGeom prst="line">
-            <a:avLst/>
-          </a:prstGeom>
-          <a:noFill/>
-          <a:ln w="19050">
-            <a:solidFill>
-              <a:srgbClr val="CBD5E1"/>
-            </a:solidFill>
-            <a:prstDash val="dash"/>
-          </a:ln>
-        </p:spPr>
-      </p:sp>
-      <p:sp>
-        <p:nvSpPr>
-          <p:cNvPr id="27" name="Text 25"/>
-          <p:cNvSpPr txBox="1"/>
-          <p:nvPr/>
-        </p:nvSpPr>
-        <p:spPr>
-          <a:xfrm>
-            <a:off x="9555480" y="1371600"/>
-            <a:ext cx="2103120" cy="365760"/>
-          </a:xfrm>
-          <a:prstGeom prst="rect">
-            <a:avLst/>
-          </a:prstGeom>
-          <a:noFill/>
-          <a:ln/>
-        </p:spPr>
-        <p:txBody>
-          <a:bodyPr wrap="square" lIns="0" tIns="0" rIns="0" bIns="0" rtlCol="0" anchor="ctr"/>
-          <a:lstStyle/>
-          <a:p>
-            <a:pPr algn="ctr" indent="0" marL="0">
-              <a:buNone/>
-            </a:pPr>
-            <a:r>
-              <a:rPr lang="en-US" sz="1500" b="1" dirty="0">
-                <a:solidFill>
-                  <a:srgbClr val="C2410C"/>
-                </a:solidFill>
-              </a:rPr>
-              <a:t>Session B</a:t>
-            </a:r>
-            <a:endParaRPr lang="en-US" sz="1500" dirty="0"/>
-          </a:p>
-        </p:txBody>
-      </p:sp>
-      <p:sp>
-        <p:nvSpPr>
-          <p:cNvPr id="28" name="Shape 26"/>
-          <p:cNvSpPr/>
-          <p:nvPr/>
-        </p:nvSpPr>
-        <p:spPr>
-          <a:xfrm>
-            <a:off x="10607040" y="1783080"/>
-            <a:ext cx="0" cy="4160520"/>
-          </a:xfrm>
-          <a:prstGeom prst="line">
-            <a:avLst/>
-          </a:prstGeom>
-          <a:noFill/>
-          <a:ln w="19050">
-            <a:solidFill>
-              <a:srgbClr val="CBD5E1"/>
-            </a:solidFill>
-            <a:prstDash val="dash"/>
-          </a:ln>
-        </p:spPr>
-      </p:sp>
-      <p:sp>
-        <p:nvSpPr>
-          <p:cNvPr id="29" name="Shape 27"/>
-          <p:cNvSpPr/>
-          <p:nvPr/>
-        </p:nvSpPr>
-        <p:spPr>
-          <a:xfrm>
-            <a:off x="7086600" y="1874520"/>
-            <a:ext cx="2103120" cy="548640"/>
-          </a:xfrm>
-          <a:prstGeom prst="roundRect">
-            <a:avLst>
-              <a:gd name="adj" fmla="val 13333"/>
-            </a:avLst>
-          </a:prstGeom>
-          <a:solidFill>
-            <a:srgbClr val="EEF0FF"/>
-          </a:solidFill>
-          <a:ln w="15240">
-            <a:solidFill>
-              <a:srgbClr val="4F46E5"/>
-            </a:solidFill>
-            <a:prstDash val="solid"/>
-          </a:ln>
-        </p:spPr>
-      </p:sp>
-      <p:sp>
-        <p:nvSpPr>
-          <p:cNvPr id="30" name="Text 28"/>
-          <p:cNvSpPr txBox="1"/>
-          <p:nvPr/>
-        </p:nvSpPr>
-        <p:spPr>
-          <a:xfrm>
-            <a:off x="7159752" y="1874520"/>
-            <a:ext cx="1956816" cy="548640"/>
-          </a:xfrm>
-          <a:prstGeom prst="rect">
-            <a:avLst/>
-          </a:prstGeom>
-          <a:noFill/>
-          <a:ln/>
-        </p:spPr>
-        <p:txBody>
-          <a:bodyPr wrap="square" lIns="0" tIns="0" rIns="0" bIns="0" rtlCol="0" anchor="ctr"/>
-          <a:lstStyle/>
-          <a:p>
-            <a:pPr algn="ctr" indent="0" marL="0">
-              <a:buNone/>
-            </a:pPr>
-            <a:r>
-              <a:rPr lang="en-US" sz="1200" dirty="0">
-                <a:solidFill>
-                  <a:srgbClr val="1F2937"/>
-                </a:solidFill>
-              </a:rPr>
-              <a:t>lock student row</a:t>
+              <a:t>γ band; count(*), count(σ status='PLACED') ( Student ⟕ σ cycle='FINAL' (PlacementStatus) )</a:t>
             </a:r>
             <a:endParaRPr lang="en-US" sz="1200" dirty="0"/>
-          </a:p>
-        </p:txBody>
-      </p:sp>
-      <p:sp>
-        <p:nvSpPr>
-          <p:cNvPr id="31" name="Shape 29"/>
-          <p:cNvSpPr/>
-          <p:nvPr/>
-        </p:nvSpPr>
-        <p:spPr>
-          <a:xfrm>
-            <a:off x="9555480" y="2514600"/>
-            <a:ext cx="2103120" cy="548640"/>
-          </a:xfrm>
-          <a:prstGeom prst="roundRect">
-            <a:avLst>
-              <a:gd name="adj" fmla="val 13333"/>
-            </a:avLst>
-          </a:prstGeom>
-          <a:solidFill>
-            <a:srgbClr val="FFF4E6"/>
-          </a:solidFill>
-          <a:ln w="15240">
-            <a:solidFill>
-              <a:srgbClr val="C2410C"/>
-            </a:solidFill>
-            <a:prstDash val="solid"/>
-          </a:ln>
-        </p:spPr>
-      </p:sp>
-      <p:sp>
-        <p:nvSpPr>
-          <p:cNvPr id="32" name="Text 30"/>
-          <p:cNvSpPr txBox="1"/>
-          <p:nvPr/>
-        </p:nvSpPr>
-        <p:spPr>
-          <a:xfrm>
-            <a:off x="9628632" y="2514600"/>
-            <a:ext cx="1956816" cy="548640"/>
-          </a:xfrm>
-          <a:prstGeom prst="rect">
-            <a:avLst/>
-          </a:prstGeom>
-          <a:noFill/>
-          <a:ln/>
-        </p:spPr>
-        <p:txBody>
-          <a:bodyPr wrap="square" lIns="0" tIns="0" rIns="0" bIns="0" rtlCol="0" anchor="ctr"/>
-          <a:lstStyle/>
-          <a:p>
-            <a:pPr algn="ctr" indent="0" marL="0">
-              <a:buNone/>
-            </a:pPr>
-            <a:r>
-              <a:rPr lang="en-US" sz="1200" dirty="0">
-                <a:solidFill>
-                  <a:srgbClr val="1F2937"/>
-                </a:solidFill>
-              </a:rPr>
-              <a:t>lock student row → WAIT</a:t>
-            </a:r>
-            <a:endParaRPr lang="en-US" sz="1200" dirty="0"/>
-          </a:p>
-        </p:txBody>
-      </p:sp>
-      <p:sp>
-        <p:nvSpPr>
-          <p:cNvPr id="33" name="Shape 31"/>
-          <p:cNvSpPr/>
-          <p:nvPr/>
-        </p:nvSpPr>
-        <p:spPr>
-          <a:xfrm>
-            <a:off x="7086600" y="3154680"/>
-            <a:ext cx="2103120" cy="548640"/>
-          </a:xfrm>
-          <a:prstGeom prst="roundRect">
-            <a:avLst>
-              <a:gd name="adj" fmla="val 13333"/>
-            </a:avLst>
-          </a:prstGeom>
-          <a:solidFill>
-            <a:srgbClr val="EEF0FF"/>
-          </a:solidFill>
-          <a:ln w="15240">
-            <a:solidFill>
-              <a:srgbClr val="4F46E5"/>
-            </a:solidFill>
-            <a:prstDash val="solid"/>
-          </a:ln>
-        </p:spPr>
-      </p:sp>
-      <p:sp>
-        <p:nvSpPr>
-          <p:cNvPr id="34" name="Text 32"/>
-          <p:cNvSpPr txBox="1"/>
-          <p:nvPr/>
-        </p:nvSpPr>
-        <p:spPr>
-          <a:xfrm>
-            <a:off x="7159752" y="3154680"/>
-            <a:ext cx="1956816" cy="548640"/>
-          </a:xfrm>
-          <a:prstGeom prst="rect">
-            <a:avLst/>
-          </a:prstGeom>
-          <a:noFill/>
-          <a:ln/>
-        </p:spPr>
-        <p:txBody>
-          <a:bodyPr wrap="square" lIns="0" tIns="0" rIns="0" bIns="0" rtlCol="0" anchor="ctr"/>
-          <a:lstStyle/>
-          <a:p>
-            <a:pPr algn="ctr" indent="0" marL="0">
-              <a:buNone/>
-            </a:pPr>
-            <a:r>
-              <a:rPr lang="en-US" sz="1200" dirty="0">
-                <a:solidFill>
-                  <a:srgbClr val="1F2937"/>
-                </a:solidFill>
-              </a:rPr>
-              <a:t>accept + cascade (declines B's offer)</a:t>
-            </a:r>
-            <a:endParaRPr lang="en-US" sz="1200" dirty="0"/>
-          </a:p>
-        </p:txBody>
-      </p:sp>
-      <p:sp>
-        <p:nvSpPr>
-          <p:cNvPr id="35" name="Shape 33"/>
-          <p:cNvSpPr/>
-          <p:nvPr/>
-        </p:nvSpPr>
-        <p:spPr>
-          <a:xfrm>
-            <a:off x="7086600" y="3886200"/>
-            <a:ext cx="2103120" cy="548640"/>
-          </a:xfrm>
-          <a:prstGeom prst="roundRect">
-            <a:avLst>
-              <a:gd name="adj" fmla="val 13333"/>
-            </a:avLst>
-          </a:prstGeom>
-          <a:solidFill>
-            <a:srgbClr val="E6F6F3"/>
-          </a:solidFill>
-          <a:ln w="15240">
-            <a:solidFill>
-              <a:srgbClr val="0F766E"/>
-            </a:solidFill>
-            <a:prstDash val="solid"/>
-          </a:ln>
-        </p:spPr>
-      </p:sp>
-      <p:sp>
-        <p:nvSpPr>
-          <p:cNvPr id="36" name="Text 34"/>
-          <p:cNvSpPr txBox="1"/>
-          <p:nvPr/>
-        </p:nvSpPr>
-        <p:spPr>
-          <a:xfrm>
-            <a:off x="7159752" y="3886200"/>
-            <a:ext cx="1956816" cy="548640"/>
-          </a:xfrm>
-          <a:prstGeom prst="rect">
-            <a:avLst/>
-          </a:prstGeom>
-          <a:noFill/>
-          <a:ln/>
-        </p:spPr>
-        <p:txBody>
-          <a:bodyPr wrap="square" lIns="0" tIns="0" rIns="0" bIns="0" rtlCol="0" anchor="ctr"/>
-          <a:lstStyle/>
-          <a:p>
-            <a:pPr algn="ctr" indent="0" marL="0">
-              <a:buNone/>
-            </a:pPr>
-            <a:r>
-              <a:rPr lang="en-US" sz="1200" dirty="0">
-                <a:solidFill>
-                  <a:srgbClr val="1F2937"/>
-                </a:solidFill>
-              </a:rPr>
-              <a:t>COMMIT</a:t>
-            </a:r>
-            <a:endParaRPr lang="en-US" sz="1200" dirty="0"/>
-          </a:p>
-        </p:txBody>
-      </p:sp>
-      <p:sp>
-        <p:nvSpPr>
-          <p:cNvPr id="37" name="Shape 35"/>
-          <p:cNvSpPr/>
-          <p:nvPr/>
-        </p:nvSpPr>
-        <p:spPr>
-          <a:xfrm>
-            <a:off x="9555480" y="4572000"/>
-            <a:ext cx="2103120" cy="548640"/>
-          </a:xfrm>
-          <a:prstGeom prst="roundRect">
-            <a:avLst>
-              <a:gd name="adj" fmla="val 13333"/>
-            </a:avLst>
-          </a:prstGeom>
-          <a:solidFill>
-            <a:srgbClr val="FFF4E6"/>
-          </a:solidFill>
-          <a:ln w="15240">
-            <a:solidFill>
-              <a:srgbClr val="C2410C"/>
-            </a:solidFill>
-            <a:prstDash val="solid"/>
-          </a:ln>
-        </p:spPr>
-      </p:sp>
-      <p:sp>
-        <p:nvSpPr>
-          <p:cNvPr id="38" name="Text 36"/>
-          <p:cNvSpPr txBox="1"/>
-          <p:nvPr/>
-        </p:nvSpPr>
-        <p:spPr>
-          <a:xfrm>
-            <a:off x="9628632" y="4572000"/>
-            <a:ext cx="1956816" cy="548640"/>
-          </a:xfrm>
-          <a:prstGeom prst="rect">
-            <a:avLst/>
-          </a:prstGeom>
-          <a:noFill/>
-          <a:ln/>
-        </p:spPr>
-        <p:txBody>
-          <a:bodyPr wrap="square" lIns="0" tIns="0" rIns="0" bIns="0" rtlCol="0" anchor="ctr"/>
-          <a:lstStyle/>
-          <a:p>
-            <a:pPr algn="ctr" indent="0" marL="0">
-              <a:buNone/>
-            </a:pPr>
-            <a:r>
-              <a:rPr lang="en-US" sz="1200" dirty="0">
-                <a:solidFill>
-                  <a:srgbClr val="1F2937"/>
-                </a:solidFill>
-              </a:rPr>
-              <a:t>wakes, re-reads offer: DECLINED</a:t>
-            </a:r>
-            <a:endParaRPr lang="en-US" sz="1200" dirty="0"/>
-          </a:p>
-        </p:txBody>
-      </p:sp>
-      <p:sp>
-        <p:nvSpPr>
-          <p:cNvPr id="39" name="Shape 37"/>
-          <p:cNvSpPr/>
-          <p:nvPr/>
-        </p:nvSpPr>
-        <p:spPr>
-          <a:xfrm>
-            <a:off x="9555480" y="5257800"/>
-            <a:ext cx="2103120" cy="548640"/>
-          </a:xfrm>
-          <a:prstGeom prst="roundRect">
-            <a:avLst>
-              <a:gd name="adj" fmla="val 13333"/>
-            </a:avLst>
-          </a:prstGeom>
-          <a:solidFill>
-            <a:srgbClr val="FDECEA"/>
-          </a:solidFill>
-          <a:ln w="15240">
-            <a:solidFill>
-              <a:srgbClr val="DC2626"/>
-            </a:solidFill>
-            <a:prstDash val="solid"/>
-          </a:ln>
-        </p:spPr>
-      </p:sp>
-      <p:sp>
-        <p:nvSpPr>
-          <p:cNvPr id="40" name="Text 38"/>
-          <p:cNvSpPr txBox="1"/>
-          <p:nvPr/>
-        </p:nvSpPr>
-        <p:spPr>
-          <a:xfrm>
-            <a:off x="9628632" y="5257800"/>
-            <a:ext cx="1956816" cy="548640"/>
-          </a:xfrm>
-          <a:prstGeom prst="rect">
-            <a:avLst/>
-          </a:prstGeom>
-          <a:noFill/>
-          <a:ln/>
-        </p:spPr>
-        <p:txBody>
-          <a:bodyPr wrap="square" lIns="0" tIns="0" rIns="0" bIns="0" rtlCol="0" anchor="ctr"/>
-          <a:lstStyle/>
-          <a:p>
-            <a:pPr algn="ctr" indent="0" marL="0">
-              <a:buNone/>
-            </a:pPr>
-            <a:r>
-              <a:rPr lang="en-US" sz="1200" dirty="0">
-                <a:solidFill>
-                  <a:srgbClr val="1F2937"/>
-                </a:solidFill>
-              </a:rPr>
-              <a:t>error → ROLLBACK</a:t>
-            </a:r>
-            <a:endParaRPr lang="en-US" sz="1200" dirty="0"/>
-          </a:p>
-        </p:txBody>
-      </p:sp>
-      <p:sp>
-        <p:nvSpPr>
-          <p:cNvPr id="41" name="Text 39"/>
-          <p:cNvSpPr txBox="1"/>
-          <p:nvPr/>
-        </p:nvSpPr>
-        <p:spPr>
-          <a:xfrm>
-            <a:off x="7086600" y="5897880"/>
-            <a:ext cx="4572000" cy="457200"/>
-          </a:xfrm>
-          <a:prstGeom prst="rect">
-            <a:avLst/>
-          </a:prstGeom>
-          <a:noFill/>
-          <a:ln/>
-        </p:spPr>
-        <p:txBody>
-          <a:bodyPr wrap="square" lIns="0" tIns="0" rIns="0" bIns="0" rtlCol="0" anchor="ctr"/>
-          <a:lstStyle/>
-          <a:p>
-            <a:pPr indent="0" marL="0">
-              <a:buNone/>
-            </a:pPr>
-            <a:r>
-              <a:rPr lang="en-US" sz="1250" i="1" dirty="0">
-                <a:solidFill>
-                  <a:srgbClr val="6B7280"/>
-                </a:solidFill>
-              </a:rPr>
-              <a:t>Result: exactly one accepted offer. Locking the student first (not the offer) also rules out a deadlock.</a:t>
-            </a:r>
-            <a:endParaRPr lang="en-US" sz="1250" dirty="0"/>
           </a:p>
         </p:txBody>
       </p:sp>
@@ -9988,7 +9443,7 @@
                 <a:ea typeface="Cambria" pitchFamily="34" charset="-122"/>
                 <a:cs typeface="Cambria" pitchFamily="34" charset="-120"/>
               </a:rPr>
-              <a:t>Indexing: measured, not assumed</a:t>
+              <a:t>Analytics (2/4): features in SQL, k from data</a:t>
             </a:r>
             <a:endParaRPr lang="en-US" sz="3000" dirty="0"/>
           </a:p>
@@ -10070,58 +9525,1297 @@
       </p:sp>
       <p:graphicFrame>
         <p:nvGraphicFramePr>
-          <p:cNvPr id="5" name="Chart 0" descr=""/>
-          <p:cNvGraphicFramePr/>
-          <p:nvPr/>
+          <p:cNvPr id="17" name="Table 0"/>
+          <p:cNvGraphicFramePr>
+            <a:graphicFrameLocks noGrp="1"/>
+          </p:cNvGraphicFramePr>
+          <p:nvPr>
+            <p:extLst>
+              <p:ext uri="{D42A27DB-BD31-4B8C-83A1-F6EECF244321}">
+                <p14:modId xmlns:p14="http://schemas.microsoft.com/office/powerpoint/2010/main" val="1579011935"/>
+              </p:ext>
+            </p:extLst>
+          </p:nvPr>
         </p:nvGraphicFramePr>
         <p:xfrm>
-          <a:off x="548640" y="1325880"/>
-          <a:ext cx="6400800" cy="4480560"/>
+          <a:off x="548640" y="1371600"/>
+          <a:ext cx="6035040" cy="914400"/>
         </p:xfrm>
-        <a:graphic xmlns:a="http://schemas.openxmlformats.org/drawingml/2006/main">
-          <a:graphicData uri="http://schemas.openxmlformats.org/drawingml/2006/chart">
-            <c:chart xmlns:c="http://schemas.openxmlformats.org/drawingml/2006/chart" r:id="rId1"/>
+        <a:graphic>
+          <a:graphicData uri="http://schemas.openxmlformats.org/drawingml/2006/table">
+            <a:tbl>
+              <a:tblPr/>
+              <a:tblGrid>
+                <a:gridCol w="1325880"/>
+                <a:gridCol w="2880360"/>
+                <a:gridCol w="1828800"/>
+              </a:tblGrid>
+              <a:tr h="402336">
+                <a:tc>
+                  <a:txBody>
+                    <a:bodyPr/>
+                    <a:lstStyle/>
+                    <a:p>
+                      <a:pPr indent="0" marL="0">
+                        <a:buNone/>
+                      </a:pPr>
+                      <a:r>
+                        <a:rPr lang="en-US" sz="1250" b="1" dirty="0">
+                          <a:solidFill>
+                            <a:srgbClr val="FFFFFF"/>
+                          </a:solidFill>
+                          <a:latin typeface="Calibri" pitchFamily="34" charset="0"/>
+                          <a:ea typeface="Calibri" pitchFamily="34" charset="-122"/>
+                          <a:cs typeface="Calibri" pitchFamily="34" charset="-120"/>
+                        </a:rPr>
+                        <a:t>Feature</a:t>
+                      </a:r>
+                      <a:endParaRPr lang="en-US" sz="1250" dirty="0">
+                        <a:latin typeface="Calibri" charset="0"/>
+                        <a:ea typeface="Calibri" charset="0"/>
+                        <a:cs typeface="Calibri" charset="0"/>
+                      </a:endParaRPr>
+                    </a:p>
+                  </a:txBody>
+                  <a:tcPr marL="73152" marR="73152" marT="36576" marB="36576" anchor="ctr">
+                    <a:lnL w="9525" cap="flat" cmpd="sng" algn="ctr">
+                      <a:solidFill>
+                        <a:srgbClr val="E5E7EB"/>
+                      </a:solidFill>
+                      <a:prstDash val="solid"/>
+                      <a:round/>
+                      <a:headEnd type="none" w="med" len="med"/>
+                      <a:tailEnd type="none" w="med" len="med"/>
+                    </a:lnL>
+                    <a:lnR w="9525" cap="flat" cmpd="sng" algn="ctr">
+                      <a:solidFill>
+                        <a:srgbClr val="E5E7EB"/>
+                      </a:solidFill>
+                      <a:prstDash val="solid"/>
+                      <a:round/>
+                      <a:headEnd type="none" w="med" len="med"/>
+                      <a:tailEnd type="none" w="med" len="med"/>
+                    </a:lnR>
+                    <a:lnT w="9525" cap="flat" cmpd="sng" algn="ctr">
+                      <a:solidFill>
+                        <a:srgbClr val="E5E7EB"/>
+                      </a:solidFill>
+                      <a:prstDash val="solid"/>
+                      <a:round/>
+                      <a:headEnd type="none" w="med" len="med"/>
+                      <a:tailEnd type="none" w="med" len="med"/>
+                    </a:lnT>
+                    <a:lnB w="9525" cap="flat" cmpd="sng" algn="ctr">
+                      <a:solidFill>
+                        <a:srgbClr val="E5E7EB"/>
+                      </a:solidFill>
+                      <a:prstDash val="solid"/>
+                      <a:round/>
+                      <a:headEnd type="none" w="med" len="med"/>
+                      <a:tailEnd type="none" w="med" len="med"/>
+                    </a:lnB>
+                    <a:solidFill>
+                      <a:srgbClr val="4F46E5"/>
+                    </a:solidFill>
+                  </a:tcPr>
+                </a:tc>
+                <a:tc>
+                  <a:txBody>
+                    <a:bodyPr/>
+                    <a:lstStyle/>
+                    <a:p>
+                      <a:pPr indent="0" marL="0">
+                        <a:buNone/>
+                      </a:pPr>
+                      <a:r>
+                        <a:rPr lang="en-US" sz="1250" b="1" dirty="0">
+                          <a:solidFill>
+                            <a:srgbClr val="FFFFFF"/>
+                          </a:solidFill>
+                          <a:latin typeface="Calibri" pitchFamily="34" charset="0"/>
+                          <a:ea typeface="Calibri" pitchFamily="34" charset="-122"/>
+                          <a:cs typeface="Calibri" pitchFamily="34" charset="-120"/>
+                        </a:rPr>
+                        <a:t>Why it should matter</a:t>
+                      </a:r>
+                      <a:endParaRPr lang="en-US" sz="1250" dirty="0">
+                        <a:latin typeface="Calibri" charset="0"/>
+                        <a:ea typeface="Calibri" charset="0"/>
+                        <a:cs typeface="Calibri" charset="0"/>
+                      </a:endParaRPr>
+                    </a:p>
+                  </a:txBody>
+                  <a:tcPr marL="73152" marR="73152" marT="36576" marB="36576" anchor="ctr">
+                    <a:lnL w="9525" cap="flat" cmpd="sng" algn="ctr">
+                      <a:solidFill>
+                        <a:srgbClr val="E5E7EB"/>
+                      </a:solidFill>
+                      <a:prstDash val="solid"/>
+                      <a:round/>
+                      <a:headEnd type="none" w="med" len="med"/>
+                      <a:tailEnd type="none" w="med" len="med"/>
+                    </a:lnL>
+                    <a:lnR w="9525" cap="flat" cmpd="sng" algn="ctr">
+                      <a:solidFill>
+                        <a:srgbClr val="E5E7EB"/>
+                      </a:solidFill>
+                      <a:prstDash val="solid"/>
+                      <a:round/>
+                      <a:headEnd type="none" w="med" len="med"/>
+                      <a:tailEnd type="none" w="med" len="med"/>
+                    </a:lnR>
+                    <a:lnT w="9525" cap="flat" cmpd="sng" algn="ctr">
+                      <a:solidFill>
+                        <a:srgbClr val="E5E7EB"/>
+                      </a:solidFill>
+                      <a:prstDash val="solid"/>
+                      <a:round/>
+                      <a:headEnd type="none" w="med" len="med"/>
+                      <a:tailEnd type="none" w="med" len="med"/>
+                    </a:lnT>
+                    <a:lnB w="9525" cap="flat" cmpd="sng" algn="ctr">
+                      <a:solidFill>
+                        <a:srgbClr val="E5E7EB"/>
+                      </a:solidFill>
+                      <a:prstDash val="solid"/>
+                      <a:round/>
+                      <a:headEnd type="none" w="med" len="med"/>
+                      <a:tailEnd type="none" w="med" len="med"/>
+                    </a:lnB>
+                    <a:solidFill>
+                      <a:srgbClr val="4F46E5"/>
+                    </a:solidFill>
+                  </a:tcPr>
+                </a:tc>
+                <a:tc>
+                  <a:txBody>
+                    <a:bodyPr/>
+                    <a:lstStyle/>
+                    <a:p>
+                      <a:pPr indent="0" marL="0">
+                        <a:buNone/>
+                      </a:pPr>
+                      <a:r>
+                        <a:rPr lang="en-US" sz="1250" b="1" dirty="0">
+                          <a:solidFill>
+                            <a:srgbClr val="FFFFFF"/>
+                          </a:solidFill>
+                          <a:latin typeface="Calibri" pitchFamily="34" charset="0"/>
+                          <a:ea typeface="Calibri" pitchFamily="34" charset="-122"/>
+                          <a:cs typeface="Calibri" pitchFamily="34" charset="-120"/>
+                        </a:rPr>
+                        <a:t>Built from</a:t>
+                      </a:r>
+                      <a:endParaRPr lang="en-US" sz="1250" dirty="0">
+                        <a:latin typeface="Calibri" charset="0"/>
+                        <a:ea typeface="Calibri" charset="0"/>
+                        <a:cs typeface="Calibri" charset="0"/>
+                      </a:endParaRPr>
+                    </a:p>
+                  </a:txBody>
+                  <a:tcPr marL="73152" marR="73152" marT="36576" marB="36576" anchor="ctr">
+                    <a:lnL w="9525" cap="flat" cmpd="sng" algn="ctr">
+                      <a:solidFill>
+                        <a:srgbClr val="E5E7EB"/>
+                      </a:solidFill>
+                      <a:prstDash val="solid"/>
+                      <a:round/>
+                      <a:headEnd type="none" w="med" len="med"/>
+                      <a:tailEnd type="none" w="med" len="med"/>
+                    </a:lnL>
+                    <a:lnR w="9525" cap="flat" cmpd="sng" algn="ctr">
+                      <a:solidFill>
+                        <a:srgbClr val="E5E7EB"/>
+                      </a:solidFill>
+                      <a:prstDash val="solid"/>
+                      <a:round/>
+                      <a:headEnd type="none" w="med" len="med"/>
+                      <a:tailEnd type="none" w="med" len="med"/>
+                    </a:lnR>
+                    <a:lnT w="9525" cap="flat" cmpd="sng" algn="ctr">
+                      <a:solidFill>
+                        <a:srgbClr val="E5E7EB"/>
+                      </a:solidFill>
+                      <a:prstDash val="solid"/>
+                      <a:round/>
+                      <a:headEnd type="none" w="med" len="med"/>
+                      <a:tailEnd type="none" w="med" len="med"/>
+                    </a:lnT>
+                    <a:lnB w="9525" cap="flat" cmpd="sng" algn="ctr">
+                      <a:solidFill>
+                        <a:srgbClr val="E5E7EB"/>
+                      </a:solidFill>
+                      <a:prstDash val="solid"/>
+                      <a:round/>
+                      <a:headEnd type="none" w="med" len="med"/>
+                      <a:tailEnd type="none" w="med" len="med"/>
+                    </a:lnB>
+                    <a:solidFill>
+                      <a:srgbClr val="4F46E5"/>
+                    </a:solidFill>
+                  </a:tcPr>
+                </a:tc>
+              </a:tr>
+              <a:tr h="402336">
+                <a:tc>
+                  <a:txBody>
+                    <a:bodyPr/>
+                    <a:lstStyle/>
+                    <a:p>
+                      <a:pPr indent="0" marL="0">
+                        <a:buNone/>
+                      </a:pPr>
+                      <a:r>
+                        <a:rPr lang="en-US" sz="1250" dirty="0">
+                          <a:solidFill>
+                            <a:srgbClr val="374151"/>
+                          </a:solidFill>
+                          <a:latin typeface="Calibri" pitchFamily="34" charset="0"/>
+                          <a:ea typeface="Calibri" pitchFamily="34" charset="-122"/>
+                          <a:cs typeface="Calibri" pitchFamily="34" charset="-120"/>
+                        </a:rPr>
+                        <a:t>cgpa</a:t>
+                      </a:r>
+                      <a:endParaRPr lang="en-US" sz="1250" dirty="0">
+                        <a:latin typeface="Calibri" charset="0"/>
+                        <a:ea typeface="Calibri" charset="0"/>
+                        <a:cs typeface="Calibri" charset="0"/>
+                      </a:endParaRPr>
+                    </a:p>
+                  </a:txBody>
+                  <a:tcPr marL="73152" marR="73152" marT="36576" marB="36576" anchor="ctr">
+                    <a:lnL w="9525" cap="flat" cmpd="sng" algn="ctr">
+                      <a:solidFill>
+                        <a:srgbClr val="E5E7EB"/>
+                      </a:solidFill>
+                      <a:prstDash val="solid"/>
+                      <a:round/>
+                      <a:headEnd type="none" w="med" len="med"/>
+                      <a:tailEnd type="none" w="med" len="med"/>
+                    </a:lnL>
+                    <a:lnR w="9525" cap="flat" cmpd="sng" algn="ctr">
+                      <a:solidFill>
+                        <a:srgbClr val="E5E7EB"/>
+                      </a:solidFill>
+                      <a:prstDash val="solid"/>
+                      <a:round/>
+                      <a:headEnd type="none" w="med" len="med"/>
+                      <a:tailEnd type="none" w="med" len="med"/>
+                    </a:lnR>
+                    <a:lnT w="9525" cap="flat" cmpd="sng" algn="ctr">
+                      <a:solidFill>
+                        <a:srgbClr val="E5E7EB"/>
+                      </a:solidFill>
+                      <a:prstDash val="solid"/>
+                      <a:round/>
+                      <a:headEnd type="none" w="med" len="med"/>
+                      <a:tailEnd type="none" w="med" len="med"/>
+                    </a:lnT>
+                    <a:lnB w="9525" cap="flat" cmpd="sng" algn="ctr">
+                      <a:solidFill>
+                        <a:srgbClr val="E5E7EB"/>
+                      </a:solidFill>
+                      <a:prstDash val="solid"/>
+                      <a:round/>
+                      <a:headEnd type="none" w="med" len="med"/>
+                      <a:tailEnd type="none" w="med" len="med"/>
+                    </a:lnB>
+                    <a:solidFill>
+                      <a:srgbClr val="FFFFFF"/>
+                    </a:solidFill>
+                  </a:tcPr>
+                </a:tc>
+                <a:tc>
+                  <a:txBody>
+                    <a:bodyPr/>
+                    <a:lstStyle/>
+                    <a:p>
+                      <a:pPr indent="0" marL="0">
+                        <a:buNone/>
+                      </a:pPr>
+                      <a:r>
+                        <a:rPr lang="en-US" sz="1250" dirty="0">
+                          <a:solidFill>
+                            <a:srgbClr val="374151"/>
+                          </a:solidFill>
+                          <a:latin typeface="Calibri" pitchFamily="34" charset="0"/>
+                          <a:ea typeface="Calibri" pitchFamily="34" charset="-122"/>
+                          <a:cs typeface="Calibri" pitchFamily="34" charset="-120"/>
+                        </a:rPr>
+                        <a:t>Recruiters' first filter (A2)</a:t>
+                      </a:r>
+                      <a:endParaRPr lang="en-US" sz="1250" dirty="0">
+                        <a:latin typeface="Calibri" charset="0"/>
+                        <a:ea typeface="Calibri" charset="0"/>
+                        <a:cs typeface="Calibri" charset="0"/>
+                      </a:endParaRPr>
+                    </a:p>
+                  </a:txBody>
+                  <a:tcPr marL="73152" marR="73152" marT="36576" marB="36576" anchor="ctr">
+                    <a:lnL w="9525" cap="flat" cmpd="sng" algn="ctr">
+                      <a:solidFill>
+                        <a:srgbClr val="E5E7EB"/>
+                      </a:solidFill>
+                      <a:prstDash val="solid"/>
+                      <a:round/>
+                      <a:headEnd type="none" w="med" len="med"/>
+                      <a:tailEnd type="none" w="med" len="med"/>
+                    </a:lnL>
+                    <a:lnR w="9525" cap="flat" cmpd="sng" algn="ctr">
+                      <a:solidFill>
+                        <a:srgbClr val="E5E7EB"/>
+                      </a:solidFill>
+                      <a:prstDash val="solid"/>
+                      <a:round/>
+                      <a:headEnd type="none" w="med" len="med"/>
+                      <a:tailEnd type="none" w="med" len="med"/>
+                    </a:lnR>
+                    <a:lnT w="9525" cap="flat" cmpd="sng" algn="ctr">
+                      <a:solidFill>
+                        <a:srgbClr val="E5E7EB"/>
+                      </a:solidFill>
+                      <a:prstDash val="solid"/>
+                      <a:round/>
+                      <a:headEnd type="none" w="med" len="med"/>
+                      <a:tailEnd type="none" w="med" len="med"/>
+                    </a:lnT>
+                    <a:lnB w="9525" cap="flat" cmpd="sng" algn="ctr">
+                      <a:solidFill>
+                        <a:srgbClr val="E5E7EB"/>
+                      </a:solidFill>
+                      <a:prstDash val="solid"/>
+                      <a:round/>
+                      <a:headEnd type="none" w="med" len="med"/>
+                      <a:tailEnd type="none" w="med" len="med"/>
+                    </a:lnB>
+                    <a:solidFill>
+                      <a:srgbClr val="FFFFFF"/>
+                    </a:solidFill>
+                  </a:tcPr>
+                </a:tc>
+                <a:tc>
+                  <a:txBody>
+                    <a:bodyPr/>
+                    <a:lstStyle/>
+                    <a:p>
+                      <a:pPr indent="0" marL="0">
+                        <a:buNone/>
+                      </a:pPr>
+                      <a:r>
+                        <a:rPr lang="en-US" sz="1250" dirty="0">
+                          <a:solidFill>
+                            <a:srgbClr val="374151"/>
+                          </a:solidFill>
+                          <a:latin typeface="Calibri" pitchFamily="34" charset="0"/>
+                          <a:ea typeface="Calibri" pitchFamily="34" charset="-122"/>
+                          <a:cs typeface="Calibri" pitchFamily="34" charset="-120"/>
+                        </a:rPr>
+                        <a:t>student</a:t>
+                      </a:r>
+                      <a:endParaRPr lang="en-US" sz="1250" dirty="0">
+                        <a:latin typeface="Calibri" charset="0"/>
+                        <a:ea typeface="Calibri" charset="0"/>
+                        <a:cs typeface="Calibri" charset="0"/>
+                      </a:endParaRPr>
+                    </a:p>
+                  </a:txBody>
+                  <a:tcPr marL="73152" marR="73152" marT="36576" marB="36576" anchor="ctr">
+                    <a:lnL w="9525" cap="flat" cmpd="sng" algn="ctr">
+                      <a:solidFill>
+                        <a:srgbClr val="E5E7EB"/>
+                      </a:solidFill>
+                      <a:prstDash val="solid"/>
+                      <a:round/>
+                      <a:headEnd type="none" w="med" len="med"/>
+                      <a:tailEnd type="none" w="med" len="med"/>
+                    </a:lnL>
+                    <a:lnR w="9525" cap="flat" cmpd="sng" algn="ctr">
+                      <a:solidFill>
+                        <a:srgbClr val="E5E7EB"/>
+                      </a:solidFill>
+                      <a:prstDash val="solid"/>
+                      <a:round/>
+                      <a:headEnd type="none" w="med" len="med"/>
+                      <a:tailEnd type="none" w="med" len="med"/>
+                    </a:lnR>
+                    <a:lnT w="9525" cap="flat" cmpd="sng" algn="ctr">
+                      <a:solidFill>
+                        <a:srgbClr val="E5E7EB"/>
+                      </a:solidFill>
+                      <a:prstDash val="solid"/>
+                      <a:round/>
+                      <a:headEnd type="none" w="med" len="med"/>
+                      <a:tailEnd type="none" w="med" len="med"/>
+                    </a:lnT>
+                    <a:lnB w="9525" cap="flat" cmpd="sng" algn="ctr">
+                      <a:solidFill>
+                        <a:srgbClr val="E5E7EB"/>
+                      </a:solidFill>
+                      <a:prstDash val="solid"/>
+                      <a:round/>
+                      <a:headEnd type="none" w="med" len="med"/>
+                      <a:tailEnd type="none" w="med" len="med"/>
+                    </a:lnB>
+                    <a:solidFill>
+                      <a:srgbClr val="FFFFFF"/>
+                    </a:solidFill>
+                  </a:tcPr>
+                </a:tc>
+              </a:tr>
+              <a:tr h="402336">
+                <a:tc>
+                  <a:txBody>
+                    <a:bodyPr/>
+                    <a:lstStyle/>
+                    <a:p>
+                      <a:pPr indent="0" marL="0">
+                        <a:buNone/>
+                      </a:pPr>
+                      <a:r>
+                        <a:rPr lang="en-US" sz="1250" dirty="0">
+                          <a:solidFill>
+                            <a:srgbClr val="374151"/>
+                          </a:solidFill>
+                          <a:latin typeface="Calibri" pitchFamily="34" charset="0"/>
+                          <a:ea typeface="Calibri" pitchFamily="34" charset="-122"/>
+                          <a:cs typeface="Calibri" pitchFamily="34" charset="-120"/>
+                        </a:rPr>
+                        <a:t>tech_score</a:t>
+                      </a:r>
+                      <a:endParaRPr lang="en-US" sz="1250" dirty="0">
+                        <a:latin typeface="Calibri" charset="0"/>
+                        <a:ea typeface="Calibri" charset="0"/>
+                        <a:cs typeface="Calibri" charset="0"/>
+                      </a:endParaRPr>
+                    </a:p>
+                  </a:txBody>
+                  <a:tcPr marL="73152" marR="73152" marT="36576" marB="36576" anchor="ctr">
+                    <a:lnL w="9525" cap="flat" cmpd="sng" algn="ctr">
+                      <a:solidFill>
+                        <a:srgbClr val="E5E7EB"/>
+                      </a:solidFill>
+                      <a:prstDash val="solid"/>
+                      <a:round/>
+                      <a:headEnd type="none" w="med" len="med"/>
+                      <a:tailEnd type="none" w="med" len="med"/>
+                    </a:lnL>
+                    <a:lnR w="9525" cap="flat" cmpd="sng" algn="ctr">
+                      <a:solidFill>
+                        <a:srgbClr val="E5E7EB"/>
+                      </a:solidFill>
+                      <a:prstDash val="solid"/>
+                      <a:round/>
+                      <a:headEnd type="none" w="med" len="med"/>
+                      <a:tailEnd type="none" w="med" len="med"/>
+                    </a:lnR>
+                    <a:lnT w="9525" cap="flat" cmpd="sng" algn="ctr">
+                      <a:solidFill>
+                        <a:srgbClr val="E5E7EB"/>
+                      </a:solidFill>
+                      <a:prstDash val="solid"/>
+                      <a:round/>
+                      <a:headEnd type="none" w="med" len="med"/>
+                      <a:tailEnd type="none" w="med" len="med"/>
+                    </a:lnT>
+                    <a:lnB w="9525" cap="flat" cmpd="sng" algn="ctr">
+                      <a:solidFill>
+                        <a:srgbClr val="E5E7EB"/>
+                      </a:solidFill>
+                      <a:prstDash val="solid"/>
+                      <a:round/>
+                      <a:headEnd type="none" w="med" len="med"/>
+                      <a:tailEnd type="none" w="med" len="med"/>
+                    </a:lnB>
+                    <a:solidFill>
+                      <a:srgbClr val="F6F7FB"/>
+                    </a:solidFill>
+                  </a:tcPr>
+                </a:tc>
+                <a:tc>
+                  <a:txBody>
+                    <a:bodyPr/>
+                    <a:lstStyle/>
+                    <a:p>
+                      <a:pPr indent="0" marL="0">
+                        <a:buNone/>
+                      </a:pPr>
+                      <a:r>
+                        <a:rPr lang="en-US" sz="1250" dirty="0">
+                          <a:solidFill>
+                            <a:srgbClr val="374151"/>
+                          </a:solidFill>
+                          <a:latin typeface="Calibri" pitchFamily="34" charset="0"/>
+                          <a:ea typeface="Calibri" pitchFamily="34" charset="-122"/>
+                          <a:cs typeface="Calibri" pitchFamily="34" charset="-120"/>
+                        </a:rPr>
+                        <a:t>Analytics roles screen on Python, SQL, ML</a:t>
+                      </a:r>
+                      <a:endParaRPr lang="en-US" sz="1250" dirty="0">
+                        <a:latin typeface="Calibri" charset="0"/>
+                        <a:ea typeface="Calibri" charset="0"/>
+                        <a:cs typeface="Calibri" charset="0"/>
+                      </a:endParaRPr>
+                    </a:p>
+                  </a:txBody>
+                  <a:tcPr marL="73152" marR="73152" marT="36576" marB="36576" anchor="ctr">
+                    <a:lnL w="9525" cap="flat" cmpd="sng" algn="ctr">
+                      <a:solidFill>
+                        <a:srgbClr val="E5E7EB"/>
+                      </a:solidFill>
+                      <a:prstDash val="solid"/>
+                      <a:round/>
+                      <a:headEnd type="none" w="med" len="med"/>
+                      <a:tailEnd type="none" w="med" len="med"/>
+                    </a:lnL>
+                    <a:lnR w="9525" cap="flat" cmpd="sng" algn="ctr">
+                      <a:solidFill>
+                        <a:srgbClr val="E5E7EB"/>
+                      </a:solidFill>
+                      <a:prstDash val="solid"/>
+                      <a:round/>
+                      <a:headEnd type="none" w="med" len="med"/>
+                      <a:tailEnd type="none" w="med" len="med"/>
+                    </a:lnR>
+                    <a:lnT w="9525" cap="flat" cmpd="sng" algn="ctr">
+                      <a:solidFill>
+                        <a:srgbClr val="E5E7EB"/>
+                      </a:solidFill>
+                      <a:prstDash val="solid"/>
+                      <a:round/>
+                      <a:headEnd type="none" w="med" len="med"/>
+                      <a:tailEnd type="none" w="med" len="med"/>
+                    </a:lnT>
+                    <a:lnB w="9525" cap="flat" cmpd="sng" algn="ctr">
+                      <a:solidFill>
+                        <a:srgbClr val="E5E7EB"/>
+                      </a:solidFill>
+                      <a:prstDash val="solid"/>
+                      <a:round/>
+                      <a:headEnd type="none" w="med" len="med"/>
+                      <a:tailEnd type="none" w="med" len="med"/>
+                    </a:lnB>
+                    <a:solidFill>
+                      <a:srgbClr val="F6F7FB"/>
+                    </a:solidFill>
+                  </a:tcPr>
+                </a:tc>
+                <a:tc>
+                  <a:txBody>
+                    <a:bodyPr/>
+                    <a:lstStyle/>
+                    <a:p>
+                      <a:pPr indent="0" marL="0">
+                        <a:buNone/>
+                      </a:pPr>
+                      <a:r>
+                        <a:rPr lang="en-US" sz="1250" dirty="0">
+                          <a:solidFill>
+                            <a:srgbClr val="374151"/>
+                          </a:solidFill>
+                          <a:latin typeface="Calibri" pitchFamily="34" charset="0"/>
+                          <a:ea typeface="Calibri" pitchFamily="34" charset="-122"/>
+                          <a:cs typeface="Calibri" pitchFamily="34" charset="-120"/>
+                        </a:rPr>
+                        <a:t>student_skill ⋈ skill</a:t>
+                      </a:r>
+                      <a:endParaRPr lang="en-US" sz="1250" dirty="0">
+                        <a:latin typeface="Calibri" charset="0"/>
+                        <a:ea typeface="Calibri" charset="0"/>
+                        <a:cs typeface="Calibri" charset="0"/>
+                      </a:endParaRPr>
+                    </a:p>
+                  </a:txBody>
+                  <a:tcPr marL="73152" marR="73152" marT="36576" marB="36576" anchor="ctr">
+                    <a:lnL w="9525" cap="flat" cmpd="sng" algn="ctr">
+                      <a:solidFill>
+                        <a:srgbClr val="E5E7EB"/>
+                      </a:solidFill>
+                      <a:prstDash val="solid"/>
+                      <a:round/>
+                      <a:headEnd type="none" w="med" len="med"/>
+                      <a:tailEnd type="none" w="med" len="med"/>
+                    </a:lnL>
+                    <a:lnR w="9525" cap="flat" cmpd="sng" algn="ctr">
+                      <a:solidFill>
+                        <a:srgbClr val="E5E7EB"/>
+                      </a:solidFill>
+                      <a:prstDash val="solid"/>
+                      <a:round/>
+                      <a:headEnd type="none" w="med" len="med"/>
+                      <a:tailEnd type="none" w="med" len="med"/>
+                    </a:lnR>
+                    <a:lnT w="9525" cap="flat" cmpd="sng" algn="ctr">
+                      <a:solidFill>
+                        <a:srgbClr val="E5E7EB"/>
+                      </a:solidFill>
+                      <a:prstDash val="solid"/>
+                      <a:round/>
+                      <a:headEnd type="none" w="med" len="med"/>
+                      <a:tailEnd type="none" w="med" len="med"/>
+                    </a:lnT>
+                    <a:lnB w="9525" cap="flat" cmpd="sng" algn="ctr">
+                      <a:solidFill>
+                        <a:srgbClr val="E5E7EB"/>
+                      </a:solidFill>
+                      <a:prstDash val="solid"/>
+                      <a:round/>
+                      <a:headEnd type="none" w="med" len="med"/>
+                      <a:tailEnd type="none" w="med" len="med"/>
+                    </a:lnB>
+                    <a:solidFill>
+                      <a:srgbClr val="F6F7FB"/>
+                    </a:solidFill>
+                  </a:tcPr>
+                </a:tc>
+              </a:tr>
+              <a:tr h="402336">
+                <a:tc>
+                  <a:txBody>
+                    <a:bodyPr/>
+                    <a:lstStyle/>
+                    <a:p>
+                      <a:pPr indent="0" marL="0">
+                        <a:buNone/>
+                      </a:pPr>
+                      <a:r>
+                        <a:rPr lang="en-US" sz="1250" dirty="0">
+                          <a:solidFill>
+                            <a:srgbClr val="374151"/>
+                          </a:solidFill>
+                          <a:latin typeface="Calibri" pitchFamily="34" charset="0"/>
+                          <a:ea typeface="Calibri" pitchFamily="34" charset="-122"/>
+                          <a:cs typeface="Calibri" pitchFamily="34" charset="-120"/>
+                        </a:rPr>
+                        <a:t>biz_score</a:t>
+                      </a:r>
+                      <a:endParaRPr lang="en-US" sz="1250" dirty="0">
+                        <a:latin typeface="Calibri" charset="0"/>
+                        <a:ea typeface="Calibri" charset="0"/>
+                        <a:cs typeface="Calibri" charset="0"/>
+                      </a:endParaRPr>
+                    </a:p>
+                  </a:txBody>
+                  <a:tcPr marL="73152" marR="73152" marT="36576" marB="36576" anchor="ctr">
+                    <a:lnL w="9525" cap="flat" cmpd="sng" algn="ctr">
+                      <a:solidFill>
+                        <a:srgbClr val="E5E7EB"/>
+                      </a:solidFill>
+                      <a:prstDash val="solid"/>
+                      <a:round/>
+                      <a:headEnd type="none" w="med" len="med"/>
+                      <a:tailEnd type="none" w="med" len="med"/>
+                    </a:lnL>
+                    <a:lnR w="9525" cap="flat" cmpd="sng" algn="ctr">
+                      <a:solidFill>
+                        <a:srgbClr val="E5E7EB"/>
+                      </a:solidFill>
+                      <a:prstDash val="solid"/>
+                      <a:round/>
+                      <a:headEnd type="none" w="med" len="med"/>
+                      <a:tailEnd type="none" w="med" len="med"/>
+                    </a:lnR>
+                    <a:lnT w="9525" cap="flat" cmpd="sng" algn="ctr">
+                      <a:solidFill>
+                        <a:srgbClr val="E5E7EB"/>
+                      </a:solidFill>
+                      <a:prstDash val="solid"/>
+                      <a:round/>
+                      <a:headEnd type="none" w="med" len="med"/>
+                      <a:tailEnd type="none" w="med" len="med"/>
+                    </a:lnT>
+                    <a:lnB w="9525" cap="flat" cmpd="sng" algn="ctr">
+                      <a:solidFill>
+                        <a:srgbClr val="E5E7EB"/>
+                      </a:solidFill>
+                      <a:prstDash val="solid"/>
+                      <a:round/>
+                      <a:headEnd type="none" w="med" len="med"/>
+                      <a:tailEnd type="none" w="med" len="med"/>
+                    </a:lnB>
+                    <a:solidFill>
+                      <a:srgbClr val="FFFFFF"/>
+                    </a:solidFill>
+                  </a:tcPr>
+                </a:tc>
+                <a:tc>
+                  <a:txBody>
+                    <a:bodyPr/>
+                    <a:lstStyle/>
+                    <a:p>
+                      <a:pPr indent="0" marL="0">
+                        <a:buNone/>
+                      </a:pPr>
+                      <a:r>
+                        <a:rPr lang="en-US" sz="1250" dirty="0">
+                          <a:solidFill>
+                            <a:srgbClr val="374151"/>
+                          </a:solidFill>
+                          <a:latin typeface="Calibri" pitchFamily="34" charset="0"/>
+                          <a:ea typeface="Calibri" pitchFamily="34" charset="-122"/>
+                          <a:cs typeface="Calibri" pitchFamily="34" charset="-120"/>
+                        </a:rPr>
+                        <a:t>Consulting &amp; finance screen on cases, Excel</a:t>
+                      </a:r>
+                      <a:endParaRPr lang="en-US" sz="1250" dirty="0">
+                        <a:latin typeface="Calibri" charset="0"/>
+                        <a:ea typeface="Calibri" charset="0"/>
+                        <a:cs typeface="Calibri" charset="0"/>
+                      </a:endParaRPr>
+                    </a:p>
+                  </a:txBody>
+                  <a:tcPr marL="73152" marR="73152" marT="36576" marB="36576" anchor="ctr">
+                    <a:lnL w="9525" cap="flat" cmpd="sng" algn="ctr">
+                      <a:solidFill>
+                        <a:srgbClr val="E5E7EB"/>
+                      </a:solidFill>
+                      <a:prstDash val="solid"/>
+                      <a:round/>
+                      <a:headEnd type="none" w="med" len="med"/>
+                      <a:tailEnd type="none" w="med" len="med"/>
+                    </a:lnL>
+                    <a:lnR w="9525" cap="flat" cmpd="sng" algn="ctr">
+                      <a:solidFill>
+                        <a:srgbClr val="E5E7EB"/>
+                      </a:solidFill>
+                      <a:prstDash val="solid"/>
+                      <a:round/>
+                      <a:headEnd type="none" w="med" len="med"/>
+                      <a:tailEnd type="none" w="med" len="med"/>
+                    </a:lnR>
+                    <a:lnT w="9525" cap="flat" cmpd="sng" algn="ctr">
+                      <a:solidFill>
+                        <a:srgbClr val="E5E7EB"/>
+                      </a:solidFill>
+                      <a:prstDash val="solid"/>
+                      <a:round/>
+                      <a:headEnd type="none" w="med" len="med"/>
+                      <a:tailEnd type="none" w="med" len="med"/>
+                    </a:lnT>
+                    <a:lnB w="9525" cap="flat" cmpd="sng" algn="ctr">
+                      <a:solidFill>
+                        <a:srgbClr val="E5E7EB"/>
+                      </a:solidFill>
+                      <a:prstDash val="solid"/>
+                      <a:round/>
+                      <a:headEnd type="none" w="med" len="med"/>
+                      <a:tailEnd type="none" w="med" len="med"/>
+                    </a:lnB>
+                    <a:solidFill>
+                      <a:srgbClr val="FFFFFF"/>
+                    </a:solidFill>
+                  </a:tcPr>
+                </a:tc>
+                <a:tc>
+                  <a:txBody>
+                    <a:bodyPr/>
+                    <a:lstStyle/>
+                    <a:p>
+                      <a:pPr indent="0" marL="0">
+                        <a:buNone/>
+                      </a:pPr>
+                      <a:r>
+                        <a:rPr lang="en-US" sz="1250" dirty="0">
+                          <a:solidFill>
+                            <a:srgbClr val="374151"/>
+                          </a:solidFill>
+                          <a:latin typeface="Calibri" pitchFamily="34" charset="0"/>
+                          <a:ea typeface="Calibri" pitchFamily="34" charset="-122"/>
+                          <a:cs typeface="Calibri" pitchFamily="34" charset="-120"/>
+                        </a:rPr>
+                        <a:t>student_skill ⋈ skill</a:t>
+                      </a:r>
+                      <a:endParaRPr lang="en-US" sz="1250" dirty="0">
+                        <a:latin typeface="Calibri" charset="0"/>
+                        <a:ea typeface="Calibri" charset="0"/>
+                        <a:cs typeface="Calibri" charset="0"/>
+                      </a:endParaRPr>
+                    </a:p>
+                  </a:txBody>
+                  <a:tcPr marL="73152" marR="73152" marT="36576" marB="36576" anchor="ctr">
+                    <a:lnL w="9525" cap="flat" cmpd="sng" algn="ctr">
+                      <a:solidFill>
+                        <a:srgbClr val="E5E7EB"/>
+                      </a:solidFill>
+                      <a:prstDash val="solid"/>
+                      <a:round/>
+                      <a:headEnd type="none" w="med" len="med"/>
+                      <a:tailEnd type="none" w="med" len="med"/>
+                    </a:lnL>
+                    <a:lnR w="9525" cap="flat" cmpd="sng" algn="ctr">
+                      <a:solidFill>
+                        <a:srgbClr val="E5E7EB"/>
+                      </a:solidFill>
+                      <a:prstDash val="solid"/>
+                      <a:round/>
+                      <a:headEnd type="none" w="med" len="med"/>
+                      <a:tailEnd type="none" w="med" len="med"/>
+                    </a:lnR>
+                    <a:lnT w="9525" cap="flat" cmpd="sng" algn="ctr">
+                      <a:solidFill>
+                        <a:srgbClr val="E5E7EB"/>
+                      </a:solidFill>
+                      <a:prstDash val="solid"/>
+                      <a:round/>
+                      <a:headEnd type="none" w="med" len="med"/>
+                      <a:tailEnd type="none" w="med" len="med"/>
+                    </a:lnT>
+                    <a:lnB w="9525" cap="flat" cmpd="sng" algn="ctr">
+                      <a:solidFill>
+                        <a:srgbClr val="E5E7EB"/>
+                      </a:solidFill>
+                      <a:prstDash val="solid"/>
+                      <a:round/>
+                      <a:headEnd type="none" w="med" len="med"/>
+                      <a:tailEnd type="none" w="med" len="med"/>
+                    </a:lnB>
+                    <a:solidFill>
+                      <a:srgbClr val="FFFFFF"/>
+                    </a:solidFill>
+                  </a:tcPr>
+                </a:tc>
+              </a:tr>
+              <a:tr h="402336">
+                <a:tc>
+                  <a:txBody>
+                    <a:bodyPr/>
+                    <a:lstStyle/>
+                    <a:p>
+                      <a:pPr indent="0" marL="0">
+                        <a:buNone/>
+                      </a:pPr>
+                      <a:r>
+                        <a:rPr lang="en-US" sz="1250" dirty="0">
+                          <a:solidFill>
+                            <a:srgbClr val="374151"/>
+                          </a:solidFill>
+                          <a:latin typeface="Calibri" pitchFamily="34" charset="0"/>
+                          <a:ea typeface="Calibri" pitchFamily="34" charset="-122"/>
+                          <a:cs typeface="Calibri" pitchFamily="34" charset="-120"/>
+                        </a:rPr>
+                        <a:t>applications</a:t>
+                      </a:r>
+                      <a:endParaRPr lang="en-US" sz="1250" dirty="0">
+                        <a:latin typeface="Calibri" charset="0"/>
+                        <a:ea typeface="Calibri" charset="0"/>
+                        <a:cs typeface="Calibri" charset="0"/>
+                      </a:endParaRPr>
+                    </a:p>
+                  </a:txBody>
+                  <a:tcPr marL="73152" marR="73152" marT="36576" marB="36576" anchor="ctr">
+                    <a:lnL w="9525" cap="flat" cmpd="sng" algn="ctr">
+                      <a:solidFill>
+                        <a:srgbClr val="E5E7EB"/>
+                      </a:solidFill>
+                      <a:prstDash val="solid"/>
+                      <a:round/>
+                      <a:headEnd type="none" w="med" len="med"/>
+                      <a:tailEnd type="none" w="med" len="med"/>
+                    </a:lnL>
+                    <a:lnR w="9525" cap="flat" cmpd="sng" algn="ctr">
+                      <a:solidFill>
+                        <a:srgbClr val="E5E7EB"/>
+                      </a:solidFill>
+                      <a:prstDash val="solid"/>
+                      <a:round/>
+                      <a:headEnd type="none" w="med" len="med"/>
+                      <a:tailEnd type="none" w="med" len="med"/>
+                    </a:lnR>
+                    <a:lnT w="9525" cap="flat" cmpd="sng" algn="ctr">
+                      <a:solidFill>
+                        <a:srgbClr val="E5E7EB"/>
+                      </a:solidFill>
+                      <a:prstDash val="solid"/>
+                      <a:round/>
+                      <a:headEnd type="none" w="med" len="med"/>
+                      <a:tailEnd type="none" w="med" len="med"/>
+                    </a:lnT>
+                    <a:lnB w="9525" cap="flat" cmpd="sng" algn="ctr">
+                      <a:solidFill>
+                        <a:srgbClr val="E5E7EB"/>
+                      </a:solidFill>
+                      <a:prstDash val="solid"/>
+                      <a:round/>
+                      <a:headEnd type="none" w="med" len="med"/>
+                      <a:tailEnd type="none" w="med" len="med"/>
+                    </a:lnB>
+                    <a:solidFill>
+                      <a:srgbClr val="F6F7FB"/>
+                    </a:solidFill>
+                  </a:tcPr>
+                </a:tc>
+                <a:tc>
+                  <a:txBody>
+                    <a:bodyPr/>
+                    <a:lstStyle/>
+                    <a:p>
+                      <a:pPr indent="0" marL="0">
+                        <a:buNone/>
+                      </a:pPr>
+                      <a:r>
+                        <a:rPr lang="en-US" sz="1250" dirty="0">
+                          <a:solidFill>
+                            <a:srgbClr val="374151"/>
+                          </a:solidFill>
+                          <a:latin typeface="Calibri" pitchFamily="34" charset="0"/>
+                          <a:ea typeface="Calibri" pitchFamily="34" charset="-122"/>
+                          <a:cs typeface="Calibri" pitchFamily="34" charset="-120"/>
+                        </a:rPr>
+                        <a:t>No application, no offer</a:t>
+                      </a:r>
+                      <a:endParaRPr lang="en-US" sz="1250" dirty="0">
+                        <a:latin typeface="Calibri" charset="0"/>
+                        <a:ea typeface="Calibri" charset="0"/>
+                        <a:cs typeface="Calibri" charset="0"/>
+                      </a:endParaRPr>
+                    </a:p>
+                  </a:txBody>
+                  <a:tcPr marL="73152" marR="73152" marT="36576" marB="36576" anchor="ctr">
+                    <a:lnL w="9525" cap="flat" cmpd="sng" algn="ctr">
+                      <a:solidFill>
+                        <a:srgbClr val="E5E7EB"/>
+                      </a:solidFill>
+                      <a:prstDash val="solid"/>
+                      <a:round/>
+                      <a:headEnd type="none" w="med" len="med"/>
+                      <a:tailEnd type="none" w="med" len="med"/>
+                    </a:lnL>
+                    <a:lnR w="9525" cap="flat" cmpd="sng" algn="ctr">
+                      <a:solidFill>
+                        <a:srgbClr val="E5E7EB"/>
+                      </a:solidFill>
+                      <a:prstDash val="solid"/>
+                      <a:round/>
+                      <a:headEnd type="none" w="med" len="med"/>
+                      <a:tailEnd type="none" w="med" len="med"/>
+                    </a:lnR>
+                    <a:lnT w="9525" cap="flat" cmpd="sng" algn="ctr">
+                      <a:solidFill>
+                        <a:srgbClr val="E5E7EB"/>
+                      </a:solidFill>
+                      <a:prstDash val="solid"/>
+                      <a:round/>
+                      <a:headEnd type="none" w="med" len="med"/>
+                      <a:tailEnd type="none" w="med" len="med"/>
+                    </a:lnT>
+                    <a:lnB w="9525" cap="flat" cmpd="sng" algn="ctr">
+                      <a:solidFill>
+                        <a:srgbClr val="E5E7EB"/>
+                      </a:solidFill>
+                      <a:prstDash val="solid"/>
+                      <a:round/>
+                      <a:headEnd type="none" w="med" len="med"/>
+                      <a:tailEnd type="none" w="med" len="med"/>
+                    </a:lnB>
+                    <a:solidFill>
+                      <a:srgbClr val="F6F7FB"/>
+                    </a:solidFill>
+                  </a:tcPr>
+                </a:tc>
+                <a:tc>
+                  <a:txBody>
+                    <a:bodyPr/>
+                    <a:lstStyle/>
+                    <a:p>
+                      <a:pPr indent="0" marL="0">
+                        <a:buNone/>
+                      </a:pPr>
+                      <a:r>
+                        <a:rPr lang="en-US" sz="1250" dirty="0">
+                          <a:solidFill>
+                            <a:srgbClr val="374151"/>
+                          </a:solidFill>
+                          <a:latin typeface="Calibri" pitchFamily="34" charset="0"/>
+                          <a:ea typeface="Calibri" pitchFamily="34" charset="-122"/>
+                          <a:cs typeface="Calibri" pitchFamily="34" charset="-120"/>
+                        </a:rPr>
+                        <a:t>application</a:t>
+                      </a:r>
+                      <a:endParaRPr lang="en-US" sz="1250" dirty="0">
+                        <a:latin typeface="Calibri" charset="0"/>
+                        <a:ea typeface="Calibri" charset="0"/>
+                        <a:cs typeface="Calibri" charset="0"/>
+                      </a:endParaRPr>
+                    </a:p>
+                  </a:txBody>
+                  <a:tcPr marL="73152" marR="73152" marT="36576" marB="36576" anchor="ctr">
+                    <a:lnL w="9525" cap="flat" cmpd="sng" algn="ctr">
+                      <a:solidFill>
+                        <a:srgbClr val="E5E7EB"/>
+                      </a:solidFill>
+                      <a:prstDash val="solid"/>
+                      <a:round/>
+                      <a:headEnd type="none" w="med" len="med"/>
+                      <a:tailEnd type="none" w="med" len="med"/>
+                    </a:lnL>
+                    <a:lnR w="9525" cap="flat" cmpd="sng" algn="ctr">
+                      <a:solidFill>
+                        <a:srgbClr val="E5E7EB"/>
+                      </a:solidFill>
+                      <a:prstDash val="solid"/>
+                      <a:round/>
+                      <a:headEnd type="none" w="med" len="med"/>
+                      <a:tailEnd type="none" w="med" len="med"/>
+                    </a:lnR>
+                    <a:lnT w="9525" cap="flat" cmpd="sng" algn="ctr">
+                      <a:solidFill>
+                        <a:srgbClr val="E5E7EB"/>
+                      </a:solidFill>
+                      <a:prstDash val="solid"/>
+                      <a:round/>
+                      <a:headEnd type="none" w="med" len="med"/>
+                      <a:tailEnd type="none" w="med" len="med"/>
+                    </a:lnT>
+                    <a:lnB w="9525" cap="flat" cmpd="sng" algn="ctr">
+                      <a:solidFill>
+                        <a:srgbClr val="E5E7EB"/>
+                      </a:solidFill>
+                      <a:prstDash val="solid"/>
+                      <a:round/>
+                      <a:headEnd type="none" w="med" len="med"/>
+                      <a:tailEnd type="none" w="med" len="med"/>
+                    </a:lnB>
+                    <a:solidFill>
+                      <a:srgbClr val="F6F7FB"/>
+                    </a:solidFill>
+                  </a:tcPr>
+                </a:tc>
+              </a:tr>
+              <a:tr h="402336">
+                <a:tc>
+                  <a:txBody>
+                    <a:bodyPr/>
+                    <a:lstStyle/>
+                    <a:p>
+                      <a:pPr indent="0" marL="0">
+                        <a:buNone/>
+                      </a:pPr>
+                      <a:r>
+                        <a:rPr lang="en-US" sz="1250" dirty="0">
+                          <a:solidFill>
+                            <a:srgbClr val="374151"/>
+                          </a:solidFill>
+                          <a:latin typeface="Calibri" pitchFamily="34" charset="0"/>
+                          <a:ea typeface="Calibri" pitchFamily="34" charset="-122"/>
+                          <a:cs typeface="Calibri" pitchFamily="34" charset="-120"/>
+                        </a:rPr>
+                        <a:t>interview_rate</a:t>
+                      </a:r>
+                      <a:endParaRPr lang="en-US" sz="1250" dirty="0">
+                        <a:latin typeface="Calibri" charset="0"/>
+                        <a:ea typeface="Calibri" charset="0"/>
+                        <a:cs typeface="Calibri" charset="0"/>
+                      </a:endParaRPr>
+                    </a:p>
+                  </a:txBody>
+                  <a:tcPr marL="73152" marR="73152" marT="36576" marB="36576" anchor="ctr">
+                    <a:lnL w="9525" cap="flat" cmpd="sng" algn="ctr">
+                      <a:solidFill>
+                        <a:srgbClr val="E5E7EB"/>
+                      </a:solidFill>
+                      <a:prstDash val="solid"/>
+                      <a:round/>
+                      <a:headEnd type="none" w="med" len="med"/>
+                      <a:tailEnd type="none" w="med" len="med"/>
+                    </a:lnL>
+                    <a:lnR w="9525" cap="flat" cmpd="sng" algn="ctr">
+                      <a:solidFill>
+                        <a:srgbClr val="E5E7EB"/>
+                      </a:solidFill>
+                      <a:prstDash val="solid"/>
+                      <a:round/>
+                      <a:headEnd type="none" w="med" len="med"/>
+                      <a:tailEnd type="none" w="med" len="med"/>
+                    </a:lnR>
+                    <a:lnT w="9525" cap="flat" cmpd="sng" algn="ctr">
+                      <a:solidFill>
+                        <a:srgbClr val="E5E7EB"/>
+                      </a:solidFill>
+                      <a:prstDash val="solid"/>
+                      <a:round/>
+                      <a:headEnd type="none" w="med" len="med"/>
+                      <a:tailEnd type="none" w="med" len="med"/>
+                    </a:lnT>
+                    <a:lnB w="9525" cap="flat" cmpd="sng" algn="ctr">
+                      <a:solidFill>
+                        <a:srgbClr val="E5E7EB"/>
+                      </a:solidFill>
+                      <a:prstDash val="solid"/>
+                      <a:round/>
+                      <a:headEnd type="none" w="med" len="med"/>
+                      <a:tailEnd type="none" w="med" len="med"/>
+                    </a:lnB>
+                    <a:solidFill>
+                      <a:srgbClr val="FFFFFF"/>
+                    </a:solidFill>
+                  </a:tcPr>
+                </a:tc>
+                <a:tc>
+                  <a:txBody>
+                    <a:bodyPr/>
+                    <a:lstStyle/>
+                    <a:p>
+                      <a:pPr indent="0" marL="0">
+                        <a:buNone/>
+                      </a:pPr>
+                      <a:r>
+                        <a:rPr lang="en-US" sz="1250" dirty="0">
+                          <a:solidFill>
+                            <a:srgbClr val="374151"/>
+                          </a:solidFill>
+                          <a:latin typeface="Calibri" pitchFamily="34" charset="0"/>
+                          <a:ea typeface="Calibri" pitchFamily="34" charset="-122"/>
+                          <a:cs typeface="Calibri" pitchFamily="34" charset="-120"/>
+                        </a:rPr>
+                        <a:t>Share of applications reaching interview</a:t>
+                      </a:r>
+                      <a:endParaRPr lang="en-US" sz="1250" dirty="0">
+                        <a:latin typeface="Calibri" charset="0"/>
+                        <a:ea typeface="Calibri" charset="0"/>
+                        <a:cs typeface="Calibri" charset="0"/>
+                      </a:endParaRPr>
+                    </a:p>
+                  </a:txBody>
+                  <a:tcPr marL="73152" marR="73152" marT="36576" marB="36576" anchor="ctr">
+                    <a:lnL w="9525" cap="flat" cmpd="sng" algn="ctr">
+                      <a:solidFill>
+                        <a:srgbClr val="E5E7EB"/>
+                      </a:solidFill>
+                      <a:prstDash val="solid"/>
+                      <a:round/>
+                      <a:headEnd type="none" w="med" len="med"/>
+                      <a:tailEnd type="none" w="med" len="med"/>
+                    </a:lnL>
+                    <a:lnR w="9525" cap="flat" cmpd="sng" algn="ctr">
+                      <a:solidFill>
+                        <a:srgbClr val="E5E7EB"/>
+                      </a:solidFill>
+                      <a:prstDash val="solid"/>
+                      <a:round/>
+                      <a:headEnd type="none" w="med" len="med"/>
+                      <a:tailEnd type="none" w="med" len="med"/>
+                    </a:lnR>
+                    <a:lnT w="9525" cap="flat" cmpd="sng" algn="ctr">
+                      <a:solidFill>
+                        <a:srgbClr val="E5E7EB"/>
+                      </a:solidFill>
+                      <a:prstDash val="solid"/>
+                      <a:round/>
+                      <a:headEnd type="none" w="med" len="med"/>
+                      <a:tailEnd type="none" w="med" len="med"/>
+                    </a:lnT>
+                    <a:lnB w="9525" cap="flat" cmpd="sng" algn="ctr">
+                      <a:solidFill>
+                        <a:srgbClr val="E5E7EB"/>
+                      </a:solidFill>
+                      <a:prstDash val="solid"/>
+                      <a:round/>
+                      <a:headEnd type="none" w="med" len="med"/>
+                      <a:tailEnd type="none" w="med" len="med"/>
+                    </a:lnB>
+                    <a:solidFill>
+                      <a:srgbClr val="FFFFFF"/>
+                    </a:solidFill>
+                  </a:tcPr>
+                </a:tc>
+                <a:tc>
+                  <a:txBody>
+                    <a:bodyPr/>
+                    <a:lstStyle/>
+                    <a:p>
+                      <a:pPr indent="0" marL="0">
+                        <a:buNone/>
+                      </a:pPr>
+                      <a:r>
+                        <a:rPr lang="en-US" sz="1250" dirty="0">
+                          <a:solidFill>
+                            <a:srgbClr val="374151"/>
+                          </a:solidFill>
+                          <a:latin typeface="Calibri" pitchFamily="34" charset="0"/>
+                          <a:ea typeface="Calibri" pitchFamily="34" charset="-122"/>
+                          <a:cs typeface="Calibri" pitchFamily="34" charset="-120"/>
+                        </a:rPr>
+                        <a:t>application, interview</a:t>
+                      </a:r>
+                      <a:endParaRPr lang="en-US" sz="1250" dirty="0">
+                        <a:latin typeface="Calibri" charset="0"/>
+                        <a:ea typeface="Calibri" charset="0"/>
+                        <a:cs typeface="Calibri" charset="0"/>
+                      </a:endParaRPr>
+                    </a:p>
+                  </a:txBody>
+                  <a:tcPr marL="73152" marR="73152" marT="36576" marB="36576" anchor="ctr">
+                    <a:lnL w="9525" cap="flat" cmpd="sng" algn="ctr">
+                      <a:solidFill>
+                        <a:srgbClr val="E5E7EB"/>
+                      </a:solidFill>
+                      <a:prstDash val="solid"/>
+                      <a:round/>
+                      <a:headEnd type="none" w="med" len="med"/>
+                      <a:tailEnd type="none" w="med" len="med"/>
+                    </a:lnL>
+                    <a:lnR w="9525" cap="flat" cmpd="sng" algn="ctr">
+                      <a:solidFill>
+                        <a:srgbClr val="E5E7EB"/>
+                      </a:solidFill>
+                      <a:prstDash val="solid"/>
+                      <a:round/>
+                      <a:headEnd type="none" w="med" len="med"/>
+                      <a:tailEnd type="none" w="med" len="med"/>
+                    </a:lnR>
+                    <a:lnT w="9525" cap="flat" cmpd="sng" algn="ctr">
+                      <a:solidFill>
+                        <a:srgbClr val="E5E7EB"/>
+                      </a:solidFill>
+                      <a:prstDash val="solid"/>
+                      <a:round/>
+                      <a:headEnd type="none" w="med" len="med"/>
+                      <a:tailEnd type="none" w="med" len="med"/>
+                    </a:lnT>
+                    <a:lnB w="9525" cap="flat" cmpd="sng" algn="ctr">
+                      <a:solidFill>
+                        <a:srgbClr val="E5E7EB"/>
+                      </a:solidFill>
+                      <a:prstDash val="solid"/>
+                      <a:round/>
+                      <a:headEnd type="none" w="med" len="med"/>
+                      <a:tailEnd type="none" w="med" len="med"/>
+                    </a:lnB>
+                    <a:solidFill>
+                      <a:srgbClr val="FFFFFF"/>
+                    </a:solidFill>
+                  </a:tcPr>
+                </a:tc>
+              </a:tr>
+            </a:tbl>
           </a:graphicData>
         </a:graphic>
       </p:graphicFrame>
       <p:sp>
         <p:nvSpPr>
-          <p:cNvPr id="6" name="Text 3"/>
-          <p:cNvSpPr txBox="1"/>
+          <p:cNvPr id="6" name="Shape 3"/>
+          <p:cNvSpPr/>
           <p:nvPr/>
         </p:nvSpPr>
         <p:spPr>
           <a:xfrm>
-            <a:off x="7406640" y="1325880"/>
-            <a:ext cx="4206240" cy="640080"/>
-          </a:xfrm>
-          <a:prstGeom prst="rect">
-            <a:avLst/>
-          </a:prstGeom>
-          <a:noFill/>
-          <a:ln/>
-        </p:spPr>
-        <p:txBody>
-          <a:bodyPr wrap="square" lIns="0" tIns="0" rIns="0" bIns="0" rtlCol="0" anchor="ctr"/>
-          <a:lstStyle/>
-          <a:p>
-            <a:pPr indent="0" marL="0">
-              <a:buNone/>
-            </a:pPr>
-            <a:r>
-              <a:rPr lang="en-US" sz="3600" b="1" dirty="0">
-                <a:solidFill>
-                  <a:srgbClr val="4F46E5"/>
-                </a:solidFill>
-                <a:latin typeface="Cambria" pitchFamily="34" charset="0"/>
-                <a:ea typeface="Cambria" pitchFamily="34" charset="-122"/>
-                <a:cs typeface="Cambria" pitchFamily="34" charset="-120"/>
-              </a:rPr>
-              <a:t>2,160× faster</a:t>
-            </a:r>
-            <a:endParaRPr lang="en-US" sz="3600" dirty="0"/>
-          </a:p>
-        </p:txBody>
+            <a:off x="548640" y="3977640"/>
+            <a:ext cx="6035040" cy="2011680"/>
+          </a:xfrm>
+          <a:prstGeom prst="roundRect">
+            <a:avLst>
+              <a:gd name="adj" fmla="val 4545"/>
+            </a:avLst>
+          </a:prstGeom>
+          <a:solidFill>
+            <a:srgbClr val="FFF4E6"/>
+          </a:solidFill>
+          <a:ln w="12700">
+            <a:solidFill>
+              <a:srgbClr val="FED7AA"/>
+            </a:solidFill>
+            <a:prstDash val="solid"/>
+          </a:ln>
+        </p:spPr>
       </p:sp>
       <p:sp>
         <p:nvSpPr>
@@ -10131,8 +10825,8 @@
         </p:nvSpPr>
         <p:spPr>
           <a:xfrm>
-            <a:off x="7406640" y="1984248"/>
-            <a:ext cx="4206240" cy="457200"/>
+            <a:off x="713232" y="4087368"/>
+            <a:ext cx="5705856" cy="1792224"/>
           </a:xfrm>
           <a:prstGeom prst="rect">
             <a:avLst/>
@@ -10145,69 +10839,127 @@
           <a:lstStyle/>
           <a:p>
             <a:pPr indent="0" marL="0">
-              <a:buNone/>
-            </a:pPr>
-            <a:r>
-              <a:rPr lang="en-US" sz="1250" dirty="0">
-                <a:solidFill>
-                  <a:srgbClr val="6B7280"/>
-                </a:solidFill>
-              </a:rPr>
-              <a:t>composite B-tree index vs sequential scan</a:t>
-            </a:r>
-            <a:endParaRPr lang="en-US" sz="1250" dirty="0"/>
+              <a:spcAft>
+                <a:spcPts val="400"/>
+              </a:spcAft>
+              <a:buNone/>
+            </a:pPr>
+            <a:r>
+              <a:rPr lang="en-US" sz="1500" b="1" dirty="0">
+                <a:solidFill>
+                  <a:srgbClr val="C2410C"/>
+                </a:solidFill>
+                <a:latin typeface="Calibri" pitchFamily="34" charset="0"/>
+                <a:ea typeface="Calibri" pitchFamily="34" charset="-122"/>
+                <a:cs typeface="Calibri" pitchFamily="34" charset="-120"/>
+              </a:rPr>
+              <a:t>One view, one SELECT</a:t>
+            </a:r>
+            <a:endParaRPr lang="en-US" sz="1500" dirty="0"/>
+          </a:p>
+          <a:p>
+            <a:pPr indent="0" marL="0">
+              <a:spcAft>
+                <a:spcPts val="300"/>
+              </a:spcAft>
+              <a:buNone/>
+            </a:pPr>
+            <a:r>
+              <a:rPr lang="en-US" sz="1300" dirty="0">
+                <a:solidFill>
+                  <a:srgbClr val="374151"/>
+                </a:solidFill>
+                <a:latin typeface="Calibri" pitchFamily="34" charset="0"/>
+                <a:ea typeface="Calibri" pitchFamily="34" charset="-122"/>
+                <a:cs typeface="Calibri" pitchFamily="34" charset="-120"/>
+              </a:rPr>
+              <a:t>v_student_features joins 6 normalized tables into 177 rows × 5 features: the only student-level data that leaves PostgreSQL.</a:t>
+            </a:r>
+            <a:endParaRPr lang="en-US" sz="1500" dirty="0"/>
+          </a:p>
+          <a:p>
+            <a:pPr indent="0" marL="0">
+              <a:spcAft>
+                <a:spcPts val="300"/>
+              </a:spcAft>
+              <a:buNone/>
+            </a:pPr>
+            <a:r>
+              <a:rPr lang="en-US" sz="1300" dirty="0">
+                <a:solidFill>
+                  <a:srgbClr val="374151"/>
+                </a:solidFill>
+                <a:latin typeface="Calibri" pitchFamily="34" charset="0"/>
+                <a:ea typeface="Calibri" pitchFamily="34" charset="-122"/>
+                <a:cs typeface="Calibri" pitchFamily="34" charset="-120"/>
+              </a:rPr>
+              <a:t>Offers and CTC are deliberately NOT inputs: we cluster on what the committee sees early, then test the segments against outcomes. Otherwise the result would be circular.</a:t>
+            </a:r>
+            <a:endParaRPr lang="en-US" sz="1500" dirty="0"/>
           </a:p>
         </p:txBody>
       </p:sp>
       <p:sp>
         <p:nvSpPr>
-          <p:cNvPr id="8" name="Text 5"/>
+          <p:cNvPr id="8" name="Shape 5"/>
+          <p:cNvSpPr/>
+          <p:nvPr/>
+        </p:nvSpPr>
+        <p:spPr>
+          <a:xfrm>
+            <a:off x="6867144" y="1335024"/>
+            <a:ext cx="4828032" cy="2039112"/>
+          </a:xfrm>
+          <a:prstGeom prst="roundRect">
+            <a:avLst>
+              <a:gd name="adj" fmla="val 2242"/>
+            </a:avLst>
+          </a:prstGeom>
+          <a:solidFill>
+            <a:srgbClr val="FFFFFF"/>
+          </a:solidFill>
+          <a:ln w="12700">
+            <a:solidFill>
+              <a:srgbClr val="E5E7EB"/>
+            </a:solidFill>
+            <a:prstDash val="solid"/>
+          </a:ln>
+        </p:spPr>
+      </p:sp>
+      <p:pic>
+        <p:nvPicPr>
+          <p:cNvPr id="9" name="Image 0" descr="C:\Users\bhavy\Downloads\DBMS-20261028T151751Z-1-001\DBMS\Project\analytics\figures\03_choose_k.png">    </p:cNvPr>
+          <p:cNvPicPr>
+            <a:picLocks noChangeAspect="1"/>
+          </p:cNvPicPr>
+          <p:nvPr/>
+        </p:nvPicPr>
+        <p:blipFill>
+          <a:blip r:embed="rId1"/>
+          <a:stretch>
+            <a:fillRect/>
+          </a:stretch>
+        </p:blipFill>
+        <p:spPr>
+          <a:xfrm>
+            <a:off x="6903720" y="1371600"/>
+            <a:ext cx="4754880" cy="1965960"/>
+          </a:xfrm>
+          <a:prstGeom prst="rect">
+            <a:avLst/>
+          </a:prstGeom>
+        </p:spPr>
+      </p:pic>
+      <p:sp>
+        <p:nvSpPr>
+          <p:cNvPr id="10" name="Text 6"/>
           <p:cNvSpPr txBox="1"/>
           <p:nvPr/>
         </p:nvSpPr>
         <p:spPr>
           <a:xfrm>
-            <a:off x="7406640" y="2606040"/>
-            <a:ext cx="4206240" cy="640080"/>
-          </a:xfrm>
-          <a:prstGeom prst="rect">
-            <a:avLst/>
-          </a:prstGeom>
-          <a:noFill/>
-          <a:ln/>
-        </p:spPr>
-        <p:txBody>
-          <a:bodyPr wrap="square" lIns="0" tIns="0" rIns="0" bIns="0" rtlCol="0" anchor="ctr"/>
-          <a:lstStyle/>
-          <a:p>
-            <a:pPr indent="0" marL="0">
-              <a:buNone/>
-            </a:pPr>
-            <a:r>
-              <a:rPr lang="en-US" sz="3600" b="1" dirty="0">
-                <a:solidFill>
-                  <a:srgbClr val="0F766E"/>
-                </a:solidFill>
-                <a:latin typeface="Cambria" pitchFamily="34" charset="0"/>
-                <a:ea typeface="Cambria" pitchFamily="34" charset="-122"/>
-                <a:cs typeface="Cambria" pitchFamily="34" charset="-120"/>
-              </a:rPr>
-              <a:t>26× smaller</a:t>
-            </a:r>
-            <a:endParaRPr lang="en-US" sz="3600" dirty="0"/>
-          </a:p>
-        </p:txBody>
-      </p:sp>
-      <p:sp>
-        <p:nvSpPr>
-          <p:cNvPr id="9" name="Text 6"/>
-          <p:cNvSpPr txBox="1"/>
-          <p:nvPr/>
-        </p:nvSpPr>
-        <p:spPr>
-          <a:xfrm>
-            <a:off x="7406640" y="3264408"/>
-            <a:ext cx="4206240" cy="457200"/>
+            <a:off x="6903720" y="3566160"/>
+            <a:ext cx="4754880" cy="2423160"/>
           </a:xfrm>
           <a:prstGeom prst="rect">
             <a:avLst/>
@@ -10220,128 +10972,96 @@
           <a:lstStyle/>
           <a:p>
             <a:pPr indent="0" marL="0">
-              <a:buNone/>
-            </a:pPr>
-            <a:r>
-              <a:rPr lang="en-US" sz="1250" dirty="0">
-                <a:solidFill>
-                  <a:srgbClr val="6B7280"/>
-                </a:solidFill>
-              </a:rPr>
-              <a:t>partial index (176 KB) vs full index (4,488 KB)</a:t>
-            </a:r>
-            <a:endParaRPr lang="en-US" sz="1250" dirty="0"/>
-          </a:p>
-        </p:txBody>
-      </p:sp>
-      <p:sp>
-        <p:nvSpPr>
-          <p:cNvPr id="10" name="Text 7"/>
-          <p:cNvSpPr txBox="1"/>
-          <p:nvPr/>
-        </p:nvSpPr>
-        <p:spPr>
-          <a:xfrm>
-            <a:off x="7406640" y="3886200"/>
-            <a:ext cx="4206240" cy="640080"/>
-          </a:xfrm>
-          <a:prstGeom prst="rect">
-            <a:avLst/>
-          </a:prstGeom>
-          <a:noFill/>
-          <a:ln/>
-        </p:spPr>
-        <p:txBody>
-          <a:bodyPr wrap="square" lIns="0" tIns="0" rIns="0" bIns="0" rtlCol="0" anchor="ctr"/>
-          <a:lstStyle/>
-          <a:p>
+              <a:spcAft>
+                <a:spcPts val="800"/>
+              </a:spcAft>
+              <a:buNone/>
+            </a:pPr>
+            <a:r>
+              <a:rPr lang="en-US" sz="1350" b="1" dirty="0">
+                <a:solidFill>
+                  <a:srgbClr val="1F2937"/>
+                </a:solidFill>
+              </a:rPr>
+              <a:t>Standardize first: </a:t>
+            </a:r>
             <a:pPr indent="0" marL="0">
-              <a:buNone/>
-            </a:pPr>
-            <a:r>
-              <a:rPr lang="en-US" sz="3000" b="1" dirty="0">
-                <a:solidFill>
-                  <a:srgbClr val="C2410C"/>
-                </a:solidFill>
-                <a:latin typeface="Cambria" pitchFamily="34" charset="0"/>
-                <a:ea typeface="Cambria" pitchFamily="34" charset="-122"/>
-                <a:cs typeface="Cambria" pitchFamily="34" charset="-120"/>
-              </a:rPr>
-              <a:t>3 vs 4,383 blocks</a:t>
-            </a:r>
-            <a:endParaRPr lang="en-US" sz="3000" dirty="0"/>
-          </a:p>
-        </p:txBody>
-      </p:sp>
-      <p:sp>
-        <p:nvSpPr>
-          <p:cNvPr id="11" name="Text 8"/>
-          <p:cNvSpPr txBox="1"/>
-          <p:nvPr/>
-        </p:nvSpPr>
-        <p:spPr>
-          <a:xfrm>
-            <a:off x="7406640" y="4544568"/>
-            <a:ext cx="4206240" cy="457200"/>
-          </a:xfrm>
-          <a:prstGeom prst="rect">
-            <a:avLst/>
-          </a:prstGeom>
-          <a:noFill/>
-          <a:ln/>
-        </p:spPr>
-        <p:txBody>
-          <a:bodyPr wrap="square" lIns="0" tIns="0" rIns="0" bIns="0" rtlCol="0" anchor="t"/>
-          <a:lstStyle/>
+              <a:spcAft>
+                <a:spcPts val="800"/>
+              </a:spcAft>
+              <a:buNone/>
+            </a:pPr>
+            <a:r>
+              <a:rPr lang="en-US" sz="1350" dirty="0">
+                <a:solidFill>
+                  <a:srgbClr val="374151"/>
+                </a:solidFill>
+              </a:rPr>
+              <a:t>k-means uses distance, so unscaled applications (0–14) would outvote interview_rate (0–1).</a:t>
+            </a:r>
+            <a:endParaRPr lang="en-US" sz="1350" dirty="0"/>
+          </a:p>
           <a:p>
             <a:pPr indent="0" marL="0">
-              <a:buNone/>
-            </a:pPr>
-            <a:r>
-              <a:rPr lang="en-US" sz="1250" dirty="0">
-                <a:solidFill>
-                  <a:srgbClr val="6B7280"/>
-                </a:solidFill>
-              </a:rPr>
-              <a:t>leading-column rule: filter on status alone cannot seek the (job_id, status) index</a:t>
-            </a:r>
-            <a:endParaRPr lang="en-US" sz="1250" dirty="0"/>
-          </a:p>
-        </p:txBody>
-      </p:sp>
-      <p:sp>
-        <p:nvSpPr>
-          <p:cNvPr id="12" name="Text 9"/>
-          <p:cNvSpPr txBox="1"/>
-          <p:nvPr/>
-        </p:nvSpPr>
-        <p:spPr>
-          <a:xfrm>
-            <a:off x="7406640" y="5349240"/>
-            <a:ext cx="4206240" cy="457200"/>
-          </a:xfrm>
-          <a:prstGeom prst="rect">
-            <a:avLst/>
-          </a:prstGeom>
-          <a:noFill/>
-          <a:ln/>
-        </p:spPr>
-        <p:txBody>
-          <a:bodyPr wrap="square" lIns="0" tIns="0" rIns="0" bIns="0" rtlCol="0" anchor="ctr"/>
-          <a:lstStyle/>
-          <a:p>
+              <a:spcAft>
+                <a:spcPts val="800"/>
+              </a:spcAft>
+              <a:buNone/>
+            </a:pPr>
+            <a:r>
+              <a:rPr lang="en-US" sz="1350" b="1" dirty="0">
+                <a:solidFill>
+                  <a:srgbClr val="1F2937"/>
+                </a:solidFill>
+              </a:rPr>
+              <a:t>k = 4: </a:t>
+            </a:r>
             <a:pPr indent="0" marL="0">
-              <a:buNone/>
-            </a:pPr>
-            <a:r>
-              <a:rPr lang="en-US" sz="1200" i="1" dirty="0">
-                <a:solidFill>
-                  <a:srgbClr val="6B7280"/>
-                </a:solidFill>
-              </a:rPr>
-              <a:t>Measured with EXPLAIN (ANALYZE, BUFFERS) by tests TC-PRF-01 to 03.</a:t>
-            </a:r>
-            <a:endParaRPr lang="en-US" sz="1200" dirty="0"/>
+              <a:spcAft>
+                <a:spcPts val="800"/>
+              </a:spcAft>
+              <a:buNone/>
+            </a:pPr>
+            <a:r>
+              <a:rPr lang="en-US" sz="1350" dirty="0">
+                <a:solidFill>
+                  <a:srgbClr val="374151"/>
+                </a:solidFill>
+              </a:rPr>
+              <a:t>inertia flattens after it and the silhouette peaks there (0.298).</a:t>
+            </a:r>
+            <a:endParaRPr lang="en-US" sz="1350" dirty="0"/>
+          </a:p>
+          <a:p>
+            <a:pPr indent="0" marL="0">
+              <a:spcAft>
+                <a:spcPts val="800"/>
+              </a:spcAft>
+              <a:buNone/>
+            </a:pPr>
+            <a:r>
+              <a:rPr lang="en-US" sz="1350" b="1" dirty="0">
+                <a:solidFill>
+                  <a:srgbClr val="1F2937"/>
+                </a:solidFill>
+              </a:rPr>
+              <a:t>Strongest structure: </a:t>
+            </a:r>
+            <a:pPr indent="0" marL="0">
+              <a:spcAft>
+                <a:spcPts val="800"/>
+              </a:spcAft>
+              <a:buNone/>
+            </a:pPr>
+            <a:r>
+              <a:rPr lang="en-US" sz="1350" dirty="0">
+                <a:solidFill>
+                  <a:srgbClr val="374151"/>
+                </a:solidFill>
+              </a:rPr>
+              <a:t>tech vs business skills, r = -0.68. Students specialise.</a:t>
+            </a:r>
+            <a:endParaRPr lang="en-US" sz="1350" dirty="0"/>
           </a:p>
         </p:txBody>
       </p:sp>
@@ -10453,7 +11173,7 @@
                 <a:ea typeface="Cambria" pitchFamily="34" charset="-122"/>
                 <a:cs typeface="Cambria" pitchFamily="34" charset="-120"/>
               </a:rPr>
-              <a:t>Security and testing</a:t>
+              <a:t>Analytics (3/4): four segments, profile only</a:t>
             </a:r>
             <a:endParaRPr lang="en-US" sz="3000" dirty="0"/>
           </a:p>
@@ -10533,20 +11253,44 @@
           </a:p>
         </p:txBody>
       </p:sp>
-      <p:sp>
-        <p:nvSpPr>
-          <p:cNvPr id="5" name="Shape 3"/>
+      <p:pic>
+        <p:nvPicPr>
+          <p:cNvPr id="5" name="Image 0" descr="C:\Users\bhavy\Downloads\DBMS-20261028T151751Z-1-001\DBMS\Project\analytics\figures\05_segment_fingerprints.png">    </p:cNvPr>
+          <p:cNvPicPr>
+            <a:picLocks noChangeAspect="1"/>
+          </p:cNvPicPr>
+          <p:nvPr/>
+        </p:nvPicPr>
+        <p:blipFill>
+          <a:blip r:embed="rId1"/>
+          <a:stretch>
+            <a:fillRect/>
+          </a:stretch>
+        </p:blipFill>
+        <p:spPr>
+          <a:xfrm>
+            <a:off x="548640" y="1280160"/>
+            <a:ext cx="11109960" cy="2578608"/>
+          </a:xfrm>
+          <a:prstGeom prst="rect">
+            <a:avLst/>
+          </a:prstGeom>
+        </p:spPr>
+      </p:pic>
+      <p:sp>
+        <p:nvSpPr>
+          <p:cNvPr id="6" name="Shape 3"/>
           <p:cNvSpPr/>
           <p:nvPr/>
         </p:nvSpPr>
         <p:spPr>
           <a:xfrm>
-            <a:off x="548640" y="1325880"/>
-            <a:ext cx="5394960" cy="4663440"/>
+            <a:off x="548640" y="4023360"/>
+            <a:ext cx="2670048" cy="1600200"/>
           </a:xfrm>
           <a:prstGeom prst="roundRect">
             <a:avLst>
-              <a:gd name="adj" fmla="val 1961"/>
+              <a:gd name="adj" fmla="val 4571"/>
             </a:avLst>
           </a:prstGeom>
           <a:solidFill>
@@ -10562,14 +11306,507 @@
       </p:sp>
       <p:sp>
         <p:nvSpPr>
-          <p:cNvPr id="6" name="Text 4"/>
+          <p:cNvPr id="7" name="Shape 4"/>
+          <p:cNvSpPr/>
+          <p:nvPr/>
+        </p:nvSpPr>
+        <p:spPr>
+          <a:xfrm>
+            <a:off x="548640" y="4023360"/>
+            <a:ext cx="82296" cy="1600200"/>
+          </a:xfrm>
+          <a:prstGeom prst="rect">
+            <a:avLst/>
+          </a:prstGeom>
+          <a:solidFill>
+            <a:srgbClr val="1BAF7A"/>
+          </a:solidFill>
+          <a:ln w="12700">
+            <a:solidFill>
+              <a:srgbClr val="1BAF7A"/>
+            </a:solidFill>
+            <a:prstDash val="solid"/>
+          </a:ln>
+        </p:spPr>
+      </p:sp>
+      <p:sp>
+        <p:nvSpPr>
+          <p:cNvPr id="8" name="Text 5"/>
           <p:cNvSpPr txBox="1"/>
           <p:nvPr/>
         </p:nvSpPr>
         <p:spPr>
           <a:xfrm>
-            <a:off x="777240" y="1463040"/>
-            <a:ext cx="5029200" cy="365760"/>
+            <a:off x="749808" y="4087368"/>
+            <a:ext cx="2395728" cy="1481328"/>
+          </a:xfrm>
+          <a:prstGeom prst="rect">
+            <a:avLst/>
+          </a:prstGeom>
+          <a:noFill/>
+          <a:ln/>
+        </p:spPr>
+        <p:txBody>
+          <a:bodyPr wrap="square" lIns="0" tIns="0" rIns="0" bIns="0" rtlCol="0" anchor="t"/>
+          <a:lstStyle/>
+          <a:p>
+            <a:pPr indent="0" marL="0">
+              <a:buNone/>
+            </a:pPr>
+            <a:r>
+              <a:rPr lang="en-US" sz="1350" b="1" dirty="0">
+                <a:solidFill>
+                  <a:srgbClr val="1F2937"/>
+                </a:solidFill>
+              </a:rPr>
+              <a:t>High-Achieving Generalists</a:t>
+            </a:r>
+            <a:endParaRPr lang="en-US" sz="1350" dirty="0"/>
+          </a:p>
+          <a:p>
+            <a:pPr indent="0" marL="0">
+              <a:buNone/>
+            </a:pPr>
+            <a:r>
+              <a:rPr lang="en-US" sz="2600" b="1" dirty="0">
+                <a:solidFill>
+                  <a:srgbClr val="1F2937"/>
+                </a:solidFill>
+                <a:latin typeface="Cambria" pitchFamily="34" charset="0"/>
+                <a:ea typeface="Cambria" pitchFamily="34" charset="-122"/>
+                <a:cs typeface="Cambria" pitchFamily="34" charset="-120"/>
+              </a:rPr>
+              <a:t>41%</a:t>
+            </a:r>
+            <a:pPr indent="0" marL="0">
+              <a:buNone/>
+            </a:pPr>
+            <a:r>
+              <a:rPr lang="en-US" sz="1150" dirty="0">
+                <a:solidFill>
+                  <a:srgbClr val="6B7280"/>
+                </a:solidFill>
+              </a:rPr>
+              <a:t>  accepted · n = 68</a:t>
+            </a:r>
+            <a:endParaRPr lang="en-US" sz="1350" dirty="0"/>
+          </a:p>
+          <a:p>
+            <a:pPr indent="0" marL="0">
+              <a:buNone/>
+            </a:pPr>
+            <a:r>
+              <a:rPr lang="en-US" sz="1150" dirty="0">
+                <a:solidFill>
+                  <a:srgbClr val="374151"/>
+                </a:solidFill>
+              </a:rPr>
+              <a:t>High CGPA, business skills, apply widely</a:t>
+            </a:r>
+            <a:endParaRPr lang="en-US" sz="1350" dirty="0"/>
+          </a:p>
+        </p:txBody>
+      </p:sp>
+      <p:sp>
+        <p:nvSpPr>
+          <p:cNvPr id="9" name="Shape 6"/>
+          <p:cNvSpPr/>
+          <p:nvPr/>
+        </p:nvSpPr>
+        <p:spPr>
+          <a:xfrm>
+            <a:off x="3364992" y="4023360"/>
+            <a:ext cx="2670048" cy="1600200"/>
+          </a:xfrm>
+          <a:prstGeom prst="roundRect">
+            <a:avLst>
+              <a:gd name="adj" fmla="val 4571"/>
+            </a:avLst>
+          </a:prstGeom>
+          <a:solidFill>
+            <a:srgbClr val="F6F7FB"/>
+          </a:solidFill>
+          <a:ln w="12700">
+            <a:solidFill>
+              <a:srgbClr val="E5E7EB"/>
+            </a:solidFill>
+            <a:prstDash val="solid"/>
+          </a:ln>
+        </p:spPr>
+      </p:sp>
+      <p:sp>
+        <p:nvSpPr>
+          <p:cNvPr id="10" name="Shape 7"/>
+          <p:cNvSpPr/>
+          <p:nvPr/>
+        </p:nvSpPr>
+        <p:spPr>
+          <a:xfrm>
+            <a:off x="3364992" y="4023360"/>
+            <a:ext cx="82296" cy="1600200"/>
+          </a:xfrm>
+          <a:prstGeom prst="rect">
+            <a:avLst/>
+          </a:prstGeom>
+          <a:solidFill>
+            <a:srgbClr val="2A78D6"/>
+          </a:solidFill>
+          <a:ln w="12700">
+            <a:solidFill>
+              <a:srgbClr val="2A78D6"/>
+            </a:solidFill>
+            <a:prstDash val="solid"/>
+          </a:ln>
+        </p:spPr>
+      </p:sp>
+      <p:sp>
+        <p:nvSpPr>
+          <p:cNvPr id="11" name="Text 8"/>
+          <p:cNvSpPr txBox="1"/>
+          <p:nvPr/>
+        </p:nvSpPr>
+        <p:spPr>
+          <a:xfrm>
+            <a:off x="3566160" y="4087368"/>
+            <a:ext cx="2395728" cy="1481328"/>
+          </a:xfrm>
+          <a:prstGeom prst="rect">
+            <a:avLst/>
+          </a:prstGeom>
+          <a:noFill/>
+          <a:ln/>
+        </p:spPr>
+        <p:txBody>
+          <a:bodyPr wrap="square" lIns="0" tIns="0" rIns="0" bIns="0" rtlCol="0" anchor="t"/>
+          <a:lstStyle/>
+          <a:p>
+            <a:pPr indent="0" marL="0">
+              <a:buNone/>
+            </a:pPr>
+            <a:r>
+              <a:rPr lang="en-US" sz="1350" b="1" dirty="0">
+                <a:solidFill>
+                  <a:srgbClr val="1F2937"/>
+                </a:solidFill>
+              </a:rPr>
+              <a:t>Tech Specialists</a:t>
+            </a:r>
+            <a:endParaRPr lang="en-US" sz="1350" dirty="0"/>
+          </a:p>
+          <a:p>
+            <a:pPr indent="0" marL="0">
+              <a:buNone/>
+            </a:pPr>
+            <a:r>
+              <a:rPr lang="en-US" sz="2600" b="1" dirty="0">
+                <a:solidFill>
+                  <a:srgbClr val="1F2937"/>
+                </a:solidFill>
+                <a:latin typeface="Cambria" pitchFamily="34" charset="0"/>
+                <a:ea typeface="Cambria" pitchFamily="34" charset="-122"/>
+                <a:cs typeface="Cambria" pitchFamily="34" charset="-120"/>
+              </a:rPr>
+              <a:t>36%</a:t>
+            </a:r>
+            <a:pPr indent="0" marL="0">
+              <a:buNone/>
+            </a:pPr>
+            <a:r>
+              <a:rPr lang="en-US" sz="1150" dirty="0">
+                <a:solidFill>
+                  <a:srgbClr val="6B7280"/>
+                </a:solidFill>
+              </a:rPr>
+              <a:t>  accepted · n = 56</a:t>
+            </a:r>
+            <a:endParaRPr lang="en-US" sz="1350" dirty="0"/>
+          </a:p>
+          <a:p>
+            <a:pPr indent="0" marL="0">
+              <a:buNone/>
+            </a:pPr>
+            <a:r>
+              <a:rPr lang="en-US" sz="1150" dirty="0">
+                <a:solidFill>
+                  <a:srgbClr val="374151"/>
+                </a:solidFill>
+              </a:rPr>
+              <a:t>Mostly PGDBA, technical skills, best CTC (₹29.3 L)</a:t>
+            </a:r>
+            <a:endParaRPr lang="en-US" sz="1350" dirty="0"/>
+          </a:p>
+        </p:txBody>
+      </p:sp>
+      <p:sp>
+        <p:nvSpPr>
+          <p:cNvPr id="12" name="Shape 9"/>
+          <p:cNvSpPr/>
+          <p:nvPr/>
+        </p:nvSpPr>
+        <p:spPr>
+          <a:xfrm>
+            <a:off x="6181344" y="4023360"/>
+            <a:ext cx="2670048" cy="1600200"/>
+          </a:xfrm>
+          <a:prstGeom prst="roundRect">
+            <a:avLst>
+              <a:gd name="adj" fmla="val 4571"/>
+            </a:avLst>
+          </a:prstGeom>
+          <a:solidFill>
+            <a:srgbClr val="F6F7FB"/>
+          </a:solidFill>
+          <a:ln w="12700">
+            <a:solidFill>
+              <a:srgbClr val="E5E7EB"/>
+            </a:solidFill>
+            <a:prstDash val="solid"/>
+          </a:ln>
+        </p:spPr>
+      </p:sp>
+      <p:sp>
+        <p:nvSpPr>
+          <p:cNvPr id="13" name="Shape 10"/>
+          <p:cNvSpPr/>
+          <p:nvPr/>
+        </p:nvSpPr>
+        <p:spPr>
+          <a:xfrm>
+            <a:off x="6181344" y="4023360"/>
+            <a:ext cx="82296" cy="1600200"/>
+          </a:xfrm>
+          <a:prstGeom prst="rect">
+            <a:avLst/>
+          </a:prstGeom>
+          <a:solidFill>
+            <a:srgbClr val="EDA100"/>
+          </a:solidFill>
+          <a:ln w="12700">
+            <a:solidFill>
+              <a:srgbClr val="EDA100"/>
+            </a:solidFill>
+            <a:prstDash val="solid"/>
+          </a:ln>
+        </p:spPr>
+      </p:sp>
+      <p:sp>
+        <p:nvSpPr>
+          <p:cNvPr id="14" name="Text 11"/>
+          <p:cNvSpPr txBox="1"/>
+          <p:nvPr/>
+        </p:nvSpPr>
+        <p:spPr>
+          <a:xfrm>
+            <a:off x="6382512" y="4087368"/>
+            <a:ext cx="2395728" cy="1481328"/>
+          </a:xfrm>
+          <a:prstGeom prst="rect">
+            <a:avLst/>
+          </a:prstGeom>
+          <a:noFill/>
+          <a:ln/>
+        </p:spPr>
+        <p:txBody>
+          <a:bodyPr wrap="square" lIns="0" tIns="0" rIns="0" bIns="0" rtlCol="0" anchor="t"/>
+          <a:lstStyle/>
+          <a:p>
+            <a:pPr indent="0" marL="0">
+              <a:buNone/>
+            </a:pPr>
+            <a:r>
+              <a:rPr lang="en-US" sz="1350" b="1" dirty="0">
+                <a:solidFill>
+                  <a:srgbClr val="1F2937"/>
+                </a:solidFill>
+              </a:rPr>
+              <a:t>Selective Appliers</a:t>
+            </a:r>
+            <a:endParaRPr lang="en-US" sz="1350" dirty="0"/>
+          </a:p>
+          <a:p>
+            <a:pPr indent="0" marL="0">
+              <a:buNone/>
+            </a:pPr>
+            <a:r>
+              <a:rPr lang="en-US" sz="2600" b="1" dirty="0">
+                <a:solidFill>
+                  <a:srgbClr val="1F2937"/>
+                </a:solidFill>
+                <a:latin typeface="Cambria" pitchFamily="34" charset="0"/>
+                <a:ea typeface="Cambria" pitchFamily="34" charset="-122"/>
+                <a:cs typeface="Cambria" pitchFamily="34" charset="-120"/>
+              </a:rPr>
+              <a:t>0%</a:t>
+            </a:r>
+            <a:pPr indent="0" marL="0">
+              <a:buNone/>
+            </a:pPr>
+            <a:r>
+              <a:rPr lang="en-US" sz="1150" dirty="0">
+                <a:solidFill>
+                  <a:srgbClr val="6B7280"/>
+                </a:solidFill>
+              </a:rPr>
+              <a:t>  accepted · n = 19</a:t>
+            </a:r>
+            <a:endParaRPr lang="en-US" sz="1350" dirty="0"/>
+          </a:p>
+          <a:p>
+            <a:pPr indent="0" marL="0">
+              <a:buNone/>
+            </a:pPr>
+            <a:r>
+              <a:rPr lang="en-US" sz="1150" dirty="0">
+                <a:solidFill>
+                  <a:srgbClr val="374151"/>
+                </a:solidFill>
+              </a:rPr>
+              <a:t>Avg CGPA; 88% reach interview, but only 2.6 applications</a:t>
+            </a:r>
+            <a:endParaRPr lang="en-US" sz="1350" dirty="0"/>
+          </a:p>
+        </p:txBody>
+      </p:sp>
+      <p:sp>
+        <p:nvSpPr>
+          <p:cNvPr id="15" name="Shape 12"/>
+          <p:cNvSpPr/>
+          <p:nvPr/>
+        </p:nvSpPr>
+        <p:spPr>
+          <a:xfrm>
+            <a:off x="8997696" y="4023360"/>
+            <a:ext cx="2670048" cy="1600200"/>
+          </a:xfrm>
+          <a:prstGeom prst="roundRect">
+            <a:avLst>
+              <a:gd name="adj" fmla="val 4571"/>
+            </a:avLst>
+          </a:prstGeom>
+          <a:solidFill>
+            <a:srgbClr val="F6F7FB"/>
+          </a:solidFill>
+          <a:ln w="12700">
+            <a:solidFill>
+              <a:srgbClr val="E5E7EB"/>
+            </a:solidFill>
+            <a:prstDash val="solid"/>
+          </a:ln>
+        </p:spPr>
+      </p:sp>
+      <p:sp>
+        <p:nvSpPr>
+          <p:cNvPr id="16" name="Shape 13"/>
+          <p:cNvSpPr/>
+          <p:nvPr/>
+        </p:nvSpPr>
+        <p:spPr>
+          <a:xfrm>
+            <a:off x="8997696" y="4023360"/>
+            <a:ext cx="82296" cy="1600200"/>
+          </a:xfrm>
+          <a:prstGeom prst="rect">
+            <a:avLst/>
+          </a:prstGeom>
+          <a:solidFill>
+            <a:srgbClr val="EB6834"/>
+          </a:solidFill>
+          <a:ln w="12700">
+            <a:solidFill>
+              <a:srgbClr val="EB6834"/>
+            </a:solidFill>
+            <a:prstDash val="solid"/>
+          </a:ln>
+        </p:spPr>
+      </p:sp>
+      <p:sp>
+        <p:nvSpPr>
+          <p:cNvPr id="17" name="Text 14"/>
+          <p:cNvSpPr txBox="1"/>
+          <p:nvPr/>
+        </p:nvSpPr>
+        <p:spPr>
+          <a:xfrm>
+            <a:off x="9198864" y="4087368"/>
+            <a:ext cx="2395728" cy="1481328"/>
+          </a:xfrm>
+          <a:prstGeom prst="rect">
+            <a:avLst/>
+          </a:prstGeom>
+          <a:noFill/>
+          <a:ln/>
+        </p:spPr>
+        <p:txBody>
+          <a:bodyPr wrap="square" lIns="0" tIns="0" rIns="0" bIns="0" rtlCol="0" anchor="t"/>
+          <a:lstStyle/>
+          <a:p>
+            <a:pPr indent="0" marL="0">
+              <a:buNone/>
+            </a:pPr>
+            <a:r>
+              <a:rPr lang="en-US" sz="1350" b="1" dirty="0">
+                <a:solidFill>
+                  <a:srgbClr val="1F2937"/>
+                </a:solidFill>
+              </a:rPr>
+              <a:t>At-Risk</a:t>
+            </a:r>
+            <a:endParaRPr lang="en-US" sz="1350" dirty="0"/>
+          </a:p>
+          <a:p>
+            <a:pPr indent="0" marL="0">
+              <a:buNone/>
+            </a:pPr>
+            <a:r>
+              <a:rPr lang="en-US" sz="2600" b="1" dirty="0">
+                <a:solidFill>
+                  <a:srgbClr val="1F2937"/>
+                </a:solidFill>
+                <a:latin typeface="Cambria" pitchFamily="34" charset="0"/>
+                <a:ea typeface="Cambria" pitchFamily="34" charset="-122"/>
+                <a:cs typeface="Cambria" pitchFamily="34" charset="-120"/>
+              </a:rPr>
+              <a:t>3%</a:t>
+            </a:r>
+            <a:pPr indent="0" marL="0">
+              <a:buNone/>
+            </a:pPr>
+            <a:r>
+              <a:rPr lang="en-US" sz="1150" dirty="0">
+                <a:solidFill>
+                  <a:srgbClr val="6B7280"/>
+                </a:solidFill>
+              </a:rPr>
+              <a:t>  accepted · n = 34</a:t>
+            </a:r>
+            <a:endParaRPr lang="en-US" sz="1350" dirty="0"/>
+          </a:p>
+          <a:p>
+            <a:pPr indent="0" marL="0">
+              <a:buNone/>
+            </a:pPr>
+            <a:r>
+              <a:rPr lang="en-US" sz="1150" dirty="0">
+                <a:solidFill>
+                  <a:srgbClr val="374151"/>
+                </a:solidFill>
+              </a:rPr>
+              <a:t>Low CGPA, few applications, rarely shortlisted</a:t>
+            </a:r>
+            <a:endParaRPr lang="en-US" sz="1350" dirty="0"/>
+          </a:p>
+        </p:txBody>
+      </p:sp>
+      <p:sp>
+        <p:nvSpPr>
+          <p:cNvPr id="18" name="Text 15"/>
+          <p:cNvSpPr txBox="1"/>
+          <p:nvPr/>
+        </p:nvSpPr>
+        <p:spPr>
+          <a:xfrm>
+            <a:off x="548640" y="5715000"/>
+            <a:ext cx="11109960" cy="365760"/>
           </a:xfrm>
           <a:prstGeom prst="rect">
             <a:avLst/>
@@ -10585,334 +11822,17 @@
               <a:buNone/>
             </a:pPr>
             <a:r>
-              <a:rPr lang="en-US" sz="1500" b="1" dirty="0">
-                <a:solidFill>
-                  <a:srgbClr val="1F2937"/>
-                </a:solidFill>
-              </a:rPr>
-              <a:t>SQL injection, same input  x' OR '1'='1</a:t>
-            </a:r>
-            <a:endParaRPr lang="en-US" sz="1500" dirty="0"/>
+              <a:rPr lang="en-US" sz="1300" b="1" dirty="0">
+                <a:solidFill>
+                  <a:srgbClr val="0F766E"/>
+                </a:solidFill>
+              </a:rPr>
+              <a:t>χ² test, segment × accepted offer: χ² = 25.7, dof = 3, p = 0.000011. The segments differ in outcome, so the clusters are real, not just geometry.</a:t>
+            </a:r>
+            <a:endParaRPr lang="en-US" sz="1300" dirty="0"/>
           </a:p>
         </p:txBody>
       </p:sp>
-      <p:sp>
-        <p:nvSpPr>
-          <p:cNvPr id="7" name="Text 5"/>
-          <p:cNvSpPr txBox="1"/>
-          <p:nvPr/>
-        </p:nvSpPr>
-        <p:spPr>
-          <a:xfrm>
-            <a:off x="777240" y="1965960"/>
-            <a:ext cx="2377440" cy="640080"/>
-          </a:xfrm>
-          <a:prstGeom prst="rect">
-            <a:avLst/>
-          </a:prstGeom>
-          <a:noFill/>
-          <a:ln/>
-        </p:spPr>
-        <p:txBody>
-          <a:bodyPr wrap="square" lIns="0" tIns="0" rIns="0" bIns="0" rtlCol="0" anchor="ctr"/>
-          <a:lstStyle/>
-          <a:p>
-            <a:pPr indent="0" marL="0">
-              <a:buNone/>
-            </a:pPr>
-            <a:r>
-              <a:rPr lang="en-US" sz="4800" b="1" dirty="0">
-                <a:solidFill>
-                  <a:srgbClr val="DC2626"/>
-                </a:solidFill>
-                <a:latin typeface="Cambria" pitchFamily="34" charset="0"/>
-                <a:ea typeface="Cambria" pitchFamily="34" charset="-122"/>
-                <a:cs typeface="Cambria" pitchFamily="34" charset="-120"/>
-              </a:rPr>
-              <a:t>180</a:t>
-            </a:r>
-            <a:endParaRPr lang="en-US" sz="4800" dirty="0"/>
-          </a:p>
-        </p:txBody>
-      </p:sp>
-      <p:sp>
-        <p:nvSpPr>
-          <p:cNvPr id="8" name="Text 6"/>
-          <p:cNvSpPr txBox="1"/>
-          <p:nvPr/>
-        </p:nvSpPr>
-        <p:spPr>
-          <a:xfrm>
-            <a:off x="777240" y="2624328"/>
-            <a:ext cx="2377440" cy="457200"/>
-          </a:xfrm>
-          <a:prstGeom prst="rect">
-            <a:avLst/>
-          </a:prstGeom>
-          <a:noFill/>
-          <a:ln/>
-        </p:spPr>
-        <p:txBody>
-          <a:bodyPr wrap="square" lIns="0" tIns="0" rIns="0" bIns="0" rtlCol="0" anchor="t"/>
-          <a:lstStyle/>
-          <a:p>
-            <a:pPr indent="0" marL="0">
-              <a:buNone/>
-            </a:pPr>
-            <a:r>
-              <a:rPr lang="en-US" sz="1250" dirty="0">
-                <a:solidFill>
-                  <a:srgbClr val="6B7280"/>
-                </a:solidFill>
-              </a:rPr>
-              <a:t>rows leaked: string concatenation</a:t>
-            </a:r>
-            <a:endParaRPr lang="en-US" sz="1250" dirty="0"/>
-          </a:p>
-        </p:txBody>
-      </p:sp>
-      <p:sp>
-        <p:nvSpPr>
-          <p:cNvPr id="9" name="Text 7"/>
-          <p:cNvSpPr txBox="1"/>
-          <p:nvPr/>
-        </p:nvSpPr>
-        <p:spPr>
-          <a:xfrm>
-            <a:off x="3291840" y="1965960"/>
-            <a:ext cx="2377440" cy="640080"/>
-          </a:xfrm>
-          <a:prstGeom prst="rect">
-            <a:avLst/>
-          </a:prstGeom>
-          <a:noFill/>
-          <a:ln/>
-        </p:spPr>
-        <p:txBody>
-          <a:bodyPr wrap="square" lIns="0" tIns="0" rIns="0" bIns="0" rtlCol="0" anchor="ctr"/>
-          <a:lstStyle/>
-          <a:p>
-            <a:pPr indent="0" marL="0">
-              <a:buNone/>
-            </a:pPr>
-            <a:r>
-              <a:rPr lang="en-US" sz="4800" b="1" dirty="0">
-                <a:solidFill>
-                  <a:srgbClr val="0F766E"/>
-                </a:solidFill>
-                <a:latin typeface="Cambria" pitchFamily="34" charset="0"/>
-                <a:ea typeface="Cambria" pitchFamily="34" charset="-122"/>
-                <a:cs typeface="Cambria" pitchFamily="34" charset="-120"/>
-              </a:rPr>
-              <a:t>0</a:t>
-            </a:r>
-            <a:endParaRPr lang="en-US" sz="4800" dirty="0"/>
-          </a:p>
-        </p:txBody>
-      </p:sp>
-      <p:sp>
-        <p:nvSpPr>
-          <p:cNvPr id="10" name="Text 8"/>
-          <p:cNvSpPr txBox="1"/>
-          <p:nvPr/>
-        </p:nvSpPr>
-        <p:spPr>
-          <a:xfrm>
-            <a:off x="3291840" y="2624328"/>
-            <a:ext cx="2377440" cy="457200"/>
-          </a:xfrm>
-          <a:prstGeom prst="rect">
-            <a:avLst/>
-          </a:prstGeom>
-          <a:noFill/>
-          <a:ln/>
-        </p:spPr>
-        <p:txBody>
-          <a:bodyPr wrap="square" lIns="0" tIns="0" rIns="0" bIns="0" rtlCol="0" anchor="t"/>
-          <a:lstStyle/>
-          <a:p>
-            <a:pPr indent="0" marL="0">
-              <a:buNone/>
-            </a:pPr>
-            <a:r>
-              <a:rPr lang="en-US" sz="1250" dirty="0">
-                <a:solidFill>
-                  <a:srgbClr val="6B7280"/>
-                </a:solidFill>
-              </a:rPr>
-              <a:t>rows: bound parameter ($1)</a:t>
-            </a:r>
-            <a:endParaRPr lang="en-US" sz="1250" dirty="0"/>
-          </a:p>
-        </p:txBody>
-      </p:sp>
-      <p:sp>
-        <p:nvSpPr>
-          <p:cNvPr id="11" name="Text 9"/>
-          <p:cNvSpPr txBox="1"/>
-          <p:nvPr/>
-        </p:nvSpPr>
-        <p:spPr>
-          <a:xfrm>
-            <a:off x="777240" y="3291840"/>
-            <a:ext cx="4983480" cy="2560320"/>
-          </a:xfrm>
-          <a:prstGeom prst="rect">
-            <a:avLst/>
-          </a:prstGeom>
-          <a:noFill/>
-          <a:ln/>
-        </p:spPr>
-        <p:txBody>
-          <a:bodyPr wrap="square" lIns="0" tIns="0" rIns="0" bIns="0" rtlCol="0" anchor="t"/>
-          <a:lstStyle/>
-          <a:p>
-            <a:pPr marL="342900" indent="-342900">
-              <a:spcAft>
-                <a:spcPts val="800"/>
-              </a:spcAft>
-              <a:buSzPct val="100000"/>
-              <a:buChar char="•"/>
-            </a:pPr>
-            <a:r>
-              <a:rPr lang="en-US" sz="1350" dirty="0">
-                <a:solidFill>
-                  <a:srgbClr val="374151"/>
-                </a:solidFill>
-              </a:rPr>
-              <a:t>Defence in depth: the unsafe path runs as role placeiq_readonly (GRANT SELECT on 2 tables) in a READ ONLY transaction</a:t>
-            </a:r>
-            <a:endParaRPr lang="en-US" sz="1350" dirty="0"/>
-          </a:p>
-          <a:p>
-            <a:pPr marL="342900" indent="-342900">
-              <a:spcAft>
-                <a:spcPts val="800"/>
-              </a:spcAft>
-              <a:buSzPct val="100000"/>
-              <a:buChar char="•"/>
-            </a:pPr>
-            <a:r>
-              <a:rPr lang="en-US" sz="1350" dirty="0">
-                <a:solidFill>
-                  <a:srgbClr val="374151"/>
-                </a:solidFill>
-              </a:rPr>
-              <a:t>DROP TABLE payload → SQLSTATE 25006; pg_read_file → 42501 (permission denied)</a:t>
-            </a:r>
-            <a:endParaRPr lang="en-US" sz="1350" dirty="0"/>
-          </a:p>
-          <a:p>
-            <a:pPr marL="342900" indent="-342900">
-              <a:spcAft>
-                <a:spcPts val="800"/>
-              </a:spcAft>
-              <a:buSzPct val="100000"/>
-              <a:buChar char="•"/>
-            </a:pPr>
-            <a:r>
-              <a:rPr lang="en-US" sz="1350" dirty="0">
-                <a:solidFill>
-                  <a:srgbClr val="374151"/>
-                </a:solidFill>
-              </a:rPr>
-              <a:t>Every other query in the app uses parameters</a:t>
-            </a:r>
-            <a:endParaRPr lang="en-US" sz="1350" dirty="0"/>
-          </a:p>
-        </p:txBody>
-      </p:sp>
-      <p:sp>
-        <p:nvSpPr>
-          <p:cNvPr id="12" name="Text 10"/>
-          <p:cNvSpPr txBox="1"/>
-          <p:nvPr/>
-        </p:nvSpPr>
-        <p:spPr>
-          <a:xfrm>
-            <a:off x="6309360" y="1280160"/>
-            <a:ext cx="2377440" cy="777240"/>
-          </a:xfrm>
-          <a:prstGeom prst="rect">
-            <a:avLst/>
-          </a:prstGeom>
-          <a:noFill/>
-          <a:ln/>
-        </p:spPr>
-        <p:txBody>
-          <a:bodyPr wrap="square" lIns="0" tIns="0" rIns="0" bIns="0" rtlCol="0" anchor="ctr"/>
-          <a:lstStyle/>
-          <a:p>
-            <a:pPr indent="0" marL="0">
-              <a:buNone/>
-            </a:pPr>
-            <a:r>
-              <a:rPr lang="en-US" sz="4400" b="1" dirty="0">
-                <a:solidFill>
-                  <a:srgbClr val="0F766E"/>
-                </a:solidFill>
-                <a:latin typeface="Cambria" pitchFamily="34" charset="0"/>
-                <a:ea typeface="Cambria" pitchFamily="34" charset="-122"/>
-                <a:cs typeface="Cambria" pitchFamily="34" charset="-120"/>
-              </a:rPr>
-              <a:t>91 / 91</a:t>
-            </a:r>
-            <a:endParaRPr lang="en-US" sz="4400" dirty="0"/>
-          </a:p>
-        </p:txBody>
-      </p:sp>
-      <p:sp>
-        <p:nvSpPr>
-          <p:cNvPr id="13" name="Text 11"/>
-          <p:cNvSpPr txBox="1"/>
-          <p:nvPr/>
-        </p:nvSpPr>
-        <p:spPr>
-          <a:xfrm>
-            <a:off x="8595360" y="1417320"/>
-            <a:ext cx="3063240" cy="640080"/>
-          </a:xfrm>
-          <a:prstGeom prst="rect">
-            <a:avLst/>
-          </a:prstGeom>
-          <a:noFill/>
-          <a:ln/>
-        </p:spPr>
-        <p:txBody>
-          <a:bodyPr wrap="square" lIns="0" tIns="0" rIns="0" bIns="0" rtlCol="0" anchor="ctr"/>
-          <a:lstStyle/>
-          <a:p>
-            <a:pPr indent="0" marL="0">
-              <a:buNone/>
-            </a:pPr>
-            <a:r>
-              <a:rPr lang="en-US" sz="1300" dirty="0">
-                <a:solidFill>
-                  <a:srgbClr val="6B7280"/>
-                </a:solidFill>
-              </a:rPr>
-              <a:t>automated tests passed (pytest, real database)</a:t>
-            </a:r>
-            <a:endParaRPr lang="en-US" sz="1300" dirty="0"/>
-          </a:p>
-        </p:txBody>
-      </p:sp>
-      <p:graphicFrame>
-        <p:nvGraphicFramePr>
-          <p:cNvPr id="14" name="Chart 0" descr=""/>
-          <p:cNvGraphicFramePr/>
-          <p:nvPr/>
-        </p:nvGraphicFramePr>
-        <p:xfrm>
-          <a:off x="6309360" y="2148840"/>
-          <a:ext cx="5349240" cy="3840480"/>
-        </p:xfrm>
-        <a:graphic xmlns:a="http://schemas.openxmlformats.org/drawingml/2006/main">
-          <a:graphicData uri="http://schemas.openxmlformats.org/drawingml/2006/chart">
-            <c:chart xmlns:c="http://schemas.openxmlformats.org/drawingml/2006/chart" r:id="rId1"/>
-          </a:graphicData>
-        </a:graphic>
-      </p:graphicFrame>
       <p:sp>
         <p:nvSpPr>
           <p:cNvPr id="25" name="Slide Number Placeholder 0"/>
@@ -10989,13 +11909,15 @@
       <p:sp>
         <p:nvSpPr>
           <p:cNvPr id="2" name="Text 0"/>
-          <p:cNvSpPr txBox="1"/>
-          <p:nvPr/>
-        </p:nvSpPr>
-        <p:spPr>
-          <a:xfrm>
-            <a:off x="640080" y="411480"/>
-            <a:ext cx="8229600" cy="731520"/>
+          <p:cNvSpPr/>
+          <p:nvPr>
+            <p:ph idx="100" type="title" hasCustomPrompt="1"/>
+          </p:nvPr>
+        </p:nvSpPr>
+        <p:spPr>
+          <a:xfrm>
+            <a:off x="548640" y="347472"/>
+            <a:ext cx="9144000" cy="731520"/>
           </a:xfrm>
           <a:prstGeom prst="rect">
             <a:avLst/>
@@ -11007,46 +11929,46 @@
           <a:bodyPr wrap="square" lIns="0" tIns="0" rIns="0" bIns="0" rtlCol="0" anchor="ctr"/>
           <a:lstStyle/>
           <a:p>
-            <a:pPr indent="0" marL="0">
-              <a:buNone/>
-            </a:pPr>
-            <a:r>
-              <a:rPr lang="en-US" sz="3200" b="1" dirty="0">
-                <a:solidFill>
-                  <a:srgbClr val="FFFFFF"/>
+            <a:pPr algn="l" indent="0" marL="0">
+              <a:buNone/>
+            </a:pPr>
+            <a:r>
+              <a:rPr lang="en-US" sz="3000" b="1" dirty="0">
+                <a:solidFill>
+                  <a:srgbClr val="111827"/>
                 </a:solidFill>
                 <a:latin typeface="Cambria" pitchFamily="34" charset="0"/>
                 <a:ea typeface="Cambria" pitchFamily="34" charset="-122"/>
                 <a:cs typeface="Cambria" pitchFamily="34" charset="-120"/>
               </a:rPr>
-              <a:t>What we learned</a:t>
-            </a:r>
-            <a:endParaRPr lang="en-US" sz="3200" dirty="0"/>
+              <a:t>Analytics (4/4): clusters back in the database</a:t>
+            </a:r>
+            <a:endParaRPr lang="en-US" sz="3000" dirty="0"/>
           </a:p>
         </p:txBody>
       </p:sp>
       <p:sp>
         <p:nvSpPr>
-          <p:cNvPr id="3" name="Shape 1"/>
+          <p:cNvPr id="3" name="speaker-chip"/>
           <p:cNvSpPr/>
           <p:nvPr/>
         </p:nvSpPr>
         <p:spPr>
           <a:xfrm>
-            <a:off x="640080" y="1417320"/>
-            <a:ext cx="2606040" cy="3108960"/>
+            <a:off x="9921240" y="457200"/>
+            <a:ext cx="1737360" cy="402336"/>
           </a:xfrm>
           <a:prstGeom prst="roundRect">
             <a:avLst>
-              <a:gd name="adj" fmla="val 3509"/>
+              <a:gd name="adj" fmla="val 50000"/>
             </a:avLst>
           </a:prstGeom>
           <a:solidFill>
-            <a:srgbClr val="1F2937"/>
+            <a:srgbClr val="EEF0FF"/>
           </a:solidFill>
           <a:ln w="12700">
             <a:solidFill>
-              <a:srgbClr val="374151"/>
+              <a:srgbClr val="EEF0FF"/>
             </a:solidFill>
             <a:prstDash val="solid"/>
           </a:ln>
@@ -11060,8 +11982,8 @@
         </p:nvSpPr>
         <p:spPr>
           <a:xfrm>
-            <a:off x="822960" y="1572768"/>
-            <a:ext cx="2286000" cy="365760"/>
+            <a:off x="9921240" y="457200"/>
+            <a:ext cx="1737360" cy="402336"/>
           </a:xfrm>
           <a:prstGeom prst="rect">
             <a:avLst/>
@@ -11073,42 +11995,69 @@
           <a:bodyPr wrap="square" lIns="0" tIns="0" rIns="0" bIns="0" rtlCol="0" anchor="ctr"/>
           <a:lstStyle/>
           <a:p>
-            <a:pPr indent="0" marL="0">
-              <a:buNone/>
-            </a:pPr>
-            <a:r>
-              <a:rPr lang="en-US" sz="1400" b="1" dirty="0">
-                <a:solidFill>
-                  <a:srgbClr val="A5B4FC"/>
-                </a:solidFill>
-              </a:rPr>
-              <a:t>M1  </a:t>
-            </a:r>
-            <a:pPr indent="0" marL="0">
-              <a:buNone/>
-            </a:pPr>
-            <a:r>
-              <a:rPr lang="en-US" sz="1400" b="1" dirty="0">
-                <a:solidFill>
-                  <a:srgbClr val="FFFFFF"/>
-                </a:solidFill>
-              </a:rPr>
-              <a:t>Ekta Sharma</a:t>
-            </a:r>
-            <a:endParaRPr lang="en-US" sz="1400" dirty="0"/>
+            <a:pPr algn="ctr" indent="0" marL="0">
+              <a:buNone/>
+            </a:pPr>
+            <a:r>
+              <a:rPr lang="en-US" sz="1200" b="1" dirty="0">
+                <a:solidFill>
+                  <a:srgbClr val="4F46E5"/>
+                </a:solidFill>
+              </a:rPr>
+              <a:t>M4  </a:t>
+            </a:r>
+            <a:pPr algn="ctr" indent="0" marL="0">
+              <a:buNone/>
+            </a:pPr>
+            <a:r>
+              <a:rPr lang="en-US" sz="1200" dirty="0">
+                <a:solidFill>
+                  <a:srgbClr val="312E81"/>
+                </a:solidFill>
+              </a:rPr>
+              <a:t>[Member 4]</a:t>
+            </a:r>
+            <a:endParaRPr lang="en-US" sz="1200" dirty="0"/>
           </a:p>
         </p:txBody>
       </p:sp>
       <p:sp>
         <p:nvSpPr>
-          <p:cNvPr id="5" name="Text 3"/>
+          <p:cNvPr id="5" name="Shape 3"/>
+          <p:cNvSpPr/>
+          <p:nvPr/>
+        </p:nvSpPr>
+        <p:spPr>
+          <a:xfrm>
+            <a:off x="548640" y="1371600"/>
+            <a:ext cx="5943600" cy="2880360"/>
+          </a:xfrm>
+          <a:prstGeom prst="roundRect">
+            <a:avLst>
+              <a:gd name="adj" fmla="val 2540"/>
+            </a:avLst>
+          </a:prstGeom>
+          <a:solidFill>
+            <a:srgbClr val="0F172A"/>
+          </a:solidFill>
+          <a:ln w="12700">
+            <a:solidFill>
+              <a:srgbClr val="0F172A"/>
+            </a:solidFill>
+            <a:prstDash val="solid"/>
+          </a:ln>
+        </p:spPr>
+      </p:sp>
+      <p:sp>
+        <p:nvSpPr>
+          <p:cNvPr id="6" name="Text 4"/>
           <p:cNvSpPr txBox="1"/>
           <p:nvPr/>
         </p:nvSpPr>
         <p:spPr>
           <a:xfrm>
-            <a:off x="822960" y="2057400"/>
-            <a:ext cx="2286000" cy="2377440"/>
+            <a:off x="731520" y="1508760"/>
+            <a:ext cx="5577840" cy="2606040"/>
           </a:xfrm>
           <a:prstGeom prst="rect">
             <a:avLst/>
@@ -11124,39 +12073,282 @@
               <a:buNone/>
             </a:pPr>
             <a:r>
-              <a:rPr lang="en-US" sz="1400" dirty="0">
-                <a:solidFill>
-                  <a:srgbClr val="CBD5E1"/>
-                </a:solidFill>
-              </a:rPr>
-              <a:t>Modelling decides everything downstream: treating the application as an aggregation is what made interview and offer integrity enforceable.</a:t>
-            </a:r>
-            <a:endParaRPr lang="en-US" sz="1400" dirty="0"/>
+              <a:rPr lang="en-US" sz="1100" dirty="0">
+                <a:solidFill>
+                  <a:srgbClr val="E2E8F0"/>
+                </a:solidFill>
+                <a:latin typeface="Courier New" pitchFamily="34" charset="0"/>
+                <a:ea typeface="Courier New" pitchFamily="34" charset="-122"/>
+                <a:cs typeface="Courier New" pitchFamily="34" charset="-120"/>
+              </a:rPr>
+              <a:t>-- S2: who needs help now?</a:t>
+            </a:r>
+            <a:endParaRPr lang="en-US" sz="1100" dirty="0"/>
+          </a:p>
+          <a:p>
+            <a:pPr indent="0" marL="0">
+              <a:buNone/>
+            </a:pPr>
+            <a:r>
+              <a:rPr lang="en-US" sz="1100" dirty="0">
+                <a:solidFill>
+                  <a:srgbClr val="E2E8F0"/>
+                </a:solidFill>
+                <a:latin typeface="Courier New" pitchFamily="34" charset="0"/>
+                <a:ea typeface="Courier New" pitchFamily="34" charset="-122"/>
+                <a:cs typeface="Courier New" pitchFamily="34" charset="-120"/>
+              </a:rPr>
+              <a:t>SELECT sg.segment_name, f.roll_no, ...,</a:t>
+            </a:r>
+            <a:endParaRPr lang="en-US" sz="1100" dirty="0"/>
+          </a:p>
+          <a:p>
+            <a:pPr indent="0" marL="0">
+              <a:buNone/>
+            </a:pPr>
+            <a:r>
+              <a:rPr lang="en-US" sz="1100" dirty="0">
+                <a:solidFill>
+                  <a:srgbClr val="E2E8F0"/>
+                </a:solidFill>
+                <a:latin typeface="Courier New" pitchFamily="34" charset="0"/>
+                <a:ea typeface="Courier New" pitchFamily="34" charset="-122"/>
+                <a:cs typeface="Courier New" pitchFamily="34" charset="-120"/>
+              </a:rPr>
+              <a:t>  CASE WHEN f.applications &lt; 3   THEN 'Apply to more roles'</a:t>
+            </a:r>
+            <a:endParaRPr lang="en-US" sz="1100" dirty="0"/>
+          </a:p>
+          <a:p>
+            <a:pPr indent="0" marL="0">
+              <a:buNone/>
+            </a:pPr>
+            <a:r>
+              <a:rPr lang="en-US" sz="1100" dirty="0">
+                <a:solidFill>
+                  <a:srgbClr val="E2E8F0"/>
+                </a:solidFill>
+                <a:latin typeface="Courier New" pitchFamily="34" charset="0"/>
+                <a:ea typeface="Courier New" pitchFamily="34" charset="-122"/>
+                <a:cs typeface="Courier New" pitchFamily="34" charset="-120"/>
+              </a:rPr>
+              <a:t>       WHEN f.interview_rate &lt; 0.4 THEN 'CV review' ... END</a:t>
+            </a:r>
+            <a:endParaRPr lang="en-US" sz="1100" dirty="0"/>
+          </a:p>
+          <a:p>
+            <a:pPr indent="0" marL="0">
+              <a:buNone/>
+            </a:pPr>
+            <a:r>
+              <a:rPr lang="en-US" sz="1100" dirty="0">
+                <a:solidFill>
+                  <a:srgbClr val="E2E8F0"/>
+                </a:solidFill>
+                <a:latin typeface="Courier New" pitchFamily="34" charset="0"/>
+                <a:ea typeface="Courier New" pitchFamily="34" charset="-122"/>
+                <a:cs typeface="Courier New" pitchFamily="34" charset="-120"/>
+              </a:rPr>
+              <a:t>FROM student_segment g</a:t>
+            </a:r>
+            <a:endParaRPr lang="en-US" sz="1100" dirty="0"/>
+          </a:p>
+          <a:p>
+            <a:pPr indent="0" marL="0">
+              <a:buNone/>
+            </a:pPr>
+            <a:r>
+              <a:rPr lang="en-US" sz="1100" dirty="0">
+                <a:solidFill>
+                  <a:srgbClr val="E2E8F0"/>
+                </a:solidFill>
+                <a:latin typeface="Courier New" pitchFamily="34" charset="0"/>
+                <a:ea typeface="Courier New" pitchFamily="34" charset="-122"/>
+                <a:cs typeface="Courier New" pitchFamily="34" charset="-120"/>
+              </a:rPr>
+              <a:t>JOIN segment sg USING (segment)</a:t>
+            </a:r>
+            <a:endParaRPr lang="en-US" sz="1100" dirty="0"/>
+          </a:p>
+          <a:p>
+            <a:pPr indent="0" marL="0">
+              <a:buNone/>
+            </a:pPr>
+            <a:r>
+              <a:rPr lang="en-US" sz="1100" dirty="0">
+                <a:solidFill>
+                  <a:srgbClr val="E2E8F0"/>
+                </a:solidFill>
+                <a:latin typeface="Courier New" pitchFamily="34" charset="0"/>
+                <a:ea typeface="Courier New" pitchFamily="34" charset="-122"/>
+                <a:cs typeface="Courier New" pitchFamily="34" charset="-120"/>
+              </a:rPr>
+              <a:t>JOIN v_student_features f USING (student_id)</a:t>
+            </a:r>
+            <a:endParaRPr lang="en-US" sz="1100" dirty="0"/>
+          </a:p>
+          <a:p>
+            <a:pPr indent="0" marL="0">
+              <a:buNone/>
+            </a:pPr>
+            <a:r>
+              <a:rPr lang="en-US" sz="1100" dirty="0">
+                <a:solidFill>
+                  <a:srgbClr val="E2E8F0"/>
+                </a:solidFill>
+                <a:latin typeface="Courier New" pitchFamily="34" charset="0"/>
+                <a:ea typeface="Courier New" pitchFamily="34" charset="-122"/>
+                <a:cs typeface="Courier New" pitchFamily="34" charset="-120"/>
+              </a:rPr>
+              <a:t>WHERE NOT f.accepted_offer</a:t>
+            </a:r>
+            <a:endParaRPr lang="en-US" sz="1100" dirty="0"/>
+          </a:p>
+          <a:p>
+            <a:pPr indent="0" marL="0">
+              <a:buNone/>
+            </a:pPr>
+            <a:r>
+              <a:rPr lang="en-US" sz="1100" dirty="0">
+                <a:solidFill>
+                  <a:srgbClr val="E2E8F0"/>
+                </a:solidFill>
+                <a:latin typeface="Courier New" pitchFamily="34" charset="0"/>
+                <a:ea typeface="Courier New" pitchFamily="34" charset="-122"/>
+                <a:cs typeface="Courier New" pitchFamily="34" charset="-120"/>
+              </a:rPr>
+              <a:t>  AND g.segment IN (</a:t>
+            </a:r>
+            <a:endParaRPr lang="en-US" sz="1100" dirty="0"/>
+          </a:p>
+          <a:p>
+            <a:pPr indent="0" marL="0">
+              <a:buNone/>
+            </a:pPr>
+            <a:r>
+              <a:rPr lang="en-US" sz="1100" dirty="0">
+                <a:solidFill>
+                  <a:srgbClr val="E2E8F0"/>
+                </a:solidFill>
+                <a:latin typeface="Courier New" pitchFamily="34" charset="0"/>
+                <a:ea typeface="Courier New" pitchFamily="34" charset="-122"/>
+                <a:cs typeface="Courier New" pitchFamily="34" charset="-120"/>
+              </a:rPr>
+              <a:t>    SELECT segment FROM v_segment_profile</a:t>
+            </a:r>
+            <a:endParaRPr lang="en-US" sz="1100" dirty="0"/>
+          </a:p>
+          <a:p>
+            <a:pPr indent="0" marL="0">
+              <a:buNone/>
+            </a:pPr>
+            <a:r>
+              <a:rPr lang="en-US" sz="1100" dirty="0">
+                <a:solidFill>
+                  <a:srgbClr val="E2E8F0"/>
+                </a:solidFill>
+                <a:latin typeface="Courier New" pitchFamily="34" charset="0"/>
+                <a:ea typeface="Courier New" pitchFamily="34" charset="-122"/>
+                <a:cs typeface="Courier New" pitchFamily="34" charset="-120"/>
+              </a:rPr>
+              <a:t>    WHERE accepted_pct &lt;</a:t>
+            </a:r>
+            <a:endParaRPr lang="en-US" sz="1100" dirty="0"/>
+          </a:p>
+          <a:p>
+            <a:pPr indent="0" marL="0">
+              <a:buNone/>
+            </a:pPr>
+            <a:r>
+              <a:rPr lang="en-US" sz="1100" dirty="0">
+                <a:solidFill>
+                  <a:srgbClr val="E2E8F0"/>
+                </a:solidFill>
+                <a:latin typeface="Courier New" pitchFamily="34" charset="0"/>
+                <a:ea typeface="Courier New" pitchFamily="34" charset="-122"/>
+                <a:cs typeface="Courier New" pitchFamily="34" charset="-120"/>
+              </a:rPr>
+              <a:t>      (SELECT 100.0 * avg(accepted_offer::int)</a:t>
+            </a:r>
+            <a:endParaRPr lang="en-US" sz="1100" dirty="0"/>
+          </a:p>
+          <a:p>
+            <a:pPr indent="0" marL="0">
+              <a:buNone/>
+            </a:pPr>
+            <a:r>
+              <a:rPr lang="en-US" sz="1100" dirty="0">
+                <a:solidFill>
+                  <a:srgbClr val="E2E8F0"/>
+                </a:solidFill>
+                <a:latin typeface="Courier New" pitchFamily="34" charset="0"/>
+                <a:ea typeface="Courier New" pitchFamily="34" charset="-122"/>
+                <a:cs typeface="Courier New" pitchFamily="34" charset="-120"/>
+              </a:rPr>
+              <a:t>       FROM v_student_features));</a:t>
+            </a:r>
+            <a:endParaRPr lang="en-US" sz="1100" dirty="0"/>
           </a:p>
         </p:txBody>
       </p:sp>
       <p:sp>
         <p:nvSpPr>
-          <p:cNvPr id="6" name="Shape 4"/>
+          <p:cNvPr id="7" name="Text 5"/>
+          <p:cNvSpPr txBox="1"/>
+          <p:nvPr/>
+        </p:nvSpPr>
+        <p:spPr>
+          <a:xfrm>
+            <a:off x="548640" y="4343400"/>
+            <a:ext cx="5943600" cy="502920"/>
+          </a:xfrm>
+          <a:prstGeom prst="rect">
+            <a:avLst/>
+          </a:prstGeom>
+          <a:noFill/>
+          <a:ln/>
+        </p:spPr>
+        <p:txBody>
+          <a:bodyPr wrap="square" lIns="0" tIns="0" rIns="0" bIns="0" rtlCol="0" anchor="t"/>
+          <a:lstStyle/>
+          <a:p>
+            <a:pPr indent="0" marL="0">
+              <a:buNone/>
+            </a:pPr>
+            <a:r>
+              <a:rPr lang="en-US" sz="1200" b="1" dirty="0">
+                <a:solidFill>
+                  <a:srgbClr val="4F46E5"/>
+                </a:solidFill>
+              </a:rPr>
+              <a:t>Weak = π segment (σ accepted_pct &lt; campus avg (SegmentProfile));  result = σ ¬accepted (StudentSegment ⋉ Weak ⋈ Features)</a:t>
+            </a:r>
+            <a:endParaRPr lang="en-US" sz="1200" dirty="0"/>
+          </a:p>
+        </p:txBody>
+      </p:sp>
+      <p:sp>
+        <p:nvSpPr>
+          <p:cNvPr id="8" name="Shape 6"/>
           <p:cNvSpPr/>
           <p:nvPr/>
         </p:nvSpPr>
         <p:spPr>
           <a:xfrm>
-            <a:off x="3401568" y="1417320"/>
-            <a:ext cx="2606040" cy="3108960"/>
+            <a:off x="548640" y="4937760"/>
+            <a:ext cx="5943600" cy="1051560"/>
           </a:xfrm>
           <a:prstGeom prst="roundRect">
             <a:avLst>
-              <a:gd name="adj" fmla="val 3509"/>
+              <a:gd name="adj" fmla="val 8696"/>
             </a:avLst>
           </a:prstGeom>
           <a:solidFill>
-            <a:srgbClr val="1F2937"/>
+            <a:srgbClr val="F6F7FB"/>
           </a:solidFill>
           <a:ln w="12700">
             <a:solidFill>
-              <a:srgbClr val="374151"/>
+              <a:srgbClr val="E5E7EB"/>
             </a:solidFill>
             <a:prstDash val="solid"/>
           </a:ln>
@@ -11164,14 +12356,76 @@
       </p:sp>
       <p:sp>
         <p:nvSpPr>
-          <p:cNvPr id="7" name="Text 5"/>
+          <p:cNvPr id="9" name="Text 7"/>
           <p:cNvSpPr txBox="1"/>
           <p:nvPr/>
         </p:nvSpPr>
         <p:spPr>
           <a:xfrm>
-            <a:off x="3584448" y="1572768"/>
-            <a:ext cx="2286000" cy="365760"/>
+            <a:off x="713232" y="5047488"/>
+            <a:ext cx="5614416" cy="832104"/>
+          </a:xfrm>
+          <a:prstGeom prst="rect">
+            <a:avLst/>
+          </a:prstGeom>
+          <a:noFill/>
+          <a:ln/>
+        </p:spPr>
+        <p:txBody>
+          <a:bodyPr wrap="square" lIns="0" tIns="0" rIns="0" bIns="0" rtlCol="0" anchor="t"/>
+          <a:lstStyle/>
+          <a:p>
+            <a:pPr indent="0" marL="0">
+              <a:spcAft>
+                <a:spcPts val="400"/>
+              </a:spcAft>
+              <a:buNone/>
+            </a:pPr>
+            <a:r>
+              <a:rPr lang="en-US" sz="1350" b="1" dirty="0">
+                <a:solidFill>
+                  <a:srgbClr val="1F2937"/>
+                </a:solidFill>
+                <a:latin typeface="Calibri" pitchFamily="34" charset="0"/>
+                <a:ea typeface="Calibri" pitchFamily="34" charset="-122"/>
+                <a:cs typeface="Calibri" pitchFamily="34" charset="-120"/>
+              </a:rPr>
+              <a:t>Stored like any other data</a:t>
+            </a:r>
+            <a:endParaRPr lang="en-US" sz="1350" dirty="0"/>
+          </a:p>
+          <a:p>
+            <a:pPr indent="0" marL="0">
+              <a:spcAft>
+                <a:spcPts val="300"/>
+              </a:spcAft>
+              <a:buNone/>
+            </a:pPr>
+            <a:r>
+              <a:rPr lang="en-US" sz="1250" dirty="0">
+                <a:solidFill>
+                  <a:srgbClr val="374151"/>
+                </a:solidFill>
+                <a:latin typeface="Calibri" pitchFamily="34" charset="0"/>
+                <a:ea typeface="Calibri" pitchFamily="34" charset="-122"/>
+                <a:cs typeface="Calibri" pitchFamily="34" charset="-120"/>
+              </a:rPr>
+              <a:t>Labels go into SEGMENT and STUDENT_SEGMENT (BCNF, foreign keys) in ONE transaction: every student is relabelled, or none is.</a:t>
+            </a:r>
+            <a:endParaRPr lang="en-US" sz="1350" dirty="0"/>
+          </a:p>
+        </p:txBody>
+      </p:sp>
+      <p:sp>
+        <p:nvSpPr>
+          <p:cNvPr id="10" name="Text 8"/>
+          <p:cNvSpPr txBox="1"/>
+          <p:nvPr/>
+        </p:nvSpPr>
+        <p:spPr>
+          <a:xfrm>
+            <a:off x="6858000" y="1280160"/>
+            <a:ext cx="1463040" cy="731520"/>
           </a:xfrm>
           <a:prstGeom prst="rect">
             <a:avLst/>
@@ -11187,38 +12441,1539 @@
               <a:buNone/>
             </a:pPr>
             <a:r>
-              <a:rPr lang="en-US" sz="1400" b="1" dirty="0">
-                <a:solidFill>
-                  <a:srgbClr val="A5B4FC"/>
-                </a:solidFill>
-              </a:rPr>
-              <a:t>M2  </a:t>
-            </a:r>
-            <a:pPr indent="0" marL="0">
-              <a:buNone/>
-            </a:pPr>
-            <a:r>
-              <a:rPr lang="en-US" sz="1400" b="1" dirty="0">
-                <a:solidFill>
-                  <a:srgbClr val="FFFFFF"/>
-                </a:solidFill>
-              </a:rPr>
-              <a:t>[Member 2]</a:t>
-            </a:r>
-            <a:endParaRPr lang="en-US" sz="1400" dirty="0"/>
+              <a:rPr lang="en-US" sz="4400" b="1" dirty="0">
+                <a:solidFill>
+                  <a:srgbClr val="C2410C"/>
+                </a:solidFill>
+                <a:latin typeface="Cambria" pitchFamily="34" charset="0"/>
+                <a:ea typeface="Cambria" pitchFamily="34" charset="-122"/>
+                <a:cs typeface="Cambria" pitchFamily="34" charset="-120"/>
+              </a:rPr>
+              <a:t>52</a:t>
+            </a:r>
+            <a:endParaRPr lang="en-US" sz="4400" dirty="0"/>
           </a:p>
         </p:txBody>
       </p:sp>
       <p:sp>
         <p:nvSpPr>
-          <p:cNvPr id="8" name="Text 6"/>
+          <p:cNvPr id="11" name="Text 9"/>
           <p:cNvSpPr txBox="1"/>
           <p:nvPr/>
         </p:nvSpPr>
         <p:spPr>
           <a:xfrm>
-            <a:off x="3584448" y="2057400"/>
-            <a:ext cx="2286000" cy="2377440"/>
+            <a:off x="8275320" y="1417320"/>
+            <a:ext cx="3383280" cy="548640"/>
+          </a:xfrm>
+          <a:prstGeom prst="rect">
+            <a:avLst/>
+          </a:prstGeom>
+          <a:noFill/>
+          <a:ln/>
+        </p:spPr>
+        <p:txBody>
+          <a:bodyPr wrap="square" lIns="0" tIns="0" rIns="0" bIns="0" rtlCol="0" anchor="ctr"/>
+          <a:lstStyle/>
+          <a:p>
+            <a:pPr indent="0" marL="0">
+              <a:buNone/>
+            </a:pPr>
+            <a:r>
+              <a:rPr lang="en-US" sz="1350" dirty="0">
+                <a:solidFill>
+                  <a:srgbClr val="6B7280"/>
+                </a:solidFill>
+              </a:rPr>
+              <a:t>students flagged, each with one action</a:t>
+            </a:r>
+            <a:endParaRPr lang="en-US" sz="1350" dirty="0"/>
+          </a:p>
+        </p:txBody>
+      </p:sp>
+      <p:graphicFrame>
+        <p:nvGraphicFramePr>
+          <p:cNvPr id="19" name="Table 0"/>
+          <p:cNvGraphicFramePr>
+            <a:graphicFrameLocks noGrp="1"/>
+          </p:cNvGraphicFramePr>
+          <p:nvPr>
+            <p:extLst>
+              <p:ext uri="{D42A27DB-BD31-4B8C-83A1-F6EECF244321}">
+                <p14:modId xmlns:p14="http://schemas.microsoft.com/office/powerpoint/2010/main" val="1579011935"/>
+              </p:ext>
+            </p:extLst>
+          </p:nvPr>
+        </p:nvGraphicFramePr>
+        <p:xfrm>
+          <a:off x="6858000" y="2148840"/>
+          <a:ext cx="4800600" cy="914400"/>
+        </p:xfrm>
+        <a:graphic>
+          <a:graphicData uri="http://schemas.openxmlformats.org/drawingml/2006/table">
+            <a:tbl>
+              <a:tblPr/>
+              <a:tblGrid>
+                <a:gridCol w="1645920"/>
+                <a:gridCol w="2240280"/>
+                <a:gridCol w="914400"/>
+              </a:tblGrid>
+              <a:tr h="329184">
+                <a:tc>
+                  <a:txBody>
+                    <a:bodyPr/>
+                    <a:lstStyle/>
+                    <a:p>
+                      <a:pPr indent="0" marL="0">
+                        <a:buNone/>
+                      </a:pPr>
+                      <a:r>
+                        <a:rPr lang="en-US" sz="1200" b="1" dirty="0">
+                          <a:solidFill>
+                            <a:srgbClr val="FFFFFF"/>
+                          </a:solidFill>
+                          <a:latin typeface="Calibri" pitchFamily="34" charset="0"/>
+                          <a:ea typeface="Calibri" pitchFamily="34" charset="-122"/>
+                          <a:cs typeface="Calibri" pitchFamily="34" charset="-120"/>
+                        </a:rPr>
+                        <a:t>Segment</a:t>
+                      </a:r>
+                      <a:endParaRPr lang="en-US" sz="1200" dirty="0">
+                        <a:latin typeface="Calibri" charset="0"/>
+                        <a:ea typeface="Calibri" charset="0"/>
+                        <a:cs typeface="Calibri" charset="0"/>
+                      </a:endParaRPr>
+                    </a:p>
+                  </a:txBody>
+                  <a:tcPr marL="73152" marR="73152" marT="36576" marB="36576" anchor="ctr">
+                    <a:lnL w="9525" cap="flat" cmpd="sng" algn="ctr">
+                      <a:solidFill>
+                        <a:srgbClr val="E5E7EB"/>
+                      </a:solidFill>
+                      <a:prstDash val="solid"/>
+                      <a:round/>
+                      <a:headEnd type="none" w="med" len="med"/>
+                      <a:tailEnd type="none" w="med" len="med"/>
+                    </a:lnL>
+                    <a:lnR w="9525" cap="flat" cmpd="sng" algn="ctr">
+                      <a:solidFill>
+                        <a:srgbClr val="E5E7EB"/>
+                      </a:solidFill>
+                      <a:prstDash val="solid"/>
+                      <a:round/>
+                      <a:headEnd type="none" w="med" len="med"/>
+                      <a:tailEnd type="none" w="med" len="med"/>
+                    </a:lnR>
+                    <a:lnT w="9525" cap="flat" cmpd="sng" algn="ctr">
+                      <a:solidFill>
+                        <a:srgbClr val="E5E7EB"/>
+                      </a:solidFill>
+                      <a:prstDash val="solid"/>
+                      <a:round/>
+                      <a:headEnd type="none" w="med" len="med"/>
+                      <a:tailEnd type="none" w="med" len="med"/>
+                    </a:lnT>
+                    <a:lnB w="9525" cap="flat" cmpd="sng" algn="ctr">
+                      <a:solidFill>
+                        <a:srgbClr val="E5E7EB"/>
+                      </a:solidFill>
+                      <a:prstDash val="solid"/>
+                      <a:round/>
+                      <a:headEnd type="none" w="med" len="med"/>
+                      <a:tailEnd type="none" w="med" len="med"/>
+                    </a:lnB>
+                    <a:solidFill>
+                      <a:srgbClr val="4F46E5"/>
+                    </a:solidFill>
+                  </a:tcPr>
+                </a:tc>
+                <a:tc>
+                  <a:txBody>
+                    <a:bodyPr/>
+                    <a:lstStyle/>
+                    <a:p>
+                      <a:pPr indent="0" marL="0">
+                        <a:buNone/>
+                      </a:pPr>
+                      <a:r>
+                        <a:rPr lang="en-US" sz="1200" b="1" dirty="0">
+                          <a:solidFill>
+                            <a:srgbClr val="FFFFFF"/>
+                          </a:solidFill>
+                          <a:latin typeface="Calibri" pitchFamily="34" charset="0"/>
+                          <a:ea typeface="Calibri" pitchFamily="34" charset="-122"/>
+                          <a:cs typeface="Calibri" pitchFamily="34" charset="-120"/>
+                        </a:rPr>
+                        <a:t>Suggested action</a:t>
+                      </a:r>
+                      <a:endParaRPr lang="en-US" sz="1200" dirty="0">
+                        <a:latin typeface="Calibri" charset="0"/>
+                        <a:ea typeface="Calibri" charset="0"/>
+                        <a:cs typeface="Calibri" charset="0"/>
+                      </a:endParaRPr>
+                    </a:p>
+                  </a:txBody>
+                  <a:tcPr marL="73152" marR="73152" marT="36576" marB="36576" anchor="ctr">
+                    <a:lnL w="9525" cap="flat" cmpd="sng" algn="ctr">
+                      <a:solidFill>
+                        <a:srgbClr val="E5E7EB"/>
+                      </a:solidFill>
+                      <a:prstDash val="solid"/>
+                      <a:round/>
+                      <a:headEnd type="none" w="med" len="med"/>
+                      <a:tailEnd type="none" w="med" len="med"/>
+                    </a:lnL>
+                    <a:lnR w="9525" cap="flat" cmpd="sng" algn="ctr">
+                      <a:solidFill>
+                        <a:srgbClr val="E5E7EB"/>
+                      </a:solidFill>
+                      <a:prstDash val="solid"/>
+                      <a:round/>
+                      <a:headEnd type="none" w="med" len="med"/>
+                      <a:tailEnd type="none" w="med" len="med"/>
+                    </a:lnR>
+                    <a:lnT w="9525" cap="flat" cmpd="sng" algn="ctr">
+                      <a:solidFill>
+                        <a:srgbClr val="E5E7EB"/>
+                      </a:solidFill>
+                      <a:prstDash val="solid"/>
+                      <a:round/>
+                      <a:headEnd type="none" w="med" len="med"/>
+                      <a:tailEnd type="none" w="med" len="med"/>
+                    </a:lnT>
+                    <a:lnB w="9525" cap="flat" cmpd="sng" algn="ctr">
+                      <a:solidFill>
+                        <a:srgbClr val="E5E7EB"/>
+                      </a:solidFill>
+                      <a:prstDash val="solid"/>
+                      <a:round/>
+                      <a:headEnd type="none" w="med" len="med"/>
+                      <a:tailEnd type="none" w="med" len="med"/>
+                    </a:lnB>
+                    <a:solidFill>
+                      <a:srgbClr val="4F46E5"/>
+                    </a:solidFill>
+                  </a:tcPr>
+                </a:tc>
+                <a:tc>
+                  <a:txBody>
+                    <a:bodyPr/>
+                    <a:lstStyle/>
+                    <a:p>
+                      <a:pPr indent="0" marL="0">
+                        <a:buNone/>
+                      </a:pPr>
+                      <a:r>
+                        <a:rPr lang="en-US" sz="1200" b="1" dirty="0">
+                          <a:solidFill>
+                            <a:srgbClr val="FFFFFF"/>
+                          </a:solidFill>
+                          <a:latin typeface="Calibri" pitchFamily="34" charset="0"/>
+                          <a:ea typeface="Calibri" pitchFamily="34" charset="-122"/>
+                          <a:cs typeface="Calibri" pitchFamily="34" charset="-120"/>
+                        </a:rPr>
+                        <a:t>Students</a:t>
+                      </a:r>
+                      <a:endParaRPr lang="en-US" sz="1200" dirty="0">
+                        <a:latin typeface="Calibri" charset="0"/>
+                        <a:ea typeface="Calibri" charset="0"/>
+                        <a:cs typeface="Calibri" charset="0"/>
+                      </a:endParaRPr>
+                    </a:p>
+                  </a:txBody>
+                  <a:tcPr marL="73152" marR="73152" marT="36576" marB="36576" anchor="ctr">
+                    <a:lnL w="9525" cap="flat" cmpd="sng" algn="ctr">
+                      <a:solidFill>
+                        <a:srgbClr val="E5E7EB"/>
+                      </a:solidFill>
+                      <a:prstDash val="solid"/>
+                      <a:round/>
+                      <a:headEnd type="none" w="med" len="med"/>
+                      <a:tailEnd type="none" w="med" len="med"/>
+                    </a:lnL>
+                    <a:lnR w="9525" cap="flat" cmpd="sng" algn="ctr">
+                      <a:solidFill>
+                        <a:srgbClr val="E5E7EB"/>
+                      </a:solidFill>
+                      <a:prstDash val="solid"/>
+                      <a:round/>
+                      <a:headEnd type="none" w="med" len="med"/>
+                      <a:tailEnd type="none" w="med" len="med"/>
+                    </a:lnR>
+                    <a:lnT w="9525" cap="flat" cmpd="sng" algn="ctr">
+                      <a:solidFill>
+                        <a:srgbClr val="E5E7EB"/>
+                      </a:solidFill>
+                      <a:prstDash val="solid"/>
+                      <a:round/>
+                      <a:headEnd type="none" w="med" len="med"/>
+                      <a:tailEnd type="none" w="med" len="med"/>
+                    </a:lnT>
+                    <a:lnB w="9525" cap="flat" cmpd="sng" algn="ctr">
+                      <a:solidFill>
+                        <a:srgbClr val="E5E7EB"/>
+                      </a:solidFill>
+                      <a:prstDash val="solid"/>
+                      <a:round/>
+                      <a:headEnd type="none" w="med" len="med"/>
+                      <a:tailEnd type="none" w="med" len="med"/>
+                    </a:lnB>
+                    <a:solidFill>
+                      <a:srgbClr val="4F46E5"/>
+                    </a:solidFill>
+                  </a:tcPr>
+                </a:tc>
+              </a:tr>
+              <a:tr h="329184">
+                <a:tc>
+                  <a:txBody>
+                    <a:bodyPr/>
+                    <a:lstStyle/>
+                    <a:p>
+                      <a:pPr indent="0" marL="0">
+                        <a:buNone/>
+                      </a:pPr>
+                      <a:r>
+                        <a:rPr lang="en-US" sz="1200" dirty="0">
+                          <a:solidFill>
+                            <a:srgbClr val="374151"/>
+                          </a:solidFill>
+                          <a:latin typeface="Calibri" pitchFamily="34" charset="0"/>
+                          <a:ea typeface="Calibri" pitchFamily="34" charset="-122"/>
+                          <a:cs typeface="Calibri" pitchFamily="34" charset="-120"/>
+                        </a:rPr>
+                        <a:t>At-Risk</a:t>
+                      </a:r>
+                      <a:endParaRPr lang="en-US" sz="1200" dirty="0">
+                        <a:latin typeface="Calibri" charset="0"/>
+                        <a:ea typeface="Calibri" charset="0"/>
+                        <a:cs typeface="Calibri" charset="0"/>
+                      </a:endParaRPr>
+                    </a:p>
+                  </a:txBody>
+                  <a:tcPr marL="73152" marR="73152" marT="36576" marB="36576" anchor="ctr">
+                    <a:lnL w="9525" cap="flat" cmpd="sng" algn="ctr">
+                      <a:solidFill>
+                        <a:srgbClr val="E5E7EB"/>
+                      </a:solidFill>
+                      <a:prstDash val="solid"/>
+                      <a:round/>
+                      <a:headEnd type="none" w="med" len="med"/>
+                      <a:tailEnd type="none" w="med" len="med"/>
+                    </a:lnL>
+                    <a:lnR w="9525" cap="flat" cmpd="sng" algn="ctr">
+                      <a:solidFill>
+                        <a:srgbClr val="E5E7EB"/>
+                      </a:solidFill>
+                      <a:prstDash val="solid"/>
+                      <a:round/>
+                      <a:headEnd type="none" w="med" len="med"/>
+                      <a:tailEnd type="none" w="med" len="med"/>
+                    </a:lnR>
+                    <a:lnT w="9525" cap="flat" cmpd="sng" algn="ctr">
+                      <a:solidFill>
+                        <a:srgbClr val="E5E7EB"/>
+                      </a:solidFill>
+                      <a:prstDash val="solid"/>
+                      <a:round/>
+                      <a:headEnd type="none" w="med" len="med"/>
+                      <a:tailEnd type="none" w="med" len="med"/>
+                    </a:lnT>
+                    <a:lnB w="9525" cap="flat" cmpd="sng" algn="ctr">
+                      <a:solidFill>
+                        <a:srgbClr val="E5E7EB"/>
+                      </a:solidFill>
+                      <a:prstDash val="solid"/>
+                      <a:round/>
+                      <a:headEnd type="none" w="med" len="med"/>
+                      <a:tailEnd type="none" w="med" len="med"/>
+                    </a:lnB>
+                    <a:solidFill>
+                      <a:srgbClr val="FFFFFF"/>
+                    </a:solidFill>
+                  </a:tcPr>
+                </a:tc>
+                <a:tc>
+                  <a:txBody>
+                    <a:bodyPr/>
+                    <a:lstStyle/>
+                    <a:p>
+                      <a:pPr indent="0" marL="0">
+                        <a:buNone/>
+                      </a:pPr>
+                      <a:r>
+                        <a:rPr lang="en-US" sz="1200" dirty="0">
+                          <a:solidFill>
+                            <a:srgbClr val="374151"/>
+                          </a:solidFill>
+                          <a:latin typeface="Calibri" pitchFamily="34" charset="0"/>
+                          <a:ea typeface="Calibri" pitchFamily="34" charset="-122"/>
+                          <a:cs typeface="Calibri" pitchFamily="34" charset="-120"/>
+                        </a:rPr>
+                        <a:t>Apply to more roles</a:t>
+                      </a:r>
+                      <a:endParaRPr lang="en-US" sz="1200" dirty="0">
+                        <a:latin typeface="Calibri" charset="0"/>
+                        <a:ea typeface="Calibri" charset="0"/>
+                        <a:cs typeface="Calibri" charset="0"/>
+                      </a:endParaRPr>
+                    </a:p>
+                  </a:txBody>
+                  <a:tcPr marL="73152" marR="73152" marT="36576" marB="36576" anchor="ctr">
+                    <a:lnL w="9525" cap="flat" cmpd="sng" algn="ctr">
+                      <a:solidFill>
+                        <a:srgbClr val="E5E7EB"/>
+                      </a:solidFill>
+                      <a:prstDash val="solid"/>
+                      <a:round/>
+                      <a:headEnd type="none" w="med" len="med"/>
+                      <a:tailEnd type="none" w="med" len="med"/>
+                    </a:lnL>
+                    <a:lnR w="9525" cap="flat" cmpd="sng" algn="ctr">
+                      <a:solidFill>
+                        <a:srgbClr val="E5E7EB"/>
+                      </a:solidFill>
+                      <a:prstDash val="solid"/>
+                      <a:round/>
+                      <a:headEnd type="none" w="med" len="med"/>
+                      <a:tailEnd type="none" w="med" len="med"/>
+                    </a:lnR>
+                    <a:lnT w="9525" cap="flat" cmpd="sng" algn="ctr">
+                      <a:solidFill>
+                        <a:srgbClr val="E5E7EB"/>
+                      </a:solidFill>
+                      <a:prstDash val="solid"/>
+                      <a:round/>
+                      <a:headEnd type="none" w="med" len="med"/>
+                      <a:tailEnd type="none" w="med" len="med"/>
+                    </a:lnT>
+                    <a:lnB w="9525" cap="flat" cmpd="sng" algn="ctr">
+                      <a:solidFill>
+                        <a:srgbClr val="E5E7EB"/>
+                      </a:solidFill>
+                      <a:prstDash val="solid"/>
+                      <a:round/>
+                      <a:headEnd type="none" w="med" len="med"/>
+                      <a:tailEnd type="none" w="med" len="med"/>
+                    </a:lnB>
+                    <a:solidFill>
+                      <a:srgbClr val="FFFFFF"/>
+                    </a:solidFill>
+                  </a:tcPr>
+                </a:tc>
+                <a:tc>
+                  <a:txBody>
+                    <a:bodyPr/>
+                    <a:lstStyle/>
+                    <a:p>
+                      <a:pPr indent="0" marL="0">
+                        <a:buNone/>
+                      </a:pPr>
+                      <a:r>
+                        <a:rPr lang="en-US" sz="1200" dirty="0">
+                          <a:solidFill>
+                            <a:srgbClr val="374151"/>
+                          </a:solidFill>
+                          <a:latin typeface="Calibri" pitchFamily="34" charset="0"/>
+                          <a:ea typeface="Calibri" pitchFamily="34" charset="-122"/>
+                          <a:cs typeface="Calibri" pitchFamily="34" charset="-120"/>
+                        </a:rPr>
+                        <a:t>19</a:t>
+                      </a:r>
+                      <a:endParaRPr lang="en-US" sz="1200" dirty="0">
+                        <a:latin typeface="Calibri" charset="0"/>
+                        <a:ea typeface="Calibri" charset="0"/>
+                        <a:cs typeface="Calibri" charset="0"/>
+                      </a:endParaRPr>
+                    </a:p>
+                  </a:txBody>
+                  <a:tcPr marL="73152" marR="73152" marT="36576" marB="36576" anchor="ctr">
+                    <a:lnL w="9525" cap="flat" cmpd="sng" algn="ctr">
+                      <a:solidFill>
+                        <a:srgbClr val="E5E7EB"/>
+                      </a:solidFill>
+                      <a:prstDash val="solid"/>
+                      <a:round/>
+                      <a:headEnd type="none" w="med" len="med"/>
+                      <a:tailEnd type="none" w="med" len="med"/>
+                    </a:lnL>
+                    <a:lnR w="9525" cap="flat" cmpd="sng" algn="ctr">
+                      <a:solidFill>
+                        <a:srgbClr val="E5E7EB"/>
+                      </a:solidFill>
+                      <a:prstDash val="solid"/>
+                      <a:round/>
+                      <a:headEnd type="none" w="med" len="med"/>
+                      <a:tailEnd type="none" w="med" len="med"/>
+                    </a:lnR>
+                    <a:lnT w="9525" cap="flat" cmpd="sng" algn="ctr">
+                      <a:solidFill>
+                        <a:srgbClr val="E5E7EB"/>
+                      </a:solidFill>
+                      <a:prstDash val="solid"/>
+                      <a:round/>
+                      <a:headEnd type="none" w="med" len="med"/>
+                      <a:tailEnd type="none" w="med" len="med"/>
+                    </a:lnT>
+                    <a:lnB w="9525" cap="flat" cmpd="sng" algn="ctr">
+                      <a:solidFill>
+                        <a:srgbClr val="E5E7EB"/>
+                      </a:solidFill>
+                      <a:prstDash val="solid"/>
+                      <a:round/>
+                      <a:headEnd type="none" w="med" len="med"/>
+                      <a:tailEnd type="none" w="med" len="med"/>
+                    </a:lnB>
+                    <a:solidFill>
+                      <a:srgbClr val="FFFFFF"/>
+                    </a:solidFill>
+                  </a:tcPr>
+                </a:tc>
+              </a:tr>
+              <a:tr h="329184">
+                <a:tc>
+                  <a:txBody>
+                    <a:bodyPr/>
+                    <a:lstStyle/>
+                    <a:p>
+                      <a:pPr indent="0" marL="0">
+                        <a:buNone/>
+                      </a:pPr>
+                      <a:r>
+                        <a:rPr lang="en-US" sz="1200" dirty="0">
+                          <a:solidFill>
+                            <a:srgbClr val="374151"/>
+                          </a:solidFill>
+                          <a:latin typeface="Calibri" pitchFamily="34" charset="0"/>
+                          <a:ea typeface="Calibri" pitchFamily="34" charset="-122"/>
+                          <a:cs typeface="Calibri" pitchFamily="34" charset="-120"/>
+                        </a:rPr>
+                        <a:t>At-Risk</a:t>
+                      </a:r>
+                      <a:endParaRPr lang="en-US" sz="1200" dirty="0">
+                        <a:latin typeface="Calibri" charset="0"/>
+                        <a:ea typeface="Calibri" charset="0"/>
+                        <a:cs typeface="Calibri" charset="0"/>
+                      </a:endParaRPr>
+                    </a:p>
+                  </a:txBody>
+                  <a:tcPr marL="73152" marR="73152" marT="36576" marB="36576" anchor="ctr">
+                    <a:lnL w="9525" cap="flat" cmpd="sng" algn="ctr">
+                      <a:solidFill>
+                        <a:srgbClr val="E5E7EB"/>
+                      </a:solidFill>
+                      <a:prstDash val="solid"/>
+                      <a:round/>
+                      <a:headEnd type="none" w="med" len="med"/>
+                      <a:tailEnd type="none" w="med" len="med"/>
+                    </a:lnL>
+                    <a:lnR w="9525" cap="flat" cmpd="sng" algn="ctr">
+                      <a:solidFill>
+                        <a:srgbClr val="E5E7EB"/>
+                      </a:solidFill>
+                      <a:prstDash val="solid"/>
+                      <a:round/>
+                      <a:headEnd type="none" w="med" len="med"/>
+                      <a:tailEnd type="none" w="med" len="med"/>
+                    </a:lnR>
+                    <a:lnT w="9525" cap="flat" cmpd="sng" algn="ctr">
+                      <a:solidFill>
+                        <a:srgbClr val="E5E7EB"/>
+                      </a:solidFill>
+                      <a:prstDash val="solid"/>
+                      <a:round/>
+                      <a:headEnd type="none" w="med" len="med"/>
+                      <a:tailEnd type="none" w="med" len="med"/>
+                    </a:lnT>
+                    <a:lnB w="9525" cap="flat" cmpd="sng" algn="ctr">
+                      <a:solidFill>
+                        <a:srgbClr val="E5E7EB"/>
+                      </a:solidFill>
+                      <a:prstDash val="solid"/>
+                      <a:round/>
+                      <a:headEnd type="none" w="med" len="med"/>
+                      <a:tailEnd type="none" w="med" len="med"/>
+                    </a:lnB>
+                    <a:solidFill>
+                      <a:srgbClr val="F6F7FB"/>
+                    </a:solidFill>
+                  </a:tcPr>
+                </a:tc>
+                <a:tc>
+                  <a:txBody>
+                    <a:bodyPr/>
+                    <a:lstStyle/>
+                    <a:p>
+                      <a:pPr indent="0" marL="0">
+                        <a:buNone/>
+                      </a:pPr>
+                      <a:r>
+                        <a:rPr lang="en-US" sz="1200" dirty="0">
+                          <a:solidFill>
+                            <a:srgbClr val="374151"/>
+                          </a:solidFill>
+                          <a:latin typeface="Calibri" pitchFamily="34" charset="0"/>
+                          <a:ea typeface="Calibri" pitchFamily="34" charset="-122"/>
+                          <a:cs typeface="Calibri" pitchFamily="34" charset="-120"/>
+                        </a:rPr>
+                        <a:t>CV review</a:t>
+                      </a:r>
+                      <a:endParaRPr lang="en-US" sz="1200" dirty="0">
+                        <a:latin typeface="Calibri" charset="0"/>
+                        <a:ea typeface="Calibri" charset="0"/>
+                        <a:cs typeface="Calibri" charset="0"/>
+                      </a:endParaRPr>
+                    </a:p>
+                  </a:txBody>
+                  <a:tcPr marL="73152" marR="73152" marT="36576" marB="36576" anchor="ctr">
+                    <a:lnL w="9525" cap="flat" cmpd="sng" algn="ctr">
+                      <a:solidFill>
+                        <a:srgbClr val="E5E7EB"/>
+                      </a:solidFill>
+                      <a:prstDash val="solid"/>
+                      <a:round/>
+                      <a:headEnd type="none" w="med" len="med"/>
+                      <a:tailEnd type="none" w="med" len="med"/>
+                    </a:lnL>
+                    <a:lnR w="9525" cap="flat" cmpd="sng" algn="ctr">
+                      <a:solidFill>
+                        <a:srgbClr val="E5E7EB"/>
+                      </a:solidFill>
+                      <a:prstDash val="solid"/>
+                      <a:round/>
+                      <a:headEnd type="none" w="med" len="med"/>
+                      <a:tailEnd type="none" w="med" len="med"/>
+                    </a:lnR>
+                    <a:lnT w="9525" cap="flat" cmpd="sng" algn="ctr">
+                      <a:solidFill>
+                        <a:srgbClr val="E5E7EB"/>
+                      </a:solidFill>
+                      <a:prstDash val="solid"/>
+                      <a:round/>
+                      <a:headEnd type="none" w="med" len="med"/>
+                      <a:tailEnd type="none" w="med" len="med"/>
+                    </a:lnT>
+                    <a:lnB w="9525" cap="flat" cmpd="sng" algn="ctr">
+                      <a:solidFill>
+                        <a:srgbClr val="E5E7EB"/>
+                      </a:solidFill>
+                      <a:prstDash val="solid"/>
+                      <a:round/>
+                      <a:headEnd type="none" w="med" len="med"/>
+                      <a:tailEnd type="none" w="med" len="med"/>
+                    </a:lnB>
+                    <a:solidFill>
+                      <a:srgbClr val="F6F7FB"/>
+                    </a:solidFill>
+                  </a:tcPr>
+                </a:tc>
+                <a:tc>
+                  <a:txBody>
+                    <a:bodyPr/>
+                    <a:lstStyle/>
+                    <a:p>
+                      <a:pPr indent="0" marL="0">
+                        <a:buNone/>
+                      </a:pPr>
+                      <a:r>
+                        <a:rPr lang="en-US" sz="1200" dirty="0">
+                          <a:solidFill>
+                            <a:srgbClr val="374151"/>
+                          </a:solidFill>
+                          <a:latin typeface="Calibri" pitchFamily="34" charset="0"/>
+                          <a:ea typeface="Calibri" pitchFamily="34" charset="-122"/>
+                          <a:cs typeface="Calibri" pitchFamily="34" charset="-120"/>
+                        </a:rPr>
+                        <a:t>12</a:t>
+                      </a:r>
+                      <a:endParaRPr lang="en-US" sz="1200" dirty="0">
+                        <a:latin typeface="Calibri" charset="0"/>
+                        <a:ea typeface="Calibri" charset="0"/>
+                        <a:cs typeface="Calibri" charset="0"/>
+                      </a:endParaRPr>
+                    </a:p>
+                  </a:txBody>
+                  <a:tcPr marL="73152" marR="73152" marT="36576" marB="36576" anchor="ctr">
+                    <a:lnL w="9525" cap="flat" cmpd="sng" algn="ctr">
+                      <a:solidFill>
+                        <a:srgbClr val="E5E7EB"/>
+                      </a:solidFill>
+                      <a:prstDash val="solid"/>
+                      <a:round/>
+                      <a:headEnd type="none" w="med" len="med"/>
+                      <a:tailEnd type="none" w="med" len="med"/>
+                    </a:lnL>
+                    <a:lnR w="9525" cap="flat" cmpd="sng" algn="ctr">
+                      <a:solidFill>
+                        <a:srgbClr val="E5E7EB"/>
+                      </a:solidFill>
+                      <a:prstDash val="solid"/>
+                      <a:round/>
+                      <a:headEnd type="none" w="med" len="med"/>
+                      <a:tailEnd type="none" w="med" len="med"/>
+                    </a:lnR>
+                    <a:lnT w="9525" cap="flat" cmpd="sng" algn="ctr">
+                      <a:solidFill>
+                        <a:srgbClr val="E5E7EB"/>
+                      </a:solidFill>
+                      <a:prstDash val="solid"/>
+                      <a:round/>
+                      <a:headEnd type="none" w="med" len="med"/>
+                      <a:tailEnd type="none" w="med" len="med"/>
+                    </a:lnT>
+                    <a:lnB w="9525" cap="flat" cmpd="sng" algn="ctr">
+                      <a:solidFill>
+                        <a:srgbClr val="E5E7EB"/>
+                      </a:solidFill>
+                      <a:prstDash val="solid"/>
+                      <a:round/>
+                      <a:headEnd type="none" w="med" len="med"/>
+                      <a:tailEnd type="none" w="med" len="med"/>
+                    </a:lnB>
+                    <a:solidFill>
+                      <a:srgbClr val="F6F7FB"/>
+                    </a:solidFill>
+                  </a:tcPr>
+                </a:tc>
+              </a:tr>
+              <a:tr h="329184">
+                <a:tc>
+                  <a:txBody>
+                    <a:bodyPr/>
+                    <a:lstStyle/>
+                    <a:p>
+                      <a:pPr indent="0" marL="0">
+                        <a:buNone/>
+                      </a:pPr>
+                      <a:r>
+                        <a:rPr lang="en-US" sz="1200" dirty="0">
+                          <a:solidFill>
+                            <a:srgbClr val="374151"/>
+                          </a:solidFill>
+                          <a:latin typeface="Calibri" pitchFamily="34" charset="0"/>
+                          <a:ea typeface="Calibri" pitchFamily="34" charset="-122"/>
+                          <a:cs typeface="Calibri" pitchFamily="34" charset="-120"/>
+                        </a:rPr>
+                        <a:t>At-Risk</a:t>
+                      </a:r>
+                      <a:endParaRPr lang="en-US" sz="1200" dirty="0">
+                        <a:latin typeface="Calibri" charset="0"/>
+                        <a:ea typeface="Calibri" charset="0"/>
+                        <a:cs typeface="Calibri" charset="0"/>
+                      </a:endParaRPr>
+                    </a:p>
+                  </a:txBody>
+                  <a:tcPr marL="73152" marR="73152" marT="36576" marB="36576" anchor="ctr">
+                    <a:lnL w="9525" cap="flat" cmpd="sng" algn="ctr">
+                      <a:solidFill>
+                        <a:srgbClr val="E5E7EB"/>
+                      </a:solidFill>
+                      <a:prstDash val="solid"/>
+                      <a:round/>
+                      <a:headEnd type="none" w="med" len="med"/>
+                      <a:tailEnd type="none" w="med" len="med"/>
+                    </a:lnL>
+                    <a:lnR w="9525" cap="flat" cmpd="sng" algn="ctr">
+                      <a:solidFill>
+                        <a:srgbClr val="E5E7EB"/>
+                      </a:solidFill>
+                      <a:prstDash val="solid"/>
+                      <a:round/>
+                      <a:headEnd type="none" w="med" len="med"/>
+                      <a:tailEnd type="none" w="med" len="med"/>
+                    </a:lnR>
+                    <a:lnT w="9525" cap="flat" cmpd="sng" algn="ctr">
+                      <a:solidFill>
+                        <a:srgbClr val="E5E7EB"/>
+                      </a:solidFill>
+                      <a:prstDash val="solid"/>
+                      <a:round/>
+                      <a:headEnd type="none" w="med" len="med"/>
+                      <a:tailEnd type="none" w="med" len="med"/>
+                    </a:lnT>
+                    <a:lnB w="9525" cap="flat" cmpd="sng" algn="ctr">
+                      <a:solidFill>
+                        <a:srgbClr val="E5E7EB"/>
+                      </a:solidFill>
+                      <a:prstDash val="solid"/>
+                      <a:round/>
+                      <a:headEnd type="none" w="med" len="med"/>
+                      <a:tailEnd type="none" w="med" len="med"/>
+                    </a:lnB>
+                    <a:solidFill>
+                      <a:srgbClr val="FFFFFF"/>
+                    </a:solidFill>
+                  </a:tcPr>
+                </a:tc>
+                <a:tc>
+                  <a:txBody>
+                    <a:bodyPr/>
+                    <a:lstStyle/>
+                    <a:p>
+                      <a:pPr indent="0" marL="0">
+                        <a:buNone/>
+                      </a:pPr>
+                      <a:r>
+                        <a:rPr lang="en-US" sz="1200" dirty="0">
+                          <a:solidFill>
+                            <a:srgbClr val="374151"/>
+                          </a:solidFill>
+                          <a:latin typeface="Calibri" pitchFamily="34" charset="0"/>
+                          <a:ea typeface="Calibri" pitchFamily="34" charset="-122"/>
+                          <a:cs typeface="Calibri" pitchFamily="34" charset="-120"/>
+                        </a:rPr>
+                        <a:t>Technical skills workshop</a:t>
+                      </a:r>
+                      <a:endParaRPr lang="en-US" sz="1200" dirty="0">
+                        <a:latin typeface="Calibri" charset="0"/>
+                        <a:ea typeface="Calibri" charset="0"/>
+                        <a:cs typeface="Calibri" charset="0"/>
+                      </a:endParaRPr>
+                    </a:p>
+                  </a:txBody>
+                  <a:tcPr marL="73152" marR="73152" marT="36576" marB="36576" anchor="ctr">
+                    <a:lnL w="9525" cap="flat" cmpd="sng" algn="ctr">
+                      <a:solidFill>
+                        <a:srgbClr val="E5E7EB"/>
+                      </a:solidFill>
+                      <a:prstDash val="solid"/>
+                      <a:round/>
+                      <a:headEnd type="none" w="med" len="med"/>
+                      <a:tailEnd type="none" w="med" len="med"/>
+                    </a:lnL>
+                    <a:lnR w="9525" cap="flat" cmpd="sng" algn="ctr">
+                      <a:solidFill>
+                        <a:srgbClr val="E5E7EB"/>
+                      </a:solidFill>
+                      <a:prstDash val="solid"/>
+                      <a:round/>
+                      <a:headEnd type="none" w="med" len="med"/>
+                      <a:tailEnd type="none" w="med" len="med"/>
+                    </a:lnR>
+                    <a:lnT w="9525" cap="flat" cmpd="sng" algn="ctr">
+                      <a:solidFill>
+                        <a:srgbClr val="E5E7EB"/>
+                      </a:solidFill>
+                      <a:prstDash val="solid"/>
+                      <a:round/>
+                      <a:headEnd type="none" w="med" len="med"/>
+                      <a:tailEnd type="none" w="med" len="med"/>
+                    </a:lnT>
+                    <a:lnB w="9525" cap="flat" cmpd="sng" algn="ctr">
+                      <a:solidFill>
+                        <a:srgbClr val="E5E7EB"/>
+                      </a:solidFill>
+                      <a:prstDash val="solid"/>
+                      <a:round/>
+                      <a:headEnd type="none" w="med" len="med"/>
+                      <a:tailEnd type="none" w="med" len="med"/>
+                    </a:lnB>
+                    <a:solidFill>
+                      <a:srgbClr val="FFFFFF"/>
+                    </a:solidFill>
+                  </a:tcPr>
+                </a:tc>
+                <a:tc>
+                  <a:txBody>
+                    <a:bodyPr/>
+                    <a:lstStyle/>
+                    <a:p>
+                      <a:pPr indent="0" marL="0">
+                        <a:buNone/>
+                      </a:pPr>
+                      <a:r>
+                        <a:rPr lang="en-US" sz="1200" dirty="0">
+                          <a:solidFill>
+                            <a:srgbClr val="374151"/>
+                          </a:solidFill>
+                          <a:latin typeface="Calibri" pitchFamily="34" charset="0"/>
+                          <a:ea typeface="Calibri" pitchFamily="34" charset="-122"/>
+                          <a:cs typeface="Calibri" pitchFamily="34" charset="-120"/>
+                        </a:rPr>
+                        <a:t>2</a:t>
+                      </a:r>
+                      <a:endParaRPr lang="en-US" sz="1200" dirty="0">
+                        <a:latin typeface="Calibri" charset="0"/>
+                        <a:ea typeface="Calibri" charset="0"/>
+                        <a:cs typeface="Calibri" charset="0"/>
+                      </a:endParaRPr>
+                    </a:p>
+                  </a:txBody>
+                  <a:tcPr marL="73152" marR="73152" marT="36576" marB="36576" anchor="ctr">
+                    <a:lnL w="9525" cap="flat" cmpd="sng" algn="ctr">
+                      <a:solidFill>
+                        <a:srgbClr val="E5E7EB"/>
+                      </a:solidFill>
+                      <a:prstDash val="solid"/>
+                      <a:round/>
+                      <a:headEnd type="none" w="med" len="med"/>
+                      <a:tailEnd type="none" w="med" len="med"/>
+                    </a:lnL>
+                    <a:lnR w="9525" cap="flat" cmpd="sng" algn="ctr">
+                      <a:solidFill>
+                        <a:srgbClr val="E5E7EB"/>
+                      </a:solidFill>
+                      <a:prstDash val="solid"/>
+                      <a:round/>
+                      <a:headEnd type="none" w="med" len="med"/>
+                      <a:tailEnd type="none" w="med" len="med"/>
+                    </a:lnR>
+                    <a:lnT w="9525" cap="flat" cmpd="sng" algn="ctr">
+                      <a:solidFill>
+                        <a:srgbClr val="E5E7EB"/>
+                      </a:solidFill>
+                      <a:prstDash val="solid"/>
+                      <a:round/>
+                      <a:headEnd type="none" w="med" len="med"/>
+                      <a:tailEnd type="none" w="med" len="med"/>
+                    </a:lnT>
+                    <a:lnB w="9525" cap="flat" cmpd="sng" algn="ctr">
+                      <a:solidFill>
+                        <a:srgbClr val="E5E7EB"/>
+                      </a:solidFill>
+                      <a:prstDash val="solid"/>
+                      <a:round/>
+                      <a:headEnd type="none" w="med" len="med"/>
+                      <a:tailEnd type="none" w="med" len="med"/>
+                    </a:lnB>
+                    <a:solidFill>
+                      <a:srgbClr val="FFFFFF"/>
+                    </a:solidFill>
+                  </a:tcPr>
+                </a:tc>
+              </a:tr>
+              <a:tr h="329184">
+                <a:tc>
+                  <a:txBody>
+                    <a:bodyPr/>
+                    <a:lstStyle/>
+                    <a:p>
+                      <a:pPr indent="0" marL="0">
+                        <a:buNone/>
+                      </a:pPr>
+                      <a:r>
+                        <a:rPr lang="en-US" sz="1200" dirty="0">
+                          <a:solidFill>
+                            <a:srgbClr val="374151"/>
+                          </a:solidFill>
+                          <a:latin typeface="Calibri" pitchFamily="34" charset="0"/>
+                          <a:ea typeface="Calibri" pitchFamily="34" charset="-122"/>
+                          <a:cs typeface="Calibri" pitchFamily="34" charset="-120"/>
+                        </a:rPr>
+                        <a:t>Selective Appliers</a:t>
+                      </a:r>
+                      <a:endParaRPr lang="en-US" sz="1200" dirty="0">
+                        <a:latin typeface="Calibri" charset="0"/>
+                        <a:ea typeface="Calibri" charset="0"/>
+                        <a:cs typeface="Calibri" charset="0"/>
+                      </a:endParaRPr>
+                    </a:p>
+                  </a:txBody>
+                  <a:tcPr marL="73152" marR="73152" marT="36576" marB="36576" anchor="ctr">
+                    <a:lnL w="9525" cap="flat" cmpd="sng" algn="ctr">
+                      <a:solidFill>
+                        <a:srgbClr val="E5E7EB"/>
+                      </a:solidFill>
+                      <a:prstDash val="solid"/>
+                      <a:round/>
+                      <a:headEnd type="none" w="med" len="med"/>
+                      <a:tailEnd type="none" w="med" len="med"/>
+                    </a:lnL>
+                    <a:lnR w="9525" cap="flat" cmpd="sng" algn="ctr">
+                      <a:solidFill>
+                        <a:srgbClr val="E5E7EB"/>
+                      </a:solidFill>
+                      <a:prstDash val="solid"/>
+                      <a:round/>
+                      <a:headEnd type="none" w="med" len="med"/>
+                      <a:tailEnd type="none" w="med" len="med"/>
+                    </a:lnR>
+                    <a:lnT w="9525" cap="flat" cmpd="sng" algn="ctr">
+                      <a:solidFill>
+                        <a:srgbClr val="E5E7EB"/>
+                      </a:solidFill>
+                      <a:prstDash val="solid"/>
+                      <a:round/>
+                      <a:headEnd type="none" w="med" len="med"/>
+                      <a:tailEnd type="none" w="med" len="med"/>
+                    </a:lnT>
+                    <a:lnB w="9525" cap="flat" cmpd="sng" algn="ctr">
+                      <a:solidFill>
+                        <a:srgbClr val="E5E7EB"/>
+                      </a:solidFill>
+                      <a:prstDash val="solid"/>
+                      <a:round/>
+                      <a:headEnd type="none" w="med" len="med"/>
+                      <a:tailEnd type="none" w="med" len="med"/>
+                    </a:lnB>
+                    <a:solidFill>
+                      <a:srgbClr val="F6F7FB"/>
+                    </a:solidFill>
+                  </a:tcPr>
+                </a:tc>
+                <a:tc>
+                  <a:txBody>
+                    <a:bodyPr/>
+                    <a:lstStyle/>
+                    <a:p>
+                      <a:pPr indent="0" marL="0">
+                        <a:buNone/>
+                      </a:pPr>
+                      <a:r>
+                        <a:rPr lang="en-US" sz="1200" dirty="0">
+                          <a:solidFill>
+                            <a:srgbClr val="374151"/>
+                          </a:solidFill>
+                          <a:latin typeface="Calibri" pitchFamily="34" charset="0"/>
+                          <a:ea typeface="Calibri" pitchFamily="34" charset="-122"/>
+                          <a:cs typeface="Calibri" pitchFamily="34" charset="-120"/>
+                        </a:rPr>
+                        <a:t>Apply to more roles</a:t>
+                      </a:r>
+                      <a:endParaRPr lang="en-US" sz="1200" dirty="0">
+                        <a:latin typeface="Calibri" charset="0"/>
+                        <a:ea typeface="Calibri" charset="0"/>
+                        <a:cs typeface="Calibri" charset="0"/>
+                      </a:endParaRPr>
+                    </a:p>
+                  </a:txBody>
+                  <a:tcPr marL="73152" marR="73152" marT="36576" marB="36576" anchor="ctr">
+                    <a:lnL w="9525" cap="flat" cmpd="sng" algn="ctr">
+                      <a:solidFill>
+                        <a:srgbClr val="E5E7EB"/>
+                      </a:solidFill>
+                      <a:prstDash val="solid"/>
+                      <a:round/>
+                      <a:headEnd type="none" w="med" len="med"/>
+                      <a:tailEnd type="none" w="med" len="med"/>
+                    </a:lnL>
+                    <a:lnR w="9525" cap="flat" cmpd="sng" algn="ctr">
+                      <a:solidFill>
+                        <a:srgbClr val="E5E7EB"/>
+                      </a:solidFill>
+                      <a:prstDash val="solid"/>
+                      <a:round/>
+                      <a:headEnd type="none" w="med" len="med"/>
+                      <a:tailEnd type="none" w="med" len="med"/>
+                    </a:lnR>
+                    <a:lnT w="9525" cap="flat" cmpd="sng" algn="ctr">
+                      <a:solidFill>
+                        <a:srgbClr val="E5E7EB"/>
+                      </a:solidFill>
+                      <a:prstDash val="solid"/>
+                      <a:round/>
+                      <a:headEnd type="none" w="med" len="med"/>
+                      <a:tailEnd type="none" w="med" len="med"/>
+                    </a:lnT>
+                    <a:lnB w="9525" cap="flat" cmpd="sng" algn="ctr">
+                      <a:solidFill>
+                        <a:srgbClr val="E5E7EB"/>
+                      </a:solidFill>
+                      <a:prstDash val="solid"/>
+                      <a:round/>
+                      <a:headEnd type="none" w="med" len="med"/>
+                      <a:tailEnd type="none" w="med" len="med"/>
+                    </a:lnB>
+                    <a:solidFill>
+                      <a:srgbClr val="F6F7FB"/>
+                    </a:solidFill>
+                  </a:tcPr>
+                </a:tc>
+                <a:tc>
+                  <a:txBody>
+                    <a:bodyPr/>
+                    <a:lstStyle/>
+                    <a:p>
+                      <a:pPr indent="0" marL="0">
+                        <a:buNone/>
+                      </a:pPr>
+                      <a:r>
+                        <a:rPr lang="en-US" sz="1200" dirty="0">
+                          <a:solidFill>
+                            <a:srgbClr val="374151"/>
+                          </a:solidFill>
+                          <a:latin typeface="Calibri" pitchFamily="34" charset="0"/>
+                          <a:ea typeface="Calibri" pitchFamily="34" charset="-122"/>
+                          <a:cs typeface="Calibri" pitchFamily="34" charset="-120"/>
+                        </a:rPr>
+                        <a:t>10</a:t>
+                      </a:r>
+                      <a:endParaRPr lang="en-US" sz="1200" dirty="0">
+                        <a:latin typeface="Calibri" charset="0"/>
+                        <a:ea typeface="Calibri" charset="0"/>
+                        <a:cs typeface="Calibri" charset="0"/>
+                      </a:endParaRPr>
+                    </a:p>
+                  </a:txBody>
+                  <a:tcPr marL="73152" marR="73152" marT="36576" marB="36576" anchor="ctr">
+                    <a:lnL w="9525" cap="flat" cmpd="sng" algn="ctr">
+                      <a:solidFill>
+                        <a:srgbClr val="E5E7EB"/>
+                      </a:solidFill>
+                      <a:prstDash val="solid"/>
+                      <a:round/>
+                      <a:headEnd type="none" w="med" len="med"/>
+                      <a:tailEnd type="none" w="med" len="med"/>
+                    </a:lnL>
+                    <a:lnR w="9525" cap="flat" cmpd="sng" algn="ctr">
+                      <a:solidFill>
+                        <a:srgbClr val="E5E7EB"/>
+                      </a:solidFill>
+                      <a:prstDash val="solid"/>
+                      <a:round/>
+                      <a:headEnd type="none" w="med" len="med"/>
+                      <a:tailEnd type="none" w="med" len="med"/>
+                    </a:lnR>
+                    <a:lnT w="9525" cap="flat" cmpd="sng" algn="ctr">
+                      <a:solidFill>
+                        <a:srgbClr val="E5E7EB"/>
+                      </a:solidFill>
+                      <a:prstDash val="solid"/>
+                      <a:round/>
+                      <a:headEnd type="none" w="med" len="med"/>
+                      <a:tailEnd type="none" w="med" len="med"/>
+                    </a:lnT>
+                    <a:lnB w="9525" cap="flat" cmpd="sng" algn="ctr">
+                      <a:solidFill>
+                        <a:srgbClr val="E5E7EB"/>
+                      </a:solidFill>
+                      <a:prstDash val="solid"/>
+                      <a:round/>
+                      <a:headEnd type="none" w="med" len="med"/>
+                      <a:tailEnd type="none" w="med" len="med"/>
+                    </a:lnB>
+                    <a:solidFill>
+                      <a:srgbClr val="F6F7FB"/>
+                    </a:solidFill>
+                  </a:tcPr>
+                </a:tc>
+              </a:tr>
+              <a:tr h="329184">
+                <a:tc>
+                  <a:txBody>
+                    <a:bodyPr/>
+                    <a:lstStyle/>
+                    <a:p>
+                      <a:pPr indent="0" marL="0">
+                        <a:buNone/>
+                      </a:pPr>
+                      <a:r>
+                        <a:rPr lang="en-US" sz="1200" dirty="0">
+                          <a:solidFill>
+                            <a:srgbClr val="374151"/>
+                          </a:solidFill>
+                          <a:latin typeface="Calibri" pitchFamily="34" charset="0"/>
+                          <a:ea typeface="Calibri" pitchFamily="34" charset="-122"/>
+                          <a:cs typeface="Calibri" pitchFamily="34" charset="-120"/>
+                        </a:rPr>
+                        <a:t>Selective Appliers</a:t>
+                      </a:r>
+                      <a:endParaRPr lang="en-US" sz="1200" dirty="0">
+                        <a:latin typeface="Calibri" charset="0"/>
+                        <a:ea typeface="Calibri" charset="0"/>
+                        <a:cs typeface="Calibri" charset="0"/>
+                      </a:endParaRPr>
+                    </a:p>
+                  </a:txBody>
+                  <a:tcPr marL="73152" marR="73152" marT="36576" marB="36576" anchor="ctr">
+                    <a:lnL w="9525" cap="flat" cmpd="sng" algn="ctr">
+                      <a:solidFill>
+                        <a:srgbClr val="E5E7EB"/>
+                      </a:solidFill>
+                      <a:prstDash val="solid"/>
+                      <a:round/>
+                      <a:headEnd type="none" w="med" len="med"/>
+                      <a:tailEnd type="none" w="med" len="med"/>
+                    </a:lnL>
+                    <a:lnR w="9525" cap="flat" cmpd="sng" algn="ctr">
+                      <a:solidFill>
+                        <a:srgbClr val="E5E7EB"/>
+                      </a:solidFill>
+                      <a:prstDash val="solid"/>
+                      <a:round/>
+                      <a:headEnd type="none" w="med" len="med"/>
+                      <a:tailEnd type="none" w="med" len="med"/>
+                    </a:lnR>
+                    <a:lnT w="9525" cap="flat" cmpd="sng" algn="ctr">
+                      <a:solidFill>
+                        <a:srgbClr val="E5E7EB"/>
+                      </a:solidFill>
+                      <a:prstDash val="solid"/>
+                      <a:round/>
+                      <a:headEnd type="none" w="med" len="med"/>
+                      <a:tailEnd type="none" w="med" len="med"/>
+                    </a:lnT>
+                    <a:lnB w="9525" cap="flat" cmpd="sng" algn="ctr">
+                      <a:solidFill>
+                        <a:srgbClr val="E5E7EB"/>
+                      </a:solidFill>
+                      <a:prstDash val="solid"/>
+                      <a:round/>
+                      <a:headEnd type="none" w="med" len="med"/>
+                      <a:tailEnd type="none" w="med" len="med"/>
+                    </a:lnB>
+                    <a:solidFill>
+                      <a:srgbClr val="FFFFFF"/>
+                    </a:solidFill>
+                  </a:tcPr>
+                </a:tc>
+                <a:tc>
+                  <a:txBody>
+                    <a:bodyPr/>
+                    <a:lstStyle/>
+                    <a:p>
+                      <a:pPr indent="0" marL="0">
+                        <a:buNone/>
+                      </a:pPr>
+                      <a:r>
+                        <a:rPr lang="en-US" sz="1200" dirty="0">
+                          <a:solidFill>
+                            <a:srgbClr val="374151"/>
+                          </a:solidFill>
+                          <a:latin typeface="Calibri" pitchFamily="34" charset="0"/>
+                          <a:ea typeface="Calibri" pitchFamily="34" charset="-122"/>
+                          <a:cs typeface="Calibri" pitchFamily="34" charset="-120"/>
+                        </a:rPr>
+                        <a:t>Technical skills workshop</a:t>
+                      </a:r>
+                      <a:endParaRPr lang="en-US" sz="1200" dirty="0">
+                        <a:latin typeface="Calibri" charset="0"/>
+                        <a:ea typeface="Calibri" charset="0"/>
+                        <a:cs typeface="Calibri" charset="0"/>
+                      </a:endParaRPr>
+                    </a:p>
+                  </a:txBody>
+                  <a:tcPr marL="73152" marR="73152" marT="36576" marB="36576" anchor="ctr">
+                    <a:lnL w="9525" cap="flat" cmpd="sng" algn="ctr">
+                      <a:solidFill>
+                        <a:srgbClr val="E5E7EB"/>
+                      </a:solidFill>
+                      <a:prstDash val="solid"/>
+                      <a:round/>
+                      <a:headEnd type="none" w="med" len="med"/>
+                      <a:tailEnd type="none" w="med" len="med"/>
+                    </a:lnL>
+                    <a:lnR w="9525" cap="flat" cmpd="sng" algn="ctr">
+                      <a:solidFill>
+                        <a:srgbClr val="E5E7EB"/>
+                      </a:solidFill>
+                      <a:prstDash val="solid"/>
+                      <a:round/>
+                      <a:headEnd type="none" w="med" len="med"/>
+                      <a:tailEnd type="none" w="med" len="med"/>
+                    </a:lnR>
+                    <a:lnT w="9525" cap="flat" cmpd="sng" algn="ctr">
+                      <a:solidFill>
+                        <a:srgbClr val="E5E7EB"/>
+                      </a:solidFill>
+                      <a:prstDash val="solid"/>
+                      <a:round/>
+                      <a:headEnd type="none" w="med" len="med"/>
+                      <a:tailEnd type="none" w="med" len="med"/>
+                    </a:lnT>
+                    <a:lnB w="9525" cap="flat" cmpd="sng" algn="ctr">
+                      <a:solidFill>
+                        <a:srgbClr val="E5E7EB"/>
+                      </a:solidFill>
+                      <a:prstDash val="solid"/>
+                      <a:round/>
+                      <a:headEnd type="none" w="med" len="med"/>
+                      <a:tailEnd type="none" w="med" len="med"/>
+                    </a:lnB>
+                    <a:solidFill>
+                      <a:srgbClr val="FFFFFF"/>
+                    </a:solidFill>
+                  </a:tcPr>
+                </a:tc>
+                <a:tc>
+                  <a:txBody>
+                    <a:bodyPr/>
+                    <a:lstStyle/>
+                    <a:p>
+                      <a:pPr indent="0" marL="0">
+                        <a:buNone/>
+                      </a:pPr>
+                      <a:r>
+                        <a:rPr lang="en-US" sz="1200" dirty="0">
+                          <a:solidFill>
+                            <a:srgbClr val="374151"/>
+                          </a:solidFill>
+                          <a:latin typeface="Calibri" pitchFamily="34" charset="0"/>
+                          <a:ea typeface="Calibri" pitchFamily="34" charset="-122"/>
+                          <a:cs typeface="Calibri" pitchFamily="34" charset="-120"/>
+                        </a:rPr>
+                        <a:t>8</a:t>
+                      </a:r>
+                      <a:endParaRPr lang="en-US" sz="1200" dirty="0">
+                        <a:latin typeface="Calibri" charset="0"/>
+                        <a:ea typeface="Calibri" charset="0"/>
+                        <a:cs typeface="Calibri" charset="0"/>
+                      </a:endParaRPr>
+                    </a:p>
+                  </a:txBody>
+                  <a:tcPr marL="73152" marR="73152" marT="36576" marB="36576" anchor="ctr">
+                    <a:lnL w="9525" cap="flat" cmpd="sng" algn="ctr">
+                      <a:solidFill>
+                        <a:srgbClr val="E5E7EB"/>
+                      </a:solidFill>
+                      <a:prstDash val="solid"/>
+                      <a:round/>
+                      <a:headEnd type="none" w="med" len="med"/>
+                      <a:tailEnd type="none" w="med" len="med"/>
+                    </a:lnL>
+                    <a:lnR w="9525" cap="flat" cmpd="sng" algn="ctr">
+                      <a:solidFill>
+                        <a:srgbClr val="E5E7EB"/>
+                      </a:solidFill>
+                      <a:prstDash val="solid"/>
+                      <a:round/>
+                      <a:headEnd type="none" w="med" len="med"/>
+                      <a:tailEnd type="none" w="med" len="med"/>
+                    </a:lnR>
+                    <a:lnT w="9525" cap="flat" cmpd="sng" algn="ctr">
+                      <a:solidFill>
+                        <a:srgbClr val="E5E7EB"/>
+                      </a:solidFill>
+                      <a:prstDash val="solid"/>
+                      <a:round/>
+                      <a:headEnd type="none" w="med" len="med"/>
+                      <a:tailEnd type="none" w="med" len="med"/>
+                    </a:lnT>
+                    <a:lnB w="9525" cap="flat" cmpd="sng" algn="ctr">
+                      <a:solidFill>
+                        <a:srgbClr val="E5E7EB"/>
+                      </a:solidFill>
+                      <a:prstDash val="solid"/>
+                      <a:round/>
+                      <a:headEnd type="none" w="med" len="med"/>
+                      <a:tailEnd type="none" w="med" len="med"/>
+                    </a:lnB>
+                    <a:solidFill>
+                      <a:srgbClr val="FFFFFF"/>
+                    </a:solidFill>
+                  </a:tcPr>
+                </a:tc>
+              </a:tr>
+              <a:tr h="329184">
+                <a:tc>
+                  <a:txBody>
+                    <a:bodyPr/>
+                    <a:lstStyle/>
+                    <a:p>
+                      <a:pPr indent="0" marL="0">
+                        <a:buNone/>
+                      </a:pPr>
+                      <a:r>
+                        <a:rPr lang="en-US" sz="1200" dirty="0">
+                          <a:solidFill>
+                            <a:srgbClr val="374151"/>
+                          </a:solidFill>
+                          <a:latin typeface="Calibri" pitchFamily="34" charset="0"/>
+                          <a:ea typeface="Calibri" pitchFamily="34" charset="-122"/>
+                          <a:cs typeface="Calibri" pitchFamily="34" charset="-120"/>
+                        </a:rPr>
+                        <a:t>Selective Appliers</a:t>
+                      </a:r>
+                      <a:endParaRPr lang="en-US" sz="1200" dirty="0">
+                        <a:latin typeface="Calibri" charset="0"/>
+                        <a:ea typeface="Calibri" charset="0"/>
+                        <a:cs typeface="Calibri" charset="0"/>
+                      </a:endParaRPr>
+                    </a:p>
+                  </a:txBody>
+                  <a:tcPr marL="73152" marR="73152" marT="36576" marB="36576" anchor="ctr">
+                    <a:lnL w="9525" cap="flat" cmpd="sng" algn="ctr">
+                      <a:solidFill>
+                        <a:srgbClr val="E5E7EB"/>
+                      </a:solidFill>
+                      <a:prstDash val="solid"/>
+                      <a:round/>
+                      <a:headEnd type="none" w="med" len="med"/>
+                      <a:tailEnd type="none" w="med" len="med"/>
+                    </a:lnL>
+                    <a:lnR w="9525" cap="flat" cmpd="sng" algn="ctr">
+                      <a:solidFill>
+                        <a:srgbClr val="E5E7EB"/>
+                      </a:solidFill>
+                      <a:prstDash val="solid"/>
+                      <a:round/>
+                      <a:headEnd type="none" w="med" len="med"/>
+                      <a:tailEnd type="none" w="med" len="med"/>
+                    </a:lnR>
+                    <a:lnT w="9525" cap="flat" cmpd="sng" algn="ctr">
+                      <a:solidFill>
+                        <a:srgbClr val="E5E7EB"/>
+                      </a:solidFill>
+                      <a:prstDash val="solid"/>
+                      <a:round/>
+                      <a:headEnd type="none" w="med" len="med"/>
+                      <a:tailEnd type="none" w="med" len="med"/>
+                    </a:lnT>
+                    <a:lnB w="9525" cap="flat" cmpd="sng" algn="ctr">
+                      <a:solidFill>
+                        <a:srgbClr val="E5E7EB"/>
+                      </a:solidFill>
+                      <a:prstDash val="solid"/>
+                      <a:round/>
+                      <a:headEnd type="none" w="med" len="med"/>
+                      <a:tailEnd type="none" w="med" len="med"/>
+                    </a:lnB>
+                    <a:solidFill>
+                      <a:srgbClr val="F6F7FB"/>
+                    </a:solidFill>
+                  </a:tcPr>
+                </a:tc>
+                <a:tc>
+                  <a:txBody>
+                    <a:bodyPr/>
+                    <a:lstStyle/>
+                    <a:p>
+                      <a:pPr indent="0" marL="0">
+                        <a:buNone/>
+                      </a:pPr>
+                      <a:r>
+                        <a:rPr lang="en-US" sz="1200" dirty="0">
+                          <a:solidFill>
+                            <a:srgbClr val="374151"/>
+                          </a:solidFill>
+                          <a:latin typeface="Calibri" pitchFamily="34" charset="0"/>
+                          <a:ea typeface="Calibri" pitchFamily="34" charset="-122"/>
+                          <a:cs typeface="Calibri" pitchFamily="34" charset="-120"/>
+                        </a:rPr>
+                        <a:t>Mock interviews</a:t>
+                      </a:r>
+                      <a:endParaRPr lang="en-US" sz="1200" dirty="0">
+                        <a:latin typeface="Calibri" charset="0"/>
+                        <a:ea typeface="Calibri" charset="0"/>
+                        <a:cs typeface="Calibri" charset="0"/>
+                      </a:endParaRPr>
+                    </a:p>
+                  </a:txBody>
+                  <a:tcPr marL="73152" marR="73152" marT="36576" marB="36576" anchor="ctr">
+                    <a:lnL w="9525" cap="flat" cmpd="sng" algn="ctr">
+                      <a:solidFill>
+                        <a:srgbClr val="E5E7EB"/>
+                      </a:solidFill>
+                      <a:prstDash val="solid"/>
+                      <a:round/>
+                      <a:headEnd type="none" w="med" len="med"/>
+                      <a:tailEnd type="none" w="med" len="med"/>
+                    </a:lnL>
+                    <a:lnR w="9525" cap="flat" cmpd="sng" algn="ctr">
+                      <a:solidFill>
+                        <a:srgbClr val="E5E7EB"/>
+                      </a:solidFill>
+                      <a:prstDash val="solid"/>
+                      <a:round/>
+                      <a:headEnd type="none" w="med" len="med"/>
+                      <a:tailEnd type="none" w="med" len="med"/>
+                    </a:lnR>
+                    <a:lnT w="9525" cap="flat" cmpd="sng" algn="ctr">
+                      <a:solidFill>
+                        <a:srgbClr val="E5E7EB"/>
+                      </a:solidFill>
+                      <a:prstDash val="solid"/>
+                      <a:round/>
+                      <a:headEnd type="none" w="med" len="med"/>
+                      <a:tailEnd type="none" w="med" len="med"/>
+                    </a:lnT>
+                    <a:lnB w="9525" cap="flat" cmpd="sng" algn="ctr">
+                      <a:solidFill>
+                        <a:srgbClr val="E5E7EB"/>
+                      </a:solidFill>
+                      <a:prstDash val="solid"/>
+                      <a:round/>
+                      <a:headEnd type="none" w="med" len="med"/>
+                      <a:tailEnd type="none" w="med" len="med"/>
+                    </a:lnB>
+                    <a:solidFill>
+                      <a:srgbClr val="F6F7FB"/>
+                    </a:solidFill>
+                  </a:tcPr>
+                </a:tc>
+                <a:tc>
+                  <a:txBody>
+                    <a:bodyPr/>
+                    <a:lstStyle/>
+                    <a:p>
+                      <a:pPr indent="0" marL="0">
+                        <a:buNone/>
+                      </a:pPr>
+                      <a:r>
+                        <a:rPr lang="en-US" sz="1200" dirty="0">
+                          <a:solidFill>
+                            <a:srgbClr val="374151"/>
+                          </a:solidFill>
+                          <a:latin typeface="Calibri" pitchFamily="34" charset="0"/>
+                          <a:ea typeface="Calibri" pitchFamily="34" charset="-122"/>
+                          <a:cs typeface="Calibri" pitchFamily="34" charset="-120"/>
+                        </a:rPr>
+                        <a:t>1</a:t>
+                      </a:r>
+                      <a:endParaRPr lang="en-US" sz="1200" dirty="0">
+                        <a:latin typeface="Calibri" charset="0"/>
+                        <a:ea typeface="Calibri" charset="0"/>
+                        <a:cs typeface="Calibri" charset="0"/>
+                      </a:endParaRPr>
+                    </a:p>
+                  </a:txBody>
+                  <a:tcPr marL="73152" marR="73152" marT="36576" marB="36576" anchor="ctr">
+                    <a:lnL w="9525" cap="flat" cmpd="sng" algn="ctr">
+                      <a:solidFill>
+                        <a:srgbClr val="E5E7EB"/>
+                      </a:solidFill>
+                      <a:prstDash val="solid"/>
+                      <a:round/>
+                      <a:headEnd type="none" w="med" len="med"/>
+                      <a:tailEnd type="none" w="med" len="med"/>
+                    </a:lnL>
+                    <a:lnR w="9525" cap="flat" cmpd="sng" algn="ctr">
+                      <a:solidFill>
+                        <a:srgbClr val="E5E7EB"/>
+                      </a:solidFill>
+                      <a:prstDash val="solid"/>
+                      <a:round/>
+                      <a:headEnd type="none" w="med" len="med"/>
+                      <a:tailEnd type="none" w="med" len="med"/>
+                    </a:lnR>
+                    <a:lnT w="9525" cap="flat" cmpd="sng" algn="ctr">
+                      <a:solidFill>
+                        <a:srgbClr val="E5E7EB"/>
+                      </a:solidFill>
+                      <a:prstDash val="solid"/>
+                      <a:round/>
+                      <a:headEnd type="none" w="med" len="med"/>
+                      <a:tailEnd type="none" w="med" len="med"/>
+                    </a:lnT>
+                    <a:lnB w="9525" cap="flat" cmpd="sng" algn="ctr">
+                      <a:solidFill>
+                        <a:srgbClr val="E5E7EB"/>
+                      </a:solidFill>
+                      <a:prstDash val="solid"/>
+                      <a:round/>
+                      <a:headEnd type="none" w="med" len="med"/>
+                      <a:tailEnd type="none" w="med" len="med"/>
+                    </a:lnB>
+                    <a:solidFill>
+                      <a:srgbClr val="F6F7FB"/>
+                    </a:solidFill>
+                  </a:tcPr>
+                </a:tc>
+              </a:tr>
+            </a:tbl>
+          </a:graphicData>
+        </a:graphic>
+      </p:graphicFrame>
+      <p:sp>
+        <p:nvSpPr>
+          <p:cNvPr id="13" name="Text 10"/>
+          <p:cNvSpPr txBox="1"/>
+          <p:nvPr/>
+        </p:nvSpPr>
+        <p:spPr>
+          <a:xfrm>
+            <a:off x="6858000" y="4617720"/>
+            <a:ext cx="4800600" cy="1417320"/>
           </a:xfrm>
           <a:prstGeom prst="rect">
             <a:avLst/>
@@ -11231,42 +13986,204 @@
           <a:lstStyle/>
           <a:p>
             <a:pPr indent="0" marL="0">
-              <a:buNone/>
-            </a:pPr>
-            <a:r>
-              <a:rPr lang="en-US" sz="1400" dirty="0">
-                <a:solidFill>
-                  <a:srgbClr val="CBD5E1"/>
-                </a:solidFill>
-              </a:rPr>
-              <a:t>Normalization is a proof: writing every FD exposed the transitive dependency hiding in min_cgpa.</a:t>
-            </a:r>
-            <a:endParaRPr lang="en-US" sz="1400" dirty="0"/>
+              <a:spcAft>
+                <a:spcPts val="600"/>
+              </a:spcAft>
+              <a:buNone/>
+            </a:pPr>
+            <a:r>
+              <a:rPr lang="en-US" sz="1250" b="1" dirty="0">
+                <a:solidFill>
+                  <a:srgbClr val="1F2937"/>
+                </a:solidFill>
+              </a:rPr>
+              <a:t>S1: </a:t>
+            </a:r>
+            <a:pPr indent="0" marL="0">
+              <a:spcAft>
+                <a:spcPts val="600"/>
+              </a:spcAft>
+              <a:buNone/>
+            </a:pPr>
+            <a:r>
+              <a:rPr lang="en-US" sz="1250" dirty="0">
+                <a:solidFill>
+                  <a:srgbClr val="374151"/>
+                </a:solidFill>
+              </a:rPr>
+              <a:t>PGP students fall into 4 segments and 52% of PGPEX are At-Risk, so a program-wide policy misses people.</a:t>
+            </a:r>
+            <a:endParaRPr lang="en-US" sz="1250" dirty="0"/>
+          </a:p>
+          <a:p>
+            <a:pPr indent="0" marL="0">
+              <a:spcAft>
+                <a:spcPts val="600"/>
+              </a:spcAft>
+              <a:buNone/>
+            </a:pPr>
+            <a:r>
+              <a:rPr lang="en-US" sz="1250" b="1" dirty="0">
+                <a:solidFill>
+                  <a:srgbClr val="1F2937"/>
+                </a:solidFill>
+              </a:rPr>
+              <a:t>Threshold t: </a:t>
+            </a:r>
+            <a:pPr indent="0" marL="0">
+              <a:spcAft>
+                <a:spcPts val="600"/>
+              </a:spcAft>
+              <a:buNone/>
+            </a:pPr>
+            <a:r>
+              <a:rPr lang="en-US" sz="1250" dirty="0">
+                <a:solidFill>
+                  <a:srgbClr val="374151"/>
+                </a:solidFill>
+              </a:rPr>
+              <a:t>flagging students whose P(offer) &lt; 0.6 catches 89% of those with no offer, at 78% precision.</a:t>
+            </a:r>
+            <a:endParaRPr lang="en-US" sz="1250" dirty="0"/>
           </a:p>
         </p:txBody>
       </p:sp>
       <p:sp>
         <p:nvSpPr>
-          <p:cNvPr id="9" name="Shape 7"/>
+          <p:cNvPr id="25" name="Slide Number Placeholder 0"/>
+          <p:cNvSpPr>
+            <a:spLocks noGrp="1"/>
+          </p:cNvSpPr>
+          <p:nvPr>
+            <p:ph type="sldNum" sz="quarter" idx="4294967295"/>
+          </p:nvPr>
+        </p:nvSpPr>
+        <p:spPr>
+          <a:xfrm>
+            <a:off x="11201400" y="6419088"/>
+            <a:ext cx="457200" cy="274320"/>
+          </a:xfrm>
+          <a:prstGeom prst="rect">
+            <a:avLst/>
+          </a:prstGeom>
+          <a:extLst>
+            <a:ext uri="{C572A759-6A51-4108-AA02-DFA0A04FC94B}">
+              <ma14:wrappingTextBoxFlag xmlns:ma14="http://schemas.microsoft.com/office/mac/drawingml/2011/main" val="0"/>
+            </a:ext>
+          </a:extLst>
+        </p:spPr>
+        <p:txBody>
+          <a:bodyPr/>
+          <a:lstStyle>
+            <a:lvl1pPr>
+              <a:defRPr sz="1000">
+                <a:solidFill>
+                  <a:srgbClr val="6B7280"/>
+                </a:solidFill>
+                <a:latin typeface="Calibri"/>
+                <a:ea typeface="Calibri"/>
+                <a:cs typeface="Calibri"/>
+              </a:defRPr>
+            </a:lvl1pPr>
+          </a:lstStyle>
+          <a:p>
+            <a:pPr algn="r"/>
+            <a:fld id="{F7021451-1387-4CA6-816F-3879F97B5CBC}" type="slidenum">
+              <a:rPr b="0" lang="en-US"/>
+              <a:t>18</a:t>
+            </a:fld>
+            <a:endParaRPr lang="en-US"/>
+          </a:p>
+        </p:txBody>
+      </p:sp>
+    </p:spTree>
+  </p:cSld>
+  <p:clrMapOvr>
+    <a:masterClrMapping/>
+  </p:clrMapOvr>
+</p:sld>
+</file>
+
+<file path=ppt/slides/slide19.xml><?xml version="1.0" encoding="utf-8"?>
+<p:sld xmlns:a="http://schemas.openxmlformats.org/drawingml/2006/main" xmlns:r="http://schemas.openxmlformats.org/officeDocument/2006/relationships" xmlns:p="http://schemas.openxmlformats.org/presentationml/2006/main">
+  <p:cSld name="Slide 19">
+    <p:spTree>
+      <p:nvGrpSpPr>
+        <p:cNvPr id="1" name=""/>
+        <p:cNvGrpSpPr/>
+        <p:nvPr/>
+      </p:nvGrpSpPr>
+      <p:grpSpPr>
+        <a:xfrm>
+          <a:off x="0" y="0"/>
+          <a:ext cx="0" cy="0"/>
+          <a:chOff x="0" y="0"/>
+          <a:chExt cx="0" cy="0"/>
+        </a:xfrm>
+      </p:grpSpPr>
+      <p:sp>
+        <p:nvSpPr>
+          <p:cNvPr id="2" name="Text 0"/>
+          <p:cNvSpPr/>
+          <p:nvPr>
+            <p:ph idx="100" type="title" hasCustomPrompt="1"/>
+          </p:nvPr>
+        </p:nvSpPr>
+        <p:spPr>
+          <a:xfrm>
+            <a:off x="548640" y="347472"/>
+            <a:ext cx="9144000" cy="731520"/>
+          </a:xfrm>
+          <a:prstGeom prst="rect">
+            <a:avLst/>
+          </a:prstGeom>
+          <a:noFill/>
+          <a:ln/>
+        </p:spPr>
+        <p:txBody>
+          <a:bodyPr wrap="square" lIns="0" tIns="0" rIns="0" bIns="0" rtlCol="0" anchor="ctr"/>
+          <a:lstStyle/>
+          <a:p>
+            <a:pPr algn="l" indent="0" marL="0">
+              <a:buNone/>
+            </a:pPr>
+            <a:r>
+              <a:rPr lang="en-US" sz="3000" b="1" dirty="0">
+                <a:solidFill>
+                  <a:srgbClr val="111827"/>
+                </a:solidFill>
+                <a:latin typeface="Cambria" pitchFamily="34" charset="0"/>
+                <a:ea typeface="Cambria" pitchFamily="34" charset="-122"/>
+                <a:cs typeface="Cambria" pitchFamily="34" charset="-120"/>
+              </a:rPr>
+              <a:t>Indexing, security and testing</a:t>
+            </a:r>
+            <a:endParaRPr lang="en-US" sz="3000" dirty="0"/>
+          </a:p>
+        </p:txBody>
+      </p:sp>
+      <p:sp>
+        <p:nvSpPr>
+          <p:cNvPr id="3" name="speaker-chip"/>
           <p:cNvSpPr/>
           <p:nvPr/>
         </p:nvSpPr>
         <p:spPr>
           <a:xfrm>
-            <a:off x="6163056" y="1417320"/>
-            <a:ext cx="2606040" cy="3108960"/>
+            <a:off x="9921240" y="457200"/>
+            <a:ext cx="1737360" cy="402336"/>
           </a:xfrm>
           <a:prstGeom prst="roundRect">
             <a:avLst>
-              <a:gd name="adj" fmla="val 3509"/>
+              <a:gd name="adj" fmla="val 50000"/>
             </a:avLst>
           </a:prstGeom>
           <a:solidFill>
-            <a:srgbClr val="1F2937"/>
+            <a:srgbClr val="EEF0FF"/>
           </a:solidFill>
           <a:ln w="12700">
             <a:solidFill>
-              <a:srgbClr val="374151"/>
+              <a:srgbClr val="EEF0FF"/>
             </a:solidFill>
             <a:prstDash val="solid"/>
           </a:ln>
@@ -11274,14 +14191,14 @@
       </p:sp>
       <p:sp>
         <p:nvSpPr>
-          <p:cNvPr id="10" name="Text 8"/>
+          <p:cNvPr id="4" name="Text 2"/>
           <p:cNvSpPr txBox="1"/>
           <p:nvPr/>
         </p:nvSpPr>
         <p:spPr>
           <a:xfrm>
-            <a:off x="6345936" y="1572768"/>
-            <a:ext cx="2286000" cy="365760"/>
+            <a:off x="9921240" y="457200"/>
+            <a:ext cx="1737360" cy="402336"/>
           </a:xfrm>
           <a:prstGeom prst="rect">
             <a:avLst/>
@@ -11293,42 +14210,97 @@
           <a:bodyPr wrap="square" lIns="0" tIns="0" rIns="0" bIns="0" rtlCol="0" anchor="ctr"/>
           <a:lstStyle/>
           <a:p>
-            <a:pPr indent="0" marL="0">
-              <a:buNone/>
-            </a:pPr>
-            <a:r>
-              <a:rPr lang="en-US" sz="1400" b="1" dirty="0">
-                <a:solidFill>
-                  <a:srgbClr val="A5B4FC"/>
-                </a:solidFill>
-              </a:rPr>
-              <a:t>M3  </a:t>
-            </a:r>
-            <a:pPr indent="0" marL="0">
-              <a:buNone/>
-            </a:pPr>
-            <a:r>
-              <a:rPr lang="en-US" sz="1400" b="1" dirty="0">
-                <a:solidFill>
-                  <a:srgbClr val="FFFFFF"/>
-                </a:solidFill>
-              </a:rPr>
-              <a:t>[Member 3]</a:t>
-            </a:r>
-            <a:endParaRPr lang="en-US" sz="1400" dirty="0"/>
+            <a:pPr algn="ctr" indent="0" marL="0">
+              <a:buNone/>
+            </a:pPr>
+            <a:r>
+              <a:rPr lang="en-US" sz="1200" b="1" dirty="0">
+                <a:solidFill>
+                  <a:srgbClr val="4F46E5"/>
+                </a:solidFill>
+              </a:rPr>
+              <a:t>M4  </a:t>
+            </a:r>
+            <a:pPr algn="ctr" indent="0" marL="0">
+              <a:buNone/>
+            </a:pPr>
+            <a:r>
+              <a:rPr lang="en-US" sz="1200" dirty="0">
+                <a:solidFill>
+                  <a:srgbClr val="312E81"/>
+                </a:solidFill>
+              </a:rPr>
+              <a:t>[Member 4]</a:t>
+            </a:r>
+            <a:endParaRPr lang="en-US" sz="1200" dirty="0"/>
           </a:p>
         </p:txBody>
       </p:sp>
-      <p:sp>
-        <p:nvSpPr>
-          <p:cNvPr id="11" name="Text 9"/>
+      <p:graphicFrame>
+        <p:nvGraphicFramePr>
+          <p:cNvPr id="5" name="Chart 0" descr=""/>
+          <p:cNvGraphicFramePr/>
+          <p:nvPr/>
+        </p:nvGraphicFramePr>
+        <p:xfrm>
+          <a:off x="548640" y="1325880"/>
+          <a:ext cx="4206240" cy="3566160"/>
+        </p:xfrm>
+        <a:graphic xmlns:a="http://schemas.openxmlformats.org/drawingml/2006/main">
+          <a:graphicData uri="http://schemas.openxmlformats.org/drawingml/2006/chart">
+            <c:chart xmlns:c="http://schemas.openxmlformats.org/drawingml/2006/chart" r:id="rId1"/>
+          </a:graphicData>
+        </a:graphic>
+      </p:graphicFrame>
+      <p:sp>
+        <p:nvSpPr>
+          <p:cNvPr id="6" name="Text 3"/>
           <p:cNvSpPr txBox="1"/>
           <p:nvPr/>
         </p:nvSpPr>
         <p:spPr>
           <a:xfrm>
-            <a:off x="6345936" y="2057400"/>
-            <a:ext cx="2286000" cy="2377440"/>
+            <a:off x="548640" y="4983480"/>
+            <a:ext cx="2011680" cy="640080"/>
+          </a:xfrm>
+          <a:prstGeom prst="rect">
+            <a:avLst/>
+          </a:prstGeom>
+          <a:noFill/>
+          <a:ln/>
+        </p:spPr>
+        <p:txBody>
+          <a:bodyPr wrap="square" lIns="0" tIns="0" rIns="0" bIns="0" rtlCol="0" anchor="ctr"/>
+          <a:lstStyle/>
+          <a:p>
+            <a:pPr indent="0" marL="0">
+              <a:buNone/>
+            </a:pPr>
+            <a:r>
+              <a:rPr lang="en-US" sz="3000" b="1" dirty="0">
+                <a:solidFill>
+                  <a:srgbClr val="4F46E5"/>
+                </a:solidFill>
+                <a:latin typeface="Cambria" pitchFamily="34" charset="0"/>
+                <a:ea typeface="Cambria" pitchFamily="34" charset="-122"/>
+                <a:cs typeface="Cambria" pitchFamily="34" charset="-120"/>
+              </a:rPr>
+              <a:t>2,434×</a:t>
+            </a:r>
+            <a:endParaRPr lang="en-US" sz="3000" dirty="0"/>
+          </a:p>
+        </p:txBody>
+      </p:sp>
+      <p:sp>
+        <p:nvSpPr>
+          <p:cNvPr id="7" name="Text 4"/>
+          <p:cNvSpPr txBox="1"/>
+          <p:nvPr/>
+        </p:nvSpPr>
+        <p:spPr>
+          <a:xfrm>
+            <a:off x="548640" y="5641848"/>
+            <a:ext cx="2011680" cy="457200"/>
           </a:xfrm>
           <a:prstGeom prst="rect">
             <a:avLst/>
@@ -11344,39 +14316,114 @@
               <a:buNone/>
             </a:pPr>
             <a:r>
-              <a:rPr lang="en-US" sz="1400" dirty="0">
-                <a:solidFill>
-                  <a:srgbClr val="CBD5E1"/>
-                </a:solidFill>
-              </a:rPr>
-              <a:t>Declare before you code: CHECK, composite FKs and EXCLUDE reject bad data even if the app is bypassed.</a:t>
-            </a:r>
-            <a:endParaRPr lang="en-US" sz="1400" dirty="0"/>
+              <a:rPr lang="en-US" sz="1250" dirty="0">
+                <a:solidFill>
+                  <a:srgbClr val="6B7280"/>
+                </a:solidFill>
+              </a:rPr>
+              <a:t>faster: composite B-tree</a:t>
+            </a:r>
+            <a:endParaRPr lang="en-US" sz="1250" dirty="0"/>
           </a:p>
         </p:txBody>
       </p:sp>
       <p:sp>
         <p:nvSpPr>
-          <p:cNvPr id="12" name="Shape 10"/>
+          <p:cNvPr id="8" name="Text 5"/>
+          <p:cNvSpPr txBox="1"/>
+          <p:nvPr/>
+        </p:nvSpPr>
+        <p:spPr>
+          <a:xfrm>
+            <a:off x="2651760" y="4983480"/>
+            <a:ext cx="2103120" cy="640080"/>
+          </a:xfrm>
+          <a:prstGeom prst="rect">
+            <a:avLst/>
+          </a:prstGeom>
+          <a:noFill/>
+          <a:ln/>
+        </p:spPr>
+        <p:txBody>
+          <a:bodyPr wrap="square" lIns="0" tIns="0" rIns="0" bIns="0" rtlCol="0" anchor="ctr"/>
+          <a:lstStyle/>
+          <a:p>
+            <a:pPr indent="0" marL="0">
+              <a:buNone/>
+            </a:pPr>
+            <a:r>
+              <a:rPr lang="en-US" sz="3000" b="1" dirty="0">
+                <a:solidFill>
+                  <a:srgbClr val="0F766E"/>
+                </a:solidFill>
+                <a:latin typeface="Cambria" pitchFamily="34" charset="0"/>
+                <a:ea typeface="Cambria" pitchFamily="34" charset="-122"/>
+                <a:cs typeface="Cambria" pitchFamily="34" charset="-120"/>
+              </a:rPr>
+              <a:t>26×</a:t>
+            </a:r>
+            <a:endParaRPr lang="en-US" sz="3000" dirty="0"/>
+          </a:p>
+        </p:txBody>
+      </p:sp>
+      <p:sp>
+        <p:nvSpPr>
+          <p:cNvPr id="9" name="Text 6"/>
+          <p:cNvSpPr txBox="1"/>
+          <p:nvPr/>
+        </p:nvSpPr>
+        <p:spPr>
+          <a:xfrm>
+            <a:off x="2651760" y="5641848"/>
+            <a:ext cx="2103120" cy="457200"/>
+          </a:xfrm>
+          <a:prstGeom prst="rect">
+            <a:avLst/>
+          </a:prstGeom>
+          <a:noFill/>
+          <a:ln/>
+        </p:spPr>
+        <p:txBody>
+          <a:bodyPr wrap="square" lIns="0" tIns="0" rIns="0" bIns="0" rtlCol="0" anchor="t"/>
+          <a:lstStyle/>
+          <a:p>
+            <a:pPr indent="0" marL="0">
+              <a:buNone/>
+            </a:pPr>
+            <a:r>
+              <a:rPr lang="en-US" sz="1250" dirty="0">
+                <a:solidFill>
+                  <a:srgbClr val="6B7280"/>
+                </a:solidFill>
+              </a:rPr>
+              <a:t>smaller: partial index</a:t>
+            </a:r>
+            <a:endParaRPr lang="en-US" sz="1250" dirty="0"/>
+          </a:p>
+        </p:txBody>
+      </p:sp>
+      <p:sp>
+        <p:nvSpPr>
+          <p:cNvPr id="10" name="Shape 7"/>
           <p:cNvSpPr/>
           <p:nvPr/>
         </p:nvSpPr>
         <p:spPr>
           <a:xfrm>
-            <a:off x="8924544" y="1417320"/>
-            <a:ext cx="2606040" cy="3108960"/>
+            <a:off x="5074920" y="1325880"/>
+            <a:ext cx="3429000" cy="4663440"/>
           </a:xfrm>
           <a:prstGeom prst="roundRect">
             <a:avLst>
-              <a:gd name="adj" fmla="val 3509"/>
+              <a:gd name="adj" fmla="val 2667"/>
             </a:avLst>
           </a:prstGeom>
           <a:solidFill>
-            <a:srgbClr val="1F2937"/>
+            <a:srgbClr val="F6F7FB"/>
           </a:solidFill>
           <a:ln w="12700">
             <a:solidFill>
-              <a:srgbClr val="374151"/>
+              <a:srgbClr val="E5E7EB"/>
             </a:solidFill>
             <a:prstDash val="solid"/>
           </a:ln>
@@ -11384,14 +14431,14 @@
       </p:sp>
       <p:sp>
         <p:nvSpPr>
-          <p:cNvPr id="13" name="Text 11"/>
+          <p:cNvPr id="11" name="Text 8"/>
           <p:cNvSpPr txBox="1"/>
           <p:nvPr/>
         </p:nvSpPr>
         <p:spPr>
           <a:xfrm>
-            <a:off x="9107424" y="1572768"/>
-            <a:ext cx="2286000" cy="365760"/>
+            <a:off x="5257800" y="1463040"/>
+            <a:ext cx="3108960" cy="365760"/>
           </a:xfrm>
           <a:prstGeom prst="rect">
             <a:avLst/>
@@ -11409,21 +14456,10 @@
             <a:r>
               <a:rPr lang="en-US" sz="1400" b="1" dirty="0">
                 <a:solidFill>
-                  <a:srgbClr val="A5B4FC"/>
-                </a:solidFill>
-              </a:rPr>
-              <a:t>M4  </a:t>
-            </a:r>
-            <a:pPr indent="0" marL="0">
-              <a:buNone/>
-            </a:pPr>
-            <a:r>
-              <a:rPr lang="en-US" sz="1400" b="1" dirty="0">
-                <a:solidFill>
-                  <a:srgbClr val="FFFFFF"/>
-                </a:solidFill>
-              </a:rPr>
-              <a:t>[Member 4]</a:t>
+                  <a:srgbClr val="1F2937"/>
+                </a:solidFill>
+              </a:rPr>
+              <a:t>SQL injection:  x' OR '1'='1</a:t>
             </a:r>
             <a:endParaRPr lang="en-US" sz="1400" dirty="0"/>
           </a:p>
@@ -11431,14 +14467,53 @@
       </p:sp>
       <p:sp>
         <p:nvSpPr>
-          <p:cNvPr id="14" name="Text 12"/>
+          <p:cNvPr id="12" name="Text 9"/>
           <p:cNvSpPr txBox="1"/>
           <p:nvPr/>
         </p:nvSpPr>
         <p:spPr>
           <a:xfrm>
-            <a:off x="9107424" y="2057400"/>
-            <a:ext cx="2286000" cy="2377440"/>
+            <a:off x="5257800" y="1965960"/>
+            <a:ext cx="1463040" cy="640080"/>
+          </a:xfrm>
+          <a:prstGeom prst="rect">
+            <a:avLst/>
+          </a:prstGeom>
+          <a:noFill/>
+          <a:ln/>
+        </p:spPr>
+        <p:txBody>
+          <a:bodyPr wrap="square" lIns="0" tIns="0" rIns="0" bIns="0" rtlCol="0" anchor="ctr"/>
+          <a:lstStyle/>
+          <a:p>
+            <a:pPr indent="0" marL="0">
+              <a:buNone/>
+            </a:pPr>
+            <a:r>
+              <a:rPr lang="en-US" sz="4000" b="1" dirty="0">
+                <a:solidFill>
+                  <a:srgbClr val="DC2626"/>
+                </a:solidFill>
+                <a:latin typeface="Cambria" pitchFamily="34" charset="0"/>
+                <a:ea typeface="Cambria" pitchFamily="34" charset="-122"/>
+                <a:cs typeface="Cambria" pitchFamily="34" charset="-120"/>
+              </a:rPr>
+              <a:t>180</a:t>
+            </a:r>
+            <a:endParaRPr lang="en-US" sz="4000" dirty="0"/>
+          </a:p>
+        </p:txBody>
+      </p:sp>
+      <p:sp>
+        <p:nvSpPr>
+          <p:cNvPr id="13" name="Text 10"/>
+          <p:cNvSpPr txBox="1"/>
+          <p:nvPr/>
+        </p:nvSpPr>
+        <p:spPr>
+          <a:xfrm>
+            <a:off x="5257800" y="2624328"/>
+            <a:ext cx="1463040" cy="457200"/>
           </a:xfrm>
           <a:prstGeom prst="rect">
             <a:avLst/>
@@ -11454,27 +14529,27 @@
               <a:buNone/>
             </a:pPr>
             <a:r>
-              <a:rPr lang="en-US" sz="1400" dirty="0">
-                <a:solidFill>
-                  <a:srgbClr val="CBD5E1"/>
-                </a:solidFill>
-              </a:rPr>
-              <a:t>Concurrency bugs stay invisible until tested: lock order turned a possible deadlock into a clean queue.</a:t>
-            </a:r>
-            <a:endParaRPr lang="en-US" sz="1400" dirty="0"/>
+              <a:rPr lang="en-US" sz="1250" dirty="0">
+                <a:solidFill>
+                  <a:srgbClr val="6B7280"/>
+                </a:solidFill>
+              </a:rPr>
+              <a:t>rows leaked by string concatenation</a:t>
+            </a:r>
+            <a:endParaRPr lang="en-US" sz="1250" dirty="0"/>
           </a:p>
         </p:txBody>
       </p:sp>
       <p:sp>
         <p:nvSpPr>
-          <p:cNvPr id="15" name="Text 13"/>
+          <p:cNvPr id="14" name="Text 11"/>
           <p:cNvSpPr txBox="1"/>
           <p:nvPr/>
         </p:nvSpPr>
         <p:spPr>
           <a:xfrm>
-            <a:off x="640080" y="4892040"/>
-            <a:ext cx="7315200" cy="731520"/>
+            <a:off x="6858000" y="1965960"/>
+            <a:ext cx="1463040" cy="640080"/>
           </a:xfrm>
           <a:prstGeom prst="rect">
             <a:avLst/>
@@ -11490,30 +14565,129 @@
               <a:buNone/>
             </a:pPr>
             <a:r>
-              <a:rPr lang="en-US" sz="3600" b="1" dirty="0">
-                <a:solidFill>
-                  <a:srgbClr val="FFFFFF"/>
+              <a:rPr lang="en-US" sz="4000" b="1" dirty="0">
+                <a:solidFill>
+                  <a:srgbClr val="0F766E"/>
                 </a:solidFill>
                 <a:latin typeface="Cambria" pitchFamily="34" charset="0"/>
                 <a:ea typeface="Cambria" pitchFamily="34" charset="-122"/>
                 <a:cs typeface="Cambria" pitchFamily="34" charset="-120"/>
               </a:rPr>
-              <a:t>Thank you. Questions?</a:t>
-            </a:r>
-            <a:endParaRPr lang="en-US" sz="3600" dirty="0"/>
+              <a:t>0</a:t>
+            </a:r>
+            <a:endParaRPr lang="en-US" sz="4000" dirty="0"/>
           </a:p>
         </p:txBody>
       </p:sp>
       <p:sp>
         <p:nvSpPr>
-          <p:cNvPr id="16" name="Text 14"/>
+          <p:cNvPr id="15" name="Text 12"/>
           <p:cNvSpPr txBox="1"/>
           <p:nvPr/>
         </p:nvSpPr>
         <p:spPr>
           <a:xfrm>
-            <a:off x="640080" y="5669280"/>
-            <a:ext cx="10058400" cy="365760"/>
+            <a:off x="6858000" y="2624328"/>
+            <a:ext cx="1463040" cy="457200"/>
+          </a:xfrm>
+          <a:prstGeom prst="rect">
+            <a:avLst/>
+          </a:prstGeom>
+          <a:noFill/>
+          <a:ln/>
+        </p:spPr>
+        <p:txBody>
+          <a:bodyPr wrap="square" lIns="0" tIns="0" rIns="0" bIns="0" rtlCol="0" anchor="t"/>
+          <a:lstStyle/>
+          <a:p>
+            <a:pPr indent="0" marL="0">
+              <a:buNone/>
+            </a:pPr>
+            <a:r>
+              <a:rPr lang="en-US" sz="1250" dirty="0">
+                <a:solidFill>
+                  <a:srgbClr val="6B7280"/>
+                </a:solidFill>
+              </a:rPr>
+              <a:t>rows with a bound parameter</a:t>
+            </a:r>
+            <a:endParaRPr lang="en-US" sz="1250" dirty="0"/>
+          </a:p>
+        </p:txBody>
+      </p:sp>
+      <p:sp>
+        <p:nvSpPr>
+          <p:cNvPr id="16" name="Text 13"/>
+          <p:cNvSpPr txBox="1"/>
+          <p:nvPr/>
+        </p:nvSpPr>
+        <p:spPr>
+          <a:xfrm>
+            <a:off x="5257800" y="3429000"/>
+            <a:ext cx="3108960" cy="1371600"/>
+          </a:xfrm>
+          <a:prstGeom prst="rect">
+            <a:avLst/>
+          </a:prstGeom>
+          <a:noFill/>
+          <a:ln/>
+        </p:spPr>
+        <p:txBody>
+          <a:bodyPr wrap="square" lIns="0" tIns="0" rIns="0" bIns="0" rtlCol="0" anchor="t"/>
+          <a:lstStyle/>
+          <a:p>
+            <a:pPr indent="0" marL="0">
+              <a:buNone/>
+            </a:pPr>
+            <a:r>
+              <a:rPr lang="en-US" sz="1300" dirty="0">
+                <a:solidFill>
+                  <a:srgbClr val="374151"/>
+                </a:solidFill>
+              </a:rPr>
+              <a:t>The unsafe path runs as a SELECT-only role in a READ ONLY transaction: DROP TABLE is refused.</a:t>
+            </a:r>
+            <a:endParaRPr lang="en-US" sz="1300" dirty="0"/>
+          </a:p>
+        </p:txBody>
+      </p:sp>
+      <p:sp>
+        <p:nvSpPr>
+          <p:cNvPr id="17" name="Shape 14"/>
+          <p:cNvSpPr/>
+          <p:nvPr/>
+        </p:nvSpPr>
+        <p:spPr>
+          <a:xfrm>
+            <a:off x="8778240" y="1325880"/>
+            <a:ext cx="2880360" cy="4663440"/>
+          </a:xfrm>
+          <a:prstGeom prst="roundRect">
+            <a:avLst>
+              <a:gd name="adj" fmla="val 3175"/>
+            </a:avLst>
+          </a:prstGeom>
+          <a:solidFill>
+            <a:srgbClr val="E6F6F3"/>
+          </a:solidFill>
+          <a:ln w="12700">
+            <a:solidFill>
+              <a:srgbClr val="E6F6F3"/>
+            </a:solidFill>
+            <a:prstDash val="solid"/>
+          </a:ln>
+        </p:spPr>
+      </p:sp>
+      <p:sp>
+        <p:nvSpPr>
+          <p:cNvPr id="18" name="Text 15"/>
+          <p:cNvSpPr txBox="1"/>
+          <p:nvPr/>
+        </p:nvSpPr>
+        <p:spPr>
+          <a:xfrm>
+            <a:off x="8961120" y="1508760"/>
+            <a:ext cx="2560320" cy="822960"/>
           </a:xfrm>
           <a:prstGeom prst="rect">
             <a:avLst/>
@@ -11529,14 +14703,101 @@
               <a:buNone/>
             </a:pPr>
             <a:r>
-              <a:rPr lang="en-US" sz="1400" dirty="0">
-                <a:solidFill>
-                  <a:srgbClr val="94A3B8"/>
-                </a:solidFill>
-              </a:rPr>
-              <a:t>github.com/EktaSharma-github/placeiq   ·   schema, data, queries, tests and the web UI</a:t>
-            </a:r>
-            <a:endParaRPr lang="en-US" sz="1400" dirty="0"/>
+              <a:rPr lang="en-US" sz="4000" b="1" dirty="0">
+                <a:solidFill>
+                  <a:srgbClr val="0F766E"/>
+                </a:solidFill>
+                <a:latin typeface="Cambria" pitchFamily="34" charset="0"/>
+                <a:ea typeface="Cambria" pitchFamily="34" charset="-122"/>
+                <a:cs typeface="Cambria" pitchFamily="34" charset="-120"/>
+              </a:rPr>
+              <a:t>91 / 91</a:t>
+            </a:r>
+            <a:endParaRPr lang="en-US" sz="4000" dirty="0"/>
+          </a:p>
+        </p:txBody>
+      </p:sp>
+      <p:sp>
+        <p:nvSpPr>
+          <p:cNvPr id="19" name="Text 16"/>
+          <p:cNvSpPr txBox="1"/>
+          <p:nvPr/>
+        </p:nvSpPr>
+        <p:spPr>
+          <a:xfrm>
+            <a:off x="8961120" y="2377440"/>
+            <a:ext cx="2560320" cy="2011680"/>
+          </a:xfrm>
+          <a:prstGeom prst="rect">
+            <a:avLst/>
+          </a:prstGeom>
+          <a:noFill/>
+          <a:ln/>
+        </p:spPr>
+        <p:txBody>
+          <a:bodyPr wrap="square" lIns="0" tIns="0" rIns="0" bIns="0" rtlCol="0" anchor="t"/>
+          <a:lstStyle/>
+          <a:p>
+            <a:pPr indent="0" marL="0">
+              <a:buNone/>
+            </a:pPr>
+            <a:r>
+              <a:rPr lang="en-US" sz="1300" dirty="0">
+                <a:solidFill>
+                  <a:srgbClr val="374151"/>
+                </a:solidFill>
+              </a:rPr>
+              <a:t>automated tests pass against the real database: constraints, triggers, queries, concurrency, performance, security, API</a:t>
+            </a:r>
+            <a:endParaRPr lang="en-US" sz="1300" dirty="0"/>
+          </a:p>
+        </p:txBody>
+      </p:sp>
+      <p:sp>
+        <p:nvSpPr>
+          <p:cNvPr id="25" name="Slide Number Placeholder 0"/>
+          <p:cNvSpPr>
+            <a:spLocks noGrp="1"/>
+          </p:cNvSpPr>
+          <p:nvPr>
+            <p:ph type="sldNum" sz="quarter" idx="4294967295"/>
+          </p:nvPr>
+        </p:nvSpPr>
+        <p:spPr>
+          <a:xfrm>
+            <a:off x="11201400" y="6419088"/>
+            <a:ext cx="457200" cy="274320"/>
+          </a:xfrm>
+          <a:prstGeom prst="rect">
+            <a:avLst/>
+          </a:prstGeom>
+          <a:extLst>
+            <a:ext uri="{C572A759-6A51-4108-AA02-DFA0A04FC94B}">
+              <ma14:wrappingTextBoxFlag xmlns:ma14="http://schemas.microsoft.com/office/mac/drawingml/2011/main" val="0"/>
+            </a:ext>
+          </a:extLst>
+        </p:spPr>
+        <p:txBody>
+          <a:bodyPr/>
+          <a:lstStyle>
+            <a:lvl1pPr>
+              <a:defRPr sz="1000">
+                <a:solidFill>
+                  <a:srgbClr val="6B7280"/>
+                </a:solidFill>
+                <a:latin typeface="Calibri"/>
+                <a:ea typeface="Calibri"/>
+                <a:cs typeface="Calibri"/>
+              </a:defRPr>
+            </a:lvl1pPr>
+          </a:lstStyle>
+          <a:p>
+            <a:pPr algn="r"/>
+            <a:fld id="{F7021451-1387-4CA6-816F-3879F97B5CBC}" type="slidenum">
+              <a:rPr b="0" lang="en-US"/>
+              <a:t>19</a:t>
+            </a:fld>
+            <a:endParaRPr lang="en-US"/>
           </a:p>
         </p:txBody>
       </p:sp>
@@ -11870,7 +15131,7 @@
                   <a:srgbClr val="6B7280"/>
                 </a:solidFill>
               </a:rPr>
-              <a:t>0:00 – 3:45</a:t>
+              <a:t>0:00 – 3:15</a:t>
             </a:r>
             <a:endParaRPr lang="en-US" sz="1300" dirty="0"/>
           </a:p>
@@ -12106,7 +15367,7 @@
                   <a:srgbClr val="4F46E5"/>
                 </a:solidFill>
               </a:rPr>
-              <a:t>Schema &amp; normalization</a:t>
+              <a:t>Schema, normalization &amp; DDL</a:t>
             </a:r>
             <a:endParaRPr lang="en-US" sz="1400" dirty="0"/>
           </a:p>
@@ -12142,7 +15403,7 @@
                   <a:srgbClr val="6B7280"/>
                 </a:solidFill>
               </a:rPr>
-              <a:t>3:45 – 7:30</a:t>
+              <a:t>3:15 – 7:00</a:t>
             </a:r>
             <a:endParaRPr lang="en-US" sz="1300" dirty="0"/>
           </a:p>
@@ -12182,7 +15443,7 @@
                   <a:srgbClr val="374151"/>
                 </a:solidFill>
               </a:rPr>
-              <a:t>EER → relational mapping</a:t>
+              <a:t>EER → relational mapping, keys</a:t>
             </a:r>
             <a:endParaRPr lang="en-US" sz="1350" dirty="0"/>
           </a:p>
@@ -12200,7 +15461,7 @@
                   <a:srgbClr val="374151"/>
                 </a:solidFill>
               </a:rPr>
-              <a:t>Keys: super, candidate, alternate, foreign</a:t>
+              <a:t>FDs, 1NF → BCNF, lossless &amp; dependency-preserving</a:t>
             </a:r>
             <a:endParaRPr lang="en-US" sz="1350" dirty="0"/>
           </a:p>
@@ -12218,7 +15479,7 @@
                   <a:srgbClr val="374151"/>
                 </a:solidFill>
               </a:rPr>
-              <a:t>FDs, 1NF → BCNF, lossless &amp; dependency-preserving</a:t>
+              <a:t>DDL: constraints as rules</a:t>
             </a:r>
             <a:endParaRPr lang="en-US" sz="1350" dirty="0"/>
           </a:p>
@@ -12378,7 +15639,7 @@
                   <a:srgbClr val="4F46E5"/>
                 </a:solidFill>
               </a:rPr>
-              <a:t>DDL, data &amp; queries</a:t>
+              <a:t>SQL queries &amp; rules</a:t>
             </a:r>
             <a:endParaRPr lang="en-US" sz="1400" dirty="0"/>
           </a:p>
@@ -12414,7 +15675,7 @@
                   <a:srgbClr val="6B7280"/>
                 </a:solidFill>
               </a:rPr>
-              <a:t>7:30 – 11:15</a:t>
+              <a:t>7:00 – 10:30</a:t>
             </a:r>
             <a:endParaRPr lang="en-US" sz="1300" dirty="0"/>
           </a:p>
@@ -12454,7 +15715,7 @@
                   <a:srgbClr val="374151"/>
                 </a:solidFill>
               </a:rPr>
-              <a:t>DDL: constraints as rules</a:t>
+              <a:t>Seeded, reproducible data</a:t>
             </a:r>
             <a:endParaRPr lang="en-US" sz="1350" dirty="0"/>
           </a:p>
@@ -12472,7 +15733,7 @@
                   <a:srgbClr val="374151"/>
                 </a:solidFill>
               </a:rPr>
-              <a:t>Seeded, reproducible data</a:t>
+              <a:t>Five queries: division, windows, HAVING</a:t>
             </a:r>
             <a:endParaRPr lang="en-US" sz="1350" dirty="0"/>
           </a:p>
@@ -12490,7 +15751,7 @@
                   <a:srgbClr val="374151"/>
                 </a:solidFill>
               </a:rPr>
-              <a:t>Five advanced queries: division, windows, HAVING</a:t>
+              <a:t>Triggers &amp; live demo</a:t>
             </a:r>
             <a:endParaRPr lang="en-US" sz="1350" dirty="0"/>
           </a:p>
@@ -12650,7 +15911,7 @@
                   <a:srgbClr val="4F46E5"/>
                 </a:solidFill>
               </a:rPr>
-              <a:t>Rules, transactions &amp; performance</a:t>
+              <a:t>Analytics &amp; performance</a:t>
             </a:r>
             <a:endParaRPr lang="en-US" sz="1400" dirty="0"/>
           </a:p>
@@ -12686,7 +15947,7 @@
                   <a:srgbClr val="6B7280"/>
                 </a:solidFill>
               </a:rPr>
-              <a:t>11:15 – 15:00</a:t>
+              <a:t>10:30 – 15:00</a:t>
             </a:r>
             <a:endParaRPr lang="en-US" sz="1300" dirty="0"/>
           </a:p>
@@ -12726,7 +15987,7 @@
                   <a:srgbClr val="374151"/>
                 </a:solidFill>
               </a:rPr>
-              <a:t>Triggers &amp; stored procedures</a:t>
+              <a:t>Statistics in SQL</a:t>
             </a:r>
             <a:endParaRPr lang="en-US" sz="1350" dirty="0"/>
           </a:p>
@@ -12744,7 +16005,7 @@
                   <a:srgbClr val="374151"/>
                 </a:solidFill>
               </a:rPr>
-              <a:t>Live demo, ACID &amp; concurrency</a:t>
+              <a:t>Feature engineering, k-means</a:t>
             </a:r>
             <a:endParaRPr lang="en-US" sz="1350" dirty="0"/>
           </a:p>
@@ -12762,7 +16023,7 @@
                   <a:srgbClr val="374151"/>
                 </a:solidFill>
               </a:rPr>
-              <a:t>Indexing, SQL injection, testing, learnings</a:t>
+              <a:t>Segments back in the DB; indexing, security</a:t>
             </a:r>
             <a:endParaRPr lang="en-US" sz="1350" dirty="0"/>
           </a:p>
@@ -12813,6 +16074,585 @@
               <a:t>2</a:t>
             </a:fld>
             <a:endParaRPr lang="en-US"/>
+          </a:p>
+        </p:txBody>
+      </p:sp>
+    </p:spTree>
+  </p:cSld>
+  <p:clrMapOvr>
+    <a:masterClrMapping/>
+  </p:clrMapOvr>
+</p:sld>
+</file>
+
+<file path=ppt/slides/slide20.xml><?xml version="1.0" encoding="utf-8"?>
+<p:sld xmlns:a="http://schemas.openxmlformats.org/drawingml/2006/main" xmlns:r="http://schemas.openxmlformats.org/officeDocument/2006/relationships" xmlns:p="http://schemas.openxmlformats.org/presentationml/2006/main">
+  <p:cSld name="Slide 20">
+    <p:spTree>
+      <p:nvGrpSpPr>
+        <p:cNvPr id="1" name=""/>
+        <p:cNvGrpSpPr/>
+        <p:nvPr/>
+      </p:nvGrpSpPr>
+      <p:grpSpPr>
+        <a:xfrm>
+          <a:off x="0" y="0"/>
+          <a:ext cx="0" cy="0"/>
+          <a:chOff x="0" y="0"/>
+          <a:chExt cx="0" cy="0"/>
+        </a:xfrm>
+      </p:grpSpPr>
+      <p:sp>
+        <p:nvSpPr>
+          <p:cNvPr id="2" name="Text 0"/>
+          <p:cNvSpPr txBox="1"/>
+          <p:nvPr/>
+        </p:nvSpPr>
+        <p:spPr>
+          <a:xfrm>
+            <a:off x="640080" y="411480"/>
+            <a:ext cx="8229600" cy="731520"/>
+          </a:xfrm>
+          <a:prstGeom prst="rect">
+            <a:avLst/>
+          </a:prstGeom>
+          <a:noFill/>
+          <a:ln/>
+        </p:spPr>
+        <p:txBody>
+          <a:bodyPr wrap="square" lIns="0" tIns="0" rIns="0" bIns="0" rtlCol="0" anchor="ctr"/>
+          <a:lstStyle/>
+          <a:p>
+            <a:pPr indent="0" marL="0">
+              <a:buNone/>
+            </a:pPr>
+            <a:r>
+              <a:rPr lang="en-US" sz="3200" b="1" dirty="0">
+                <a:solidFill>
+                  <a:srgbClr val="FFFFFF"/>
+                </a:solidFill>
+                <a:latin typeface="Cambria" pitchFamily="34" charset="0"/>
+                <a:ea typeface="Cambria" pitchFamily="34" charset="-122"/>
+                <a:cs typeface="Cambria" pitchFamily="34" charset="-120"/>
+              </a:rPr>
+              <a:t>What we learned</a:t>
+            </a:r>
+            <a:endParaRPr lang="en-US" sz="3200" dirty="0"/>
+          </a:p>
+        </p:txBody>
+      </p:sp>
+      <p:sp>
+        <p:nvSpPr>
+          <p:cNvPr id="3" name="Shape 1"/>
+          <p:cNvSpPr/>
+          <p:nvPr/>
+        </p:nvSpPr>
+        <p:spPr>
+          <a:xfrm>
+            <a:off x="640080" y="1417320"/>
+            <a:ext cx="2606040" cy="3108960"/>
+          </a:xfrm>
+          <a:prstGeom prst="roundRect">
+            <a:avLst>
+              <a:gd name="adj" fmla="val 3509"/>
+            </a:avLst>
+          </a:prstGeom>
+          <a:solidFill>
+            <a:srgbClr val="1F2937"/>
+          </a:solidFill>
+          <a:ln w="12700">
+            <a:solidFill>
+              <a:srgbClr val="374151"/>
+            </a:solidFill>
+            <a:prstDash val="solid"/>
+          </a:ln>
+        </p:spPr>
+      </p:sp>
+      <p:sp>
+        <p:nvSpPr>
+          <p:cNvPr id="4" name="Text 2"/>
+          <p:cNvSpPr txBox="1"/>
+          <p:nvPr/>
+        </p:nvSpPr>
+        <p:spPr>
+          <a:xfrm>
+            <a:off x="822960" y="1572768"/>
+            <a:ext cx="2286000" cy="365760"/>
+          </a:xfrm>
+          <a:prstGeom prst="rect">
+            <a:avLst/>
+          </a:prstGeom>
+          <a:noFill/>
+          <a:ln/>
+        </p:spPr>
+        <p:txBody>
+          <a:bodyPr wrap="square" lIns="0" tIns="0" rIns="0" bIns="0" rtlCol="0" anchor="ctr"/>
+          <a:lstStyle/>
+          <a:p>
+            <a:pPr indent="0" marL="0">
+              <a:buNone/>
+            </a:pPr>
+            <a:r>
+              <a:rPr lang="en-US" sz="1400" b="1" dirty="0">
+                <a:solidFill>
+                  <a:srgbClr val="A5B4FC"/>
+                </a:solidFill>
+              </a:rPr>
+              <a:t>M1  </a:t>
+            </a:r>
+            <a:pPr indent="0" marL="0">
+              <a:buNone/>
+            </a:pPr>
+            <a:r>
+              <a:rPr lang="en-US" sz="1400" b="1" dirty="0">
+                <a:solidFill>
+                  <a:srgbClr val="FFFFFF"/>
+                </a:solidFill>
+              </a:rPr>
+              <a:t>Ekta Sharma</a:t>
+            </a:r>
+            <a:endParaRPr lang="en-US" sz="1400" dirty="0"/>
+          </a:p>
+        </p:txBody>
+      </p:sp>
+      <p:sp>
+        <p:nvSpPr>
+          <p:cNvPr id="5" name="Text 3"/>
+          <p:cNvSpPr txBox="1"/>
+          <p:nvPr/>
+        </p:nvSpPr>
+        <p:spPr>
+          <a:xfrm>
+            <a:off x="822960" y="2057400"/>
+            <a:ext cx="2286000" cy="2377440"/>
+          </a:xfrm>
+          <a:prstGeom prst="rect">
+            <a:avLst/>
+          </a:prstGeom>
+          <a:noFill/>
+          <a:ln/>
+        </p:spPr>
+        <p:txBody>
+          <a:bodyPr wrap="square" lIns="0" tIns="0" rIns="0" bIns="0" rtlCol="0" anchor="t"/>
+          <a:lstStyle/>
+          <a:p>
+            <a:pPr indent="0" marL="0">
+              <a:buNone/>
+            </a:pPr>
+            <a:r>
+              <a:rPr lang="en-US" sz="1400" dirty="0">
+                <a:solidFill>
+                  <a:srgbClr val="CBD5E1"/>
+                </a:solidFill>
+              </a:rPr>
+              <a:t>Modelling decides everything downstream: treating the application as an aggregation is what made interview and offer integrity enforceable.</a:t>
+            </a:r>
+            <a:endParaRPr lang="en-US" sz="1400" dirty="0"/>
+          </a:p>
+        </p:txBody>
+      </p:sp>
+      <p:sp>
+        <p:nvSpPr>
+          <p:cNvPr id="6" name="Shape 4"/>
+          <p:cNvSpPr/>
+          <p:nvPr/>
+        </p:nvSpPr>
+        <p:spPr>
+          <a:xfrm>
+            <a:off x="3401568" y="1417320"/>
+            <a:ext cx="2606040" cy="3108960"/>
+          </a:xfrm>
+          <a:prstGeom prst="roundRect">
+            <a:avLst>
+              <a:gd name="adj" fmla="val 3509"/>
+            </a:avLst>
+          </a:prstGeom>
+          <a:solidFill>
+            <a:srgbClr val="1F2937"/>
+          </a:solidFill>
+          <a:ln w="12700">
+            <a:solidFill>
+              <a:srgbClr val="374151"/>
+            </a:solidFill>
+            <a:prstDash val="solid"/>
+          </a:ln>
+        </p:spPr>
+      </p:sp>
+      <p:sp>
+        <p:nvSpPr>
+          <p:cNvPr id="7" name="Text 5"/>
+          <p:cNvSpPr txBox="1"/>
+          <p:nvPr/>
+        </p:nvSpPr>
+        <p:spPr>
+          <a:xfrm>
+            <a:off x="3584448" y="1572768"/>
+            <a:ext cx="2286000" cy="365760"/>
+          </a:xfrm>
+          <a:prstGeom prst="rect">
+            <a:avLst/>
+          </a:prstGeom>
+          <a:noFill/>
+          <a:ln/>
+        </p:spPr>
+        <p:txBody>
+          <a:bodyPr wrap="square" lIns="0" tIns="0" rIns="0" bIns="0" rtlCol="0" anchor="ctr"/>
+          <a:lstStyle/>
+          <a:p>
+            <a:pPr indent="0" marL="0">
+              <a:buNone/>
+            </a:pPr>
+            <a:r>
+              <a:rPr lang="en-US" sz="1400" b="1" dirty="0">
+                <a:solidFill>
+                  <a:srgbClr val="A5B4FC"/>
+                </a:solidFill>
+              </a:rPr>
+              <a:t>M2  </a:t>
+            </a:r>
+            <a:pPr indent="0" marL="0">
+              <a:buNone/>
+            </a:pPr>
+            <a:r>
+              <a:rPr lang="en-US" sz="1400" b="1" dirty="0">
+                <a:solidFill>
+                  <a:srgbClr val="FFFFFF"/>
+                </a:solidFill>
+              </a:rPr>
+              <a:t>[Member 2]</a:t>
+            </a:r>
+            <a:endParaRPr lang="en-US" sz="1400" dirty="0"/>
+          </a:p>
+        </p:txBody>
+      </p:sp>
+      <p:sp>
+        <p:nvSpPr>
+          <p:cNvPr id="8" name="Text 6"/>
+          <p:cNvSpPr txBox="1"/>
+          <p:nvPr/>
+        </p:nvSpPr>
+        <p:spPr>
+          <a:xfrm>
+            <a:off x="3584448" y="2057400"/>
+            <a:ext cx="2286000" cy="2377440"/>
+          </a:xfrm>
+          <a:prstGeom prst="rect">
+            <a:avLst/>
+          </a:prstGeom>
+          <a:noFill/>
+          <a:ln/>
+        </p:spPr>
+        <p:txBody>
+          <a:bodyPr wrap="square" lIns="0" tIns="0" rIns="0" bIns="0" rtlCol="0" anchor="t"/>
+          <a:lstStyle/>
+          <a:p>
+            <a:pPr indent="0" marL="0">
+              <a:buNone/>
+            </a:pPr>
+            <a:r>
+              <a:rPr lang="en-US" sz="1400" dirty="0">
+                <a:solidFill>
+                  <a:srgbClr val="CBD5E1"/>
+                </a:solidFill>
+              </a:rPr>
+              <a:t>Normalization is a proof: writing every FD exposed the transitive dependency hiding in min_cgpa. Declared constraints then hold even if the app is bypassed.</a:t>
+            </a:r>
+            <a:endParaRPr lang="en-US" sz="1400" dirty="0"/>
+          </a:p>
+        </p:txBody>
+      </p:sp>
+      <p:sp>
+        <p:nvSpPr>
+          <p:cNvPr id="9" name="Shape 7"/>
+          <p:cNvSpPr/>
+          <p:nvPr/>
+        </p:nvSpPr>
+        <p:spPr>
+          <a:xfrm>
+            <a:off x="6163056" y="1417320"/>
+            <a:ext cx="2606040" cy="3108960"/>
+          </a:xfrm>
+          <a:prstGeom prst="roundRect">
+            <a:avLst>
+              <a:gd name="adj" fmla="val 3509"/>
+            </a:avLst>
+          </a:prstGeom>
+          <a:solidFill>
+            <a:srgbClr val="1F2937"/>
+          </a:solidFill>
+          <a:ln w="12700">
+            <a:solidFill>
+              <a:srgbClr val="374151"/>
+            </a:solidFill>
+            <a:prstDash val="solid"/>
+          </a:ln>
+        </p:spPr>
+      </p:sp>
+      <p:sp>
+        <p:nvSpPr>
+          <p:cNvPr id="10" name="Text 8"/>
+          <p:cNvSpPr txBox="1"/>
+          <p:nvPr/>
+        </p:nvSpPr>
+        <p:spPr>
+          <a:xfrm>
+            <a:off x="6345936" y="1572768"/>
+            <a:ext cx="2286000" cy="365760"/>
+          </a:xfrm>
+          <a:prstGeom prst="rect">
+            <a:avLst/>
+          </a:prstGeom>
+          <a:noFill/>
+          <a:ln/>
+        </p:spPr>
+        <p:txBody>
+          <a:bodyPr wrap="square" lIns="0" tIns="0" rIns="0" bIns="0" rtlCol="0" anchor="ctr"/>
+          <a:lstStyle/>
+          <a:p>
+            <a:pPr indent="0" marL="0">
+              <a:buNone/>
+            </a:pPr>
+            <a:r>
+              <a:rPr lang="en-US" sz="1400" b="1" dirty="0">
+                <a:solidFill>
+                  <a:srgbClr val="A5B4FC"/>
+                </a:solidFill>
+              </a:rPr>
+              <a:t>M3  </a:t>
+            </a:r>
+            <a:pPr indent="0" marL="0">
+              <a:buNone/>
+            </a:pPr>
+            <a:r>
+              <a:rPr lang="en-US" sz="1400" b="1" dirty="0">
+                <a:solidFill>
+                  <a:srgbClr val="FFFFFF"/>
+                </a:solidFill>
+              </a:rPr>
+              <a:t>[Member 3]</a:t>
+            </a:r>
+            <a:endParaRPr lang="en-US" sz="1400" dirty="0"/>
+          </a:p>
+        </p:txBody>
+      </p:sp>
+      <p:sp>
+        <p:nvSpPr>
+          <p:cNvPr id="11" name="Text 9"/>
+          <p:cNvSpPr txBox="1"/>
+          <p:nvPr/>
+        </p:nvSpPr>
+        <p:spPr>
+          <a:xfrm>
+            <a:off x="6345936" y="2057400"/>
+            <a:ext cx="2286000" cy="2377440"/>
+          </a:xfrm>
+          <a:prstGeom prst="rect">
+            <a:avLst/>
+          </a:prstGeom>
+          <a:noFill/>
+          <a:ln/>
+        </p:spPr>
+        <p:txBody>
+          <a:bodyPr wrap="square" lIns="0" tIns="0" rIns="0" bIns="0" rtlCol="0" anchor="t"/>
+          <a:lstStyle/>
+          <a:p>
+            <a:pPr indent="0" marL="0">
+              <a:buNone/>
+            </a:pPr>
+            <a:r>
+              <a:rPr lang="en-US" sz="1400" dirty="0">
+                <a:solidFill>
+                  <a:srgbClr val="CBD5E1"/>
+                </a:solidFill>
+              </a:rPr>
+              <a:t>Rules that span tables need triggers and transactions: lock order turned a possible deadlock into a clean queue.</a:t>
+            </a:r>
+            <a:endParaRPr lang="en-US" sz="1400" dirty="0"/>
+          </a:p>
+        </p:txBody>
+      </p:sp>
+      <p:sp>
+        <p:nvSpPr>
+          <p:cNvPr id="12" name="Shape 10"/>
+          <p:cNvSpPr/>
+          <p:nvPr/>
+        </p:nvSpPr>
+        <p:spPr>
+          <a:xfrm>
+            <a:off x="8924544" y="1417320"/>
+            <a:ext cx="2606040" cy="3108960"/>
+          </a:xfrm>
+          <a:prstGeom prst="roundRect">
+            <a:avLst>
+              <a:gd name="adj" fmla="val 3509"/>
+            </a:avLst>
+          </a:prstGeom>
+          <a:solidFill>
+            <a:srgbClr val="1F2937"/>
+          </a:solidFill>
+          <a:ln w="12700">
+            <a:solidFill>
+              <a:srgbClr val="374151"/>
+            </a:solidFill>
+            <a:prstDash val="solid"/>
+          </a:ln>
+        </p:spPr>
+      </p:sp>
+      <p:sp>
+        <p:nvSpPr>
+          <p:cNvPr id="13" name="Text 11"/>
+          <p:cNvSpPr txBox="1"/>
+          <p:nvPr/>
+        </p:nvSpPr>
+        <p:spPr>
+          <a:xfrm>
+            <a:off x="9107424" y="1572768"/>
+            <a:ext cx="2286000" cy="365760"/>
+          </a:xfrm>
+          <a:prstGeom prst="rect">
+            <a:avLst/>
+          </a:prstGeom>
+          <a:noFill/>
+          <a:ln/>
+        </p:spPr>
+        <p:txBody>
+          <a:bodyPr wrap="square" lIns="0" tIns="0" rIns="0" bIns="0" rtlCol="0" anchor="ctr"/>
+          <a:lstStyle/>
+          <a:p>
+            <a:pPr indent="0" marL="0">
+              <a:buNone/>
+            </a:pPr>
+            <a:r>
+              <a:rPr lang="en-US" sz="1400" b="1" dirty="0">
+                <a:solidFill>
+                  <a:srgbClr val="A5B4FC"/>
+                </a:solidFill>
+              </a:rPr>
+              <a:t>M4  </a:t>
+            </a:r>
+            <a:pPr indent="0" marL="0">
+              <a:buNone/>
+            </a:pPr>
+            <a:r>
+              <a:rPr lang="en-US" sz="1400" b="1" dirty="0">
+                <a:solidFill>
+                  <a:srgbClr val="FFFFFF"/>
+                </a:solidFill>
+              </a:rPr>
+              <a:t>[Member 4]</a:t>
+            </a:r>
+            <a:endParaRPr lang="en-US" sz="1400" dirty="0"/>
+          </a:p>
+        </p:txBody>
+      </p:sp>
+      <p:sp>
+        <p:nvSpPr>
+          <p:cNvPr id="14" name="Text 12"/>
+          <p:cNvSpPr txBox="1"/>
+          <p:nvPr/>
+        </p:nvSpPr>
+        <p:spPr>
+          <a:xfrm>
+            <a:off x="9107424" y="2057400"/>
+            <a:ext cx="2286000" cy="2377440"/>
+          </a:xfrm>
+          <a:prstGeom prst="rect">
+            <a:avLst/>
+          </a:prstGeom>
+          <a:noFill/>
+          <a:ln/>
+        </p:spPr>
+        <p:txBody>
+          <a:bodyPr wrap="square" lIns="0" tIns="0" rIns="0" bIns="0" rtlCol="0" anchor="t"/>
+          <a:lstStyle/>
+          <a:p>
+            <a:pPr indent="0" marL="0">
+              <a:buNone/>
+            </a:pPr>
+            <a:r>
+              <a:rPr lang="en-US" sz="1400" dirty="0">
+                <a:solidFill>
+                  <a:srgbClr val="CBD5E1"/>
+                </a:solidFill>
+              </a:rPr>
+              <a:t>Cluster on profile, judge on outcome: the segments found Selective Appliers, whom a CGPA cut-off would never flag.</a:t>
+            </a:r>
+            <a:endParaRPr lang="en-US" sz="1400" dirty="0"/>
+          </a:p>
+        </p:txBody>
+      </p:sp>
+      <p:sp>
+        <p:nvSpPr>
+          <p:cNvPr id="15" name="Text 13"/>
+          <p:cNvSpPr txBox="1"/>
+          <p:nvPr/>
+        </p:nvSpPr>
+        <p:spPr>
+          <a:xfrm>
+            <a:off x="640080" y="4892040"/>
+            <a:ext cx="7315200" cy="731520"/>
+          </a:xfrm>
+          <a:prstGeom prst="rect">
+            <a:avLst/>
+          </a:prstGeom>
+          <a:noFill/>
+          <a:ln/>
+        </p:spPr>
+        <p:txBody>
+          <a:bodyPr wrap="square" lIns="0" tIns="0" rIns="0" bIns="0" rtlCol="0" anchor="ctr"/>
+          <a:lstStyle/>
+          <a:p>
+            <a:pPr indent="0" marL="0">
+              <a:buNone/>
+            </a:pPr>
+            <a:r>
+              <a:rPr lang="en-US" sz="3600" b="1" dirty="0">
+                <a:solidFill>
+                  <a:srgbClr val="FFFFFF"/>
+                </a:solidFill>
+                <a:latin typeface="Cambria" pitchFamily="34" charset="0"/>
+                <a:ea typeface="Cambria" pitchFamily="34" charset="-122"/>
+                <a:cs typeface="Cambria" pitchFamily="34" charset="-120"/>
+              </a:rPr>
+              <a:t>Thank you. Questions?</a:t>
+            </a:r>
+            <a:endParaRPr lang="en-US" sz="3600" dirty="0"/>
+          </a:p>
+        </p:txBody>
+      </p:sp>
+      <p:sp>
+        <p:nvSpPr>
+          <p:cNvPr id="16" name="Text 14"/>
+          <p:cNvSpPr txBox="1"/>
+          <p:nvPr/>
+        </p:nvSpPr>
+        <p:spPr>
+          <a:xfrm>
+            <a:off x="640080" y="5669280"/>
+            <a:ext cx="10058400" cy="365760"/>
+          </a:xfrm>
+          <a:prstGeom prst="rect">
+            <a:avLst/>
+          </a:prstGeom>
+          <a:noFill/>
+          <a:ln/>
+        </p:spPr>
+        <p:txBody>
+          <a:bodyPr wrap="square" lIns="0" tIns="0" rIns="0" bIns="0" rtlCol="0" anchor="ctr"/>
+          <a:lstStyle/>
+          <a:p>
+            <a:pPr indent="0" marL="0">
+              <a:buNone/>
+            </a:pPr>
+            <a:r>
+              <a:rPr lang="en-US" sz="1400" dirty="0">
+                <a:solidFill>
+                  <a:srgbClr val="94A3B8"/>
+                </a:solidFill>
+              </a:rPr>
+              <a:t>github.com/EktaSharma-github/placeiq   ·   schema, data, queries, tests and the web UI</a:t>
+            </a:r>
+            <a:endParaRPr lang="en-US" sz="1400" dirty="0"/>
           </a:p>
         </p:txBody>
       </p:sp>
@@ -21189,7 +25029,7 @@
                   <a:srgbClr val="4F46E5"/>
                 </a:solidFill>
               </a:rPr>
-              <a:t>M3  </a:t>
+              <a:t>M2  </a:t>
             </a:r>
             <a:pPr algn="ctr" indent="0" marL="0">
               <a:buNone/>
@@ -21200,7 +25040,7 @@
                   <a:srgbClr val="312E81"/>
                 </a:solidFill>
               </a:rPr>
-              <a:t>[Member 3]</a:t>
+              <a:t>[Member 2]</a:t>
             </a:r>
             <a:endParaRPr lang="en-US" sz="1200" dirty="0"/>
           </a:p>
